--- a/FoodHouse_TAP_Academy_Project_Presentation.pptx
+++ b/FoodHouse_TAP_Academy_Project_Presentation.pptx
@@ -23,8 +23,8 @@
   <p:notesMasterIdLst>
     <p:notesMasterId r:id="rId16"/>
   </p:notesMasterIdLst>
-  <p:sldSz cx="9144000" cy="5143500"/>
-  <p:notesSz cx="5143500" cy="9144000"/>
+  <p:sldSz cx="12191695" cy="6858000"/>
+  <p:notesSz cx="6858000" cy="12191695"/>
   <p:defaultTextStyle>
     <a:lvl1pPr marL="0" algn="l" defTabSz="914400" rtl="0" eaLnBrk="1" latinLnBrk="0" hangingPunct="1">
       <a:defRPr sz="1800" kern="1200">
@@ -515,7 +515,7 @@
           <a:p>
             <a:r>
               <a:rPr lang="en-US" dirty="0"/>
-              <a:t>Good morning respected panel members. My project is FoodHouse, an end-to-end Java-based food ordering and delivery web application. It connects food lovers across Bangalore to 30 curated restaurants featuring 360 dishes, with real-time cart calculations and dynamic order tracking. Built strictly on Java Servlets, JSP, and MySQL without external frameworks, it is architected for speed, security, and enterprise reliability.</a:t>
+              <a:t>Good morning respected panel members. My project is FoodHouse, a Java-based food ordering web application developed using pure Core Java, Jakarta Servlets, JSP, and MySQL. It allows users across Bangalore to browse 30 dining establishments, explore 360 curated dishes, manage a shopping cart, and track order status transitions. Built strictly on core Java Web fundamentals without external frameworks, it demonstrates complete mastery of MVC architecture.</a:t>
             </a:r>
             <a:endParaRPr lang="en-US" dirty="0"/>
           </a:p>
@@ -603,7 +603,7 @@
           <a:p>
             <a:r>
               <a:rPr lang="en-US" dirty="0"/>
-              <a:t>After ordering, the user is redirected to the Order History and Live Tracking page. This page dynamically updates through 5 real-world stages: Confirmed, Kitchen Accepted, Food Ready, On The Way, and Delivered. Driven by our `OrderLifecycleManager`, customers can see their order journey with full transparency and timestamps.</a:t>
+              <a:t>After checkout, the user is redirected to OrderHistory.jsp. Driven by our OrderLifecycleManager, orders progress dynamically through 5 stages: Confirmed, Kitchen Accepted, Food Ready, On The Way, and Delivered, providing transparent order status tracking.</a:t>
             </a:r>
             <a:endParaRPr lang="en-US" dirty="0"/>
           </a:p>
@@ -691,7 +691,7 @@
           <a:p>
             <a:r>
               <a:rPr lang="en-US" dirty="0"/>
-              <a:t>Beyond standard base requirements, I implemented four major innovations: First, a finite state machine in `OrderLifecycleManager` providing dynamic order status updates. Second, enterprise BCrypt password hashing to eliminate plain-text passwords. Third, a zero-jump asynchronous menu cart interaction that prevents jarring screen reloads. And fourth, a dual Dark/Light mode theme engine. These elevate FoodHouse to an enterprise-grade standard.</a:t>
+              <a:t>Beyond standard base requirements, I implemented four key innovations: First, an Order Lifecycle Finite State Machine in OrderLifecycleManager simulating delivery milestones. Second, BCrypt password hashing for database security. Third, a zero-jump asynchronous menu cart interaction that prevents jarring page reloads. And fourth, a dual Dark/Light mode theme engine.</a:t>
             </a:r>
             <a:endParaRPr lang="en-US" dirty="0"/>
           </a:p>
@@ -779,7 +779,7 @@
           <a:p>
             <a:r>
               <a:rPr lang="en-US" dirty="0"/>
-              <a:t>For our core algorithm, I designed the `OrderLifecycleManager` finite state machine. Input: active order record and order timestamp. Processing: it computes elapsed time against configured milestone thresholds—2 minutes for Kitchen Acceptance, 5 minutes for Food Ready, 10 minutes for Dispatch, and 20 minutes for Delivery. Monotonic forward-only logic guarantees that terminal states like "Delivered" or "Cancelled" cannot regress. Output: updated status persisted atomically in MySQL via `OrderDAOImpl`.</a:t>
+              <a:t>For our core algorithm, I designed the OrderLifecycleManager finite state machine. Input: active order record and timestamp. Processing: it computes elapsed time against configured milestone thresholds—2 minutes for Kitchen Acceptance, 5 minutes for Food Ready, 10 minutes for Dispatch, and 20 minutes for Delivery. Monotonic forward-only logic guarantees that terminal states like Delivered cannot regress. Output: updated status persisted atomically in MySQL via OrderDAOImpl.</a:t>
             </a:r>
             <a:endParaRPr lang="en-US" dirty="0"/>
           </a:p>
@@ -867,7 +867,7 @@
           <a:p>
             <a:r>
               <a:rPr lang="en-US" dirty="0"/>
-              <a:t>The biggest challenge I faced was viewport scroll disorientation during menu interactions. When clicking "+ ADD" on bottom items, the standard form submission caused a full-page refresh, violently resetting scroll position to the top and disrupting user flow. Root cause: unintercepted form submissions and browser scroll reset. Solution: I re-engineered dish buttons with asynchronous fetch calls and scroll anchor preservation. Additionally, I resolved plain-text password security by creating `EncryptExistingUsers.java` to auto-migrate legacy records to BCrypt. We validated the fix using Microsoft Edge CDP automated tests.</a:t>
+              <a:t>The primary challenge I faced was viewport scroll disorientation during menu interactions. When clicking "+ ADD" on bottom items, the standard form submission caused a full-page refresh, resetting scroll position to zero. Root cause: default browser unload behavior on POST forms. Solution: I re-engineered dish buttons with asynchronous fetch calls and scroll anchor retention. Additionally, I resolved plain-text password security by creating EncryptExistingUsers.java to auto-migrate legacy records to BCrypt. We validated the fix using Microsoft Edge CDP automated tests.</a:t>
             </a:r>
             <a:endParaRPr lang="en-US" dirty="0"/>
           </a:p>
@@ -955,7 +955,7 @@
           <a:p>
             <a:r>
               <a:rPr lang="en-US" dirty="0"/>
-              <a:t>For the future roadmap, I have four realistic enhancements planned: first, integrating live payments via Razorpay; second, real-time GPS map tracking using Google Maps API; third, automated SMS and WhatsApp alerts via Twilio; and fourth, an executive analytics dashboard for restaurant managers with revenue and order heatmaps.</a:t>
+              <a:t>For the future roadmap, I have four realistic enhancements planned: first, integrating live payments via Razorpay; second, real-time GPS map tracking with Google Maps API; third, automated SMS and WhatsApp delivery alerts via Twilio; and fourth, an analytics dashboard for restaurant managers with revenue and order heatmaps.</a:t>
             </a:r>
             <a:endParaRPr lang="en-US" dirty="0"/>
           </a:p>
@@ -1043,7 +1043,7 @@
           <a:p>
             <a:r>
               <a:rPr lang="en-US" dirty="0"/>
-              <a:t>For the technology stack, I strictly adhered to core enterprise standards. The backend is built using Java 21 and Jakarta Servlets running on Apache Tomcat 10.1. For data persistence, I used MySQL 8.0 with JDBC PreparedStatements and transactions. The frontend uses JSP, modern CSS, and JavaScript. For security, I integrated jBCrypt password hashing. Notice that no heavy frameworks like Spring Boot or Hibernate are used, proving complete mastery of fundamental Java Web architecture.</a:t>
+              <a:t>For the technology stack, I strictly used the technologies implemented in the source code. The backend runs on Java 21 LTS and Jakarta Servlets 6.0 with Apache Tomcat 10.1. Data persistence is handled via MySQL 8.0 and JDBC with PreparedStatement parameterized queries. The frontend uses dynamic JSP, modern CSS, and JavaScript. Password security uses jBCrypt. Notice that no heavy frameworks like Spring Boot or Hibernate are used, verifying complete foundational competency.</a:t>
             </a:r>
             <a:endParaRPr lang="en-US" dirty="0"/>
           </a:p>
@@ -1131,7 +1131,7 @@
           <a:p>
             <a:r>
               <a:rPr lang="en-US" dirty="0"/>
-              <a:t>Here is the actual project structure directly from Eclipse. The project follows a clean separation of concerns: `com.tap.controller` contains 14 Servlets handling user actions; `com.tap.model` contains 7 POJOs; `com.tap.DAO` and `DAOImpl` provide decoupled database access; `com.tap.util` manages database connectivity and dynamic order lifecycle logic. The `webapp` directory holds our JSPs, CSS, and WEB-INF configuration.</a:t>
+              <a:t>This slide presents the authentic Eclipse Dynamic Web Project structure directly from our workspace. Following the MVC architecture: `com.tap.controller` contains 14 Servlets orchestrating HTTP requests; `com.tap.model` contains 7 POJOs; `com.tap.DAO` and `DAOImpl` provide decoupled database access; `com.tap.util` manages database connectivity and dynamic order lifecycle logic. The `src/main/webapp` folder houses all JSPs, CSS, and WEB-INF configuration.</a:t>
             </a:r>
             <a:endParaRPr lang="en-US" dirty="0"/>
           </a:p>
@@ -1219,7 +1219,7 @@
           <a:p>
             <a:r>
               <a:rPr lang="en-US" dirty="0"/>
-              <a:t>This is our database ER diagram with five normalized relational tables. The `user` table stores customer profiles with BCrypt hashed passwords. The `restaurant` table contains 30 dining establishments. The `menu` table holds 360 dishes linked via `restaurantId`. When an order is placed, an entry is created in `orders`, which branches into multiple `order_item` records capturing item quantities and line totals. All foreign keys enforce cascading deletes to guarantee referential integrity.</a:t>
+              <a:t>This is our database ER diagram with five normalized relational tables in MySQL. The `user` table stores customer credentials with BCrypt hashes. The `restaurant` table stores 30 outlets. The `menu` table holds 360 dishes mapped via `restaurantId`. When an order is placed, a record is created in `orders`, which branches into multiple `order_item` records capturing quantities and line totals. All foreign keys enforce cascading deletes to maintain referential integrity.</a:t>
             </a:r>
             <a:endParaRPr lang="en-US" dirty="0"/>
           </a:p>
@@ -1307,7 +1307,7 @@
           <a:p>
             <a:r>
               <a:rPr lang="en-US" dirty="0"/>
-              <a:t>Moving to our live application flow, this is the Home and Restaurant Discovery page rendered by `Restaurant.jsp`. It displays Bangalore's top 30 restaurants with live ratings, cuisine tags, and delivery estimates. Users can filter by location like Indiranagar or search dishes like Biryani and Pizza. Notice the fleet velocity bar at the top, allowing users to switch delivery speeds with real-time ETA recalculations.</a:t>
+              <a:t>Moving to our live application flow, this is the Home and Restaurant Discovery page rendered by `Restaurant.jsp`. It displays Bangalore restaurants with ratings, cuisine tags, and delivery estimates. Users can filter by location, search dishes by keyword, and adjust simulated delivery velocity.</a:t>
             </a:r>
             <a:endParaRPr lang="en-US" dirty="0"/>
           </a:p>
@@ -1395,7 +1395,7 @@
           <a:p>
             <a:r>
               <a:rPr lang="en-US" dirty="0"/>
-              <a:t>Next is our unified Authentication portal. Both login and registration are integrated cleanly into a single interactive view. On the backend, `LoginController` and `RegisterController` secure every credential using jBCrypt with cryptographic salt. Once authenticated, an `HttpSession` is initialized, binding the user's identity throughout cart modification and checkout.</a:t>
+              <a:t>Next is our unified Authentication portal. Login and registration are integrated into a single tabbed modal. LoginController and RegisterController secure every password using salted BCrypt. Once authenticated, an HttpSession is established, preserving the user identity through checkout.</a:t>
             </a:r>
             <a:endParaRPr lang="en-US" dirty="0"/>
           </a:p>
@@ -1483,7 +1483,7 @@
           <a:p>
             <a:r>
               <a:rPr lang="en-US" dirty="0"/>
-              <a:t>When a user clicks on a restaurant, `MenuController` loads the menu page. Here you see Meghana Foods with 12 authentic dishes. Each dish features real food photography, pricing, and veg/non-veg tags. Clicking "+ ADD" modifies the cart asynchronously without reloading the page or jumping the scroll, preserving user browsing context smoothly.</a:t>
+              <a:t>When a user selects a restaurant, MenuController loads Menu.jsp. Here you see Meghana Foods featuring 12 curated dishes with food photography, pricing, and veg/non-veg tags. Clicking "+ ADD" updates the cart asynchronously without page reloads or scroll jumps.</a:t>
             </a:r>
             <a:endParaRPr lang="en-US" dirty="0"/>
           </a:p>
@@ -1571,7 +1571,7 @@
           <a:p>
             <a:r>
               <a:rPr lang="en-US" dirty="0"/>
-              <a:t>In the Cart view, `Cart.java` calculates sub-totals, delivery charges, packaging fees, and taxes dynamically. Users can increment, decrement, or remove items with instant total updates. Cart data is maintained in the user session so no items are lost if they navigate back to add more food.</a:t>
+              <a:t>In Cart.jsp, our Cart model computes item subtotals, packaging charges, delivery fees, and taxes dynamically. Users can adjust quantities or remove items with instant total recalculation. Cart items are stored in the user session so nothing is lost while browsing.</a:t>
             </a:r>
             <a:endParaRPr lang="en-US" dirty="0"/>
           </a:p>
@@ -1659,7 +1659,7 @@
           <a:p>
             <a:r>
               <a:rPr lang="en-US" dirty="0"/>
-              <a:t>The Checkout page brings together the delivery address and payment method selection. Users can pick Cash on Delivery, UPI, or Card payments. When the user clicks "Place Order", `OrderController` creates an atomic transaction in MySQL, writing to the `orders` and `order_item` tables in a single atomic database commit.</a:t>
+              <a:t>The Checkout page brings together delivery address selection and payment mode choice. Users can pick Cash on Delivery, UPI, or Card payments. Placing an order triggers OrderController, which writes to both orders and order_item tables within an atomic database transaction.</a:t>
             </a:r>
             <a:endParaRPr lang="en-US" dirty="0"/>
           </a:p>
@@ -2040,8 +2040,8 @@
         </p:nvSpPr>
         <p:spPr>
           <a:xfrm>
-            <a:off x="731520" y="320040"/>
-            <a:ext cx="2011680" cy="256032"/>
+            <a:off x="731520" y="347472"/>
+            <a:ext cx="2286000" cy="274320"/>
           </a:xfrm>
           <a:prstGeom prst="roundRect">
             <a:avLst>
@@ -2067,8 +2067,8 @@
         </p:nvSpPr>
         <p:spPr>
           <a:xfrm>
-            <a:off x="731520" y="320040"/>
-            <a:ext cx="2011680" cy="256032"/>
+            <a:off x="731520" y="347472"/>
+            <a:ext cx="2286000" cy="274320"/>
           </a:xfrm>
           <a:prstGeom prst="rect">
             <a:avLst/>
@@ -2084,7 +2084,7 @@
               <a:buNone/>
             </a:pPr>
             <a:r>
-              <a:rPr lang="en-US" sz="900" b="1" dirty="0">
+              <a:rPr lang="en-US" sz="950" b="1" dirty="0">
                 <a:solidFill>
                   <a:srgbClr val="F4B942"/>
                 </a:solidFill>
@@ -2094,7 +2094,7 @@
               </a:rPr>
               <a:t>SECTION 1 • PROJECT INTRODUCTION</a:t>
             </a:r>
-            <a:endParaRPr lang="en-US" sz="900" dirty="0"/>
+            <a:endParaRPr lang="en-US" sz="950" dirty="0"/>
           </a:p>
         </p:txBody>
       </p:sp>
@@ -2106,8 +2106,8 @@
         </p:nvSpPr>
         <p:spPr>
           <a:xfrm>
-            <a:off x="9509760" y="320040"/>
-            <a:ext cx="1920240" cy="256032"/>
+            <a:off x="8961120" y="347472"/>
+            <a:ext cx="2468880" cy="274320"/>
           </a:xfrm>
           <a:prstGeom prst="roundRect">
             <a:avLst>
@@ -2133,8 +2133,8 @@
         </p:nvSpPr>
         <p:spPr>
           <a:xfrm>
-            <a:off x="9509760" y="320040"/>
-            <a:ext cx="1920240" cy="256032"/>
+            <a:off x="8961120" y="347472"/>
+            <a:ext cx="2468880" cy="274320"/>
           </a:xfrm>
           <a:prstGeom prst="rect">
             <a:avLst/>
@@ -2150,7 +2150,7 @@
               <a:buNone/>
             </a:pPr>
             <a:r>
-              <a:rPr lang="en-US" sz="850" b="1" dirty="0">
+              <a:rPr lang="en-US" sz="900" b="1" dirty="0">
                 <a:solidFill>
                   <a:srgbClr val="94A3B8"/>
                 </a:solidFill>
@@ -2160,7 +2160,7 @@
               </a:rPr>
               <a:t>TAP ACADEMY EVALUATION</a:t>
             </a:r>
-            <a:endParaRPr lang="en-US" sz="850" dirty="0"/>
+            <a:endParaRPr lang="en-US" sz="900" dirty="0"/>
           </a:p>
         </p:txBody>
       </p:sp>
@@ -2172,8 +2172,8 @@
         </p:nvSpPr>
         <p:spPr>
           <a:xfrm>
-            <a:off x="731520" y="658368"/>
-            <a:ext cx="10515600" cy="457200"/>
+            <a:off x="731520" y="713232"/>
+            <a:ext cx="10698480" cy="457200"/>
           </a:xfrm>
           <a:prstGeom prst="rect">
             <a:avLst/>
@@ -2197,7 +2197,7 @@
                 <a:ea typeface="Segoe UI" pitchFamily="34" charset="-122"/>
                 <a:cs typeface="Segoe UI" pitchFamily="34" charset="-120"/>
               </a:rPr>
-              <a:t>FoodHouse — Enterprise Food Ordering &amp; Delivery Platform</a:t>
+              <a:t>FoodHouse — Java Web Food Ordering Application</a:t>
             </a:r>
             <a:endParaRPr lang="en-US" sz="2200" dirty="0"/>
           </a:p>
@@ -2211,7 +2211,7 @@
         </p:nvSpPr>
         <p:spPr>
           <a:xfrm>
-            <a:off x="731520" y="1143000"/>
+            <a:off x="731520" y="1234440"/>
             <a:ext cx="10698480" cy="0"/>
           </a:xfrm>
           <a:prstGeom prst="line">
@@ -2234,12 +2234,12 @@
         </p:nvSpPr>
         <p:spPr>
           <a:xfrm>
-            <a:off x="731520" y="1371600"/>
-            <a:ext cx="10698480" cy="2011680"/>
+            <a:off x="731520" y="1417320"/>
+            <a:ext cx="10698480" cy="1828800"/>
           </a:xfrm>
           <a:prstGeom prst="roundRect">
             <a:avLst>
-              <a:gd name="adj" fmla="val 6818"/>
+              <a:gd name="adj" fmla="val 6000"/>
             </a:avLst>
           </a:prstGeom>
           <a:solidFill>
@@ -2261,8 +2261,8 @@
         </p:nvSpPr>
         <p:spPr>
           <a:xfrm>
-            <a:off x="1097280" y="1554480"/>
-            <a:ext cx="9601200" cy="274320"/>
+            <a:off x="1097280" y="1600200"/>
+            <a:ext cx="9966960" cy="274320"/>
           </a:xfrm>
           <a:prstGeom prst="rect">
             <a:avLst/>
@@ -2286,7 +2286,7 @@
                 <a:ea typeface="Segoe UI" pitchFamily="34" charset="-122"/>
                 <a:cs typeface="Segoe UI" pitchFamily="34" charset="-120"/>
               </a:rPr>
-              <a:t>Core Project Definition</a:t>
+              <a:t>PROJECT DEFINITION</a:t>
             </a:r>
             <a:endParaRPr lang="en-US" sz="1200" dirty="0"/>
           </a:p>
@@ -2300,8 +2300,8 @@
         </p:nvSpPr>
         <p:spPr>
           <a:xfrm>
-            <a:off x="1097280" y="1874520"/>
-            <a:ext cx="9966960" cy="1188720"/>
+            <a:off x="1097280" y="1965960"/>
+            <a:ext cx="9966960" cy="1097280"/>
           </a:xfrm>
           <a:prstGeom prst="rect">
             <a:avLst/>
@@ -2315,7 +2315,7 @@
           <a:p>
             <a:pPr indent="0" marL="0">
               <a:lnSpc>
-                <a:spcPts val="2600"/>
+                <a:spcPts val="2800"/>
               </a:lnSpc>
               <a:buNone/>
             </a:pPr>
@@ -2328,7 +2328,7 @@
                 <a:ea typeface="Segoe UI" pitchFamily="34" charset="-122"/>
                 <a:cs typeface="Segoe UI" pitchFamily="34" charset="-120"/>
               </a:rPr>
-              <a:t>"FoodHouse is a Java-based enterprise food ordering web application that allows users to explore restaurants, browse curated menus, manage an interactive real-time cart, and place food orders with dynamic live delivery tracking through a modern web interface."</a:t>
+              <a:t>"FoodHouse is a Java-based food ordering web application that allows users to explore local restaurants, browse dish menus, manage a shopping cart, and place food orders with simulated order status tracking through a web interface."</a:t>
             </a:r>
             <a:endParaRPr lang="en-US" sz="1800" dirty="0"/>
           </a:p>
@@ -2342,12 +2342,12 @@
         </p:nvSpPr>
         <p:spPr>
           <a:xfrm>
-            <a:off x="731520" y="3657600"/>
-            <a:ext cx="2468880" cy="2286000"/>
+            <a:off x="731520" y="3520440"/>
+            <a:ext cx="2468880" cy="2560320"/>
           </a:xfrm>
           <a:prstGeom prst="roundRect">
             <a:avLst>
-              <a:gd name="adj" fmla="val 4800"/>
+              <a:gd name="adj" fmla="val 4444"/>
             </a:avLst>
           </a:prstGeom>
           <a:solidFill>
@@ -2369,8 +2369,8 @@
         </p:nvSpPr>
         <p:spPr>
           <a:xfrm>
-            <a:off x="731520" y="3931920"/>
-            <a:ext cx="2468880" cy="640080"/>
+            <a:off x="731520" y="3794760"/>
+            <a:ext cx="2468880" cy="731520"/>
           </a:xfrm>
           <a:prstGeom prst="rect">
             <a:avLst/>
@@ -2386,7 +2386,7 @@
               <a:buNone/>
             </a:pPr>
             <a:r>
-              <a:rPr lang="en-US" sz="3600" b="1" dirty="0">
+              <a:rPr lang="en-US" sz="3800" b="1" dirty="0">
                 <a:solidFill>
                   <a:srgbClr val="FF6B35"/>
                 </a:solidFill>
@@ -2396,7 +2396,7 @@
               </a:rPr>
               <a:t>30</a:t>
             </a:r>
-            <a:endParaRPr lang="en-US" sz="3600" dirty="0"/>
+            <a:endParaRPr lang="en-US" sz="3800" dirty="0"/>
           </a:p>
         </p:txBody>
       </p:sp>
@@ -2408,8 +2408,8 @@
         </p:nvSpPr>
         <p:spPr>
           <a:xfrm>
-            <a:off x="914400" y="4663440"/>
-            <a:ext cx="2103120" cy="457200"/>
+            <a:off x="868680" y="4617720"/>
+            <a:ext cx="2194560" cy="457200"/>
           </a:xfrm>
           <a:prstGeom prst="rect">
             <a:avLst/>
@@ -2425,7 +2425,7 @@
               <a:buNone/>
             </a:pPr>
             <a:r>
-              <a:rPr lang="en-US" sz="1300" b="1" dirty="0">
+              <a:rPr lang="en-US" sz="1350" b="1" dirty="0">
                 <a:solidFill>
                   <a:srgbClr val="F8FAFC"/>
                 </a:solidFill>
@@ -2433,9 +2433,9 @@
                 <a:ea typeface="Segoe UI" pitchFamily="34" charset="-122"/>
                 <a:cs typeface="Segoe UI" pitchFamily="34" charset="-120"/>
               </a:rPr>
-              <a:t>Top Bangalore Restaurants</a:t>
-            </a:r>
-            <a:endParaRPr lang="en-US" sz="1300" dirty="0"/>
+              <a:t>Bangalore Restaurants</a:t>
+            </a:r>
+            <a:endParaRPr lang="en-US" sz="1350" dirty="0"/>
           </a:p>
         </p:txBody>
       </p:sp>
@@ -2447,8 +2447,8 @@
         </p:nvSpPr>
         <p:spPr>
           <a:xfrm>
-            <a:off x="914400" y="5212080"/>
-            <a:ext cx="2103120" cy="457200"/>
+            <a:off x="868680" y="5166360"/>
+            <a:ext cx="2194560" cy="640080"/>
           </a:xfrm>
           <a:prstGeom prst="rect">
             <a:avLst/>
@@ -2461,6 +2461,9 @@
           <a:lstStyle/>
           <a:p>
             <a:pPr algn="ctr" indent="0" marL="0">
+              <a:lnSpc>
+                <a:spcPts val="1600"/>
+              </a:lnSpc>
               <a:buNone/>
             </a:pPr>
             <a:r>
@@ -2472,7 +2475,7 @@
                 <a:ea typeface="Segoe UI" pitchFamily="34" charset="-122"/>
                 <a:cs typeface="Segoe UI" pitchFamily="34" charset="-120"/>
               </a:rPr>
-              <a:t>Indiranagar, Koramangala &amp; MG Rd</a:t>
+              <a:t>Indiranagar, Koramangala &amp; MG Road</a:t>
             </a:r>
             <a:endParaRPr lang="en-US" sz="1100" dirty="0"/>
           </a:p>
@@ -2486,12 +2489,12 @@
         </p:nvSpPr>
         <p:spPr>
           <a:xfrm>
-            <a:off x="3474720" y="3657600"/>
-            <a:ext cx="2468880" cy="2286000"/>
+            <a:off x="3474720" y="3520440"/>
+            <a:ext cx="2468880" cy="2560320"/>
           </a:xfrm>
           <a:prstGeom prst="roundRect">
             <a:avLst>
-              <a:gd name="adj" fmla="val 4800"/>
+              <a:gd name="adj" fmla="val 4444"/>
             </a:avLst>
           </a:prstGeom>
           <a:solidFill>
@@ -2513,8 +2516,8 @@
         </p:nvSpPr>
         <p:spPr>
           <a:xfrm>
-            <a:off x="3474720" y="3931920"/>
-            <a:ext cx="2468880" cy="640080"/>
+            <a:off x="3474720" y="3794760"/>
+            <a:ext cx="2468880" cy="731520"/>
           </a:xfrm>
           <a:prstGeom prst="rect">
             <a:avLst/>
@@ -2530,7 +2533,7 @@
               <a:buNone/>
             </a:pPr>
             <a:r>
-              <a:rPr lang="en-US" sz="3600" b="1" dirty="0">
+              <a:rPr lang="en-US" sz="3800" b="1" dirty="0">
                 <a:solidFill>
                   <a:srgbClr val="FF6B35"/>
                 </a:solidFill>
@@ -2540,7 +2543,7 @@
               </a:rPr>
               <a:t>360</a:t>
             </a:r>
-            <a:endParaRPr lang="en-US" sz="3600" dirty="0"/>
+            <a:endParaRPr lang="en-US" sz="3800" dirty="0"/>
           </a:p>
         </p:txBody>
       </p:sp>
@@ -2552,8 +2555,8 @@
         </p:nvSpPr>
         <p:spPr>
           <a:xfrm>
-            <a:off x="3657600" y="4663440"/>
-            <a:ext cx="2103120" cy="457200"/>
+            <a:off x="3611880" y="4617720"/>
+            <a:ext cx="2194560" cy="457200"/>
           </a:xfrm>
           <a:prstGeom prst="rect">
             <a:avLst/>
@@ -2569,7 +2572,7 @@
               <a:buNone/>
             </a:pPr>
             <a:r>
-              <a:rPr lang="en-US" sz="1300" b="1" dirty="0">
+              <a:rPr lang="en-US" sz="1350" b="1" dirty="0">
                 <a:solidFill>
                   <a:srgbClr val="F8FAFC"/>
                 </a:solidFill>
@@ -2577,9 +2580,9 @@
                 <a:ea typeface="Segoe UI" pitchFamily="34" charset="-122"/>
                 <a:cs typeface="Segoe UI" pitchFamily="34" charset="-120"/>
               </a:rPr>
-              <a:t>Curated Dishes Catalog</a:t>
-            </a:r>
-            <a:endParaRPr lang="en-US" sz="1300" dirty="0"/>
+              <a:t>Curated Menu Items</a:t>
+            </a:r>
+            <a:endParaRPr lang="en-US" sz="1350" dirty="0"/>
           </a:p>
         </p:txBody>
       </p:sp>
@@ -2591,8 +2594,8 @@
         </p:nvSpPr>
         <p:spPr>
           <a:xfrm>
-            <a:off x="3657600" y="5212080"/>
-            <a:ext cx="2103120" cy="457200"/>
+            <a:off x="3611880" y="5166360"/>
+            <a:ext cx="2194560" cy="640080"/>
           </a:xfrm>
           <a:prstGeom prst="rect">
             <a:avLst/>
@@ -2605,6 +2608,9 @@
           <a:lstStyle/>
           <a:p>
             <a:pPr algn="ctr" indent="0" marL="0">
+              <a:lnSpc>
+                <a:spcPts val="1600"/>
+              </a:lnSpc>
               <a:buNone/>
             </a:pPr>
             <a:r>
@@ -2616,7 +2622,7 @@
                 <a:ea typeface="Segoe UI" pitchFamily="34" charset="-122"/>
                 <a:cs typeface="Segoe UI" pitchFamily="34" charset="-120"/>
               </a:rPr>
-              <a:t>100% Photo-Matched Menus</a:t>
+              <a:t>12 Curated Dishes per Restaurant in MySQL</a:t>
             </a:r>
             <a:endParaRPr lang="en-US" sz="1100" dirty="0"/>
           </a:p>
@@ -2630,12 +2636,12 @@
         </p:nvSpPr>
         <p:spPr>
           <a:xfrm>
-            <a:off x="6217920" y="3657600"/>
-            <a:ext cx="2468880" cy="2286000"/>
+            <a:off x="6217920" y="3520440"/>
+            <a:ext cx="2468880" cy="2560320"/>
           </a:xfrm>
           <a:prstGeom prst="roundRect">
             <a:avLst>
-              <a:gd name="adj" fmla="val 4800"/>
+              <a:gd name="adj" fmla="val 4444"/>
             </a:avLst>
           </a:prstGeom>
           <a:solidFill>
@@ -2657,8 +2663,8 @@
         </p:nvSpPr>
         <p:spPr>
           <a:xfrm>
-            <a:off x="6217920" y="3931920"/>
-            <a:ext cx="2468880" cy="640080"/>
+            <a:off x="6217920" y="3794760"/>
+            <a:ext cx="2468880" cy="731520"/>
           </a:xfrm>
           <a:prstGeom prst="rect">
             <a:avLst/>
@@ -2674,7 +2680,7 @@
               <a:buNone/>
             </a:pPr>
             <a:r>
-              <a:rPr lang="en-US" sz="3600" b="1" dirty="0">
+              <a:rPr lang="en-US" sz="3800" b="1" dirty="0">
                 <a:solidFill>
                   <a:srgbClr val="FF6B35"/>
                 </a:solidFill>
@@ -2684,7 +2690,7 @@
               </a:rPr>
               <a:t>14</a:t>
             </a:r>
-            <a:endParaRPr lang="en-US" sz="3600" dirty="0"/>
+            <a:endParaRPr lang="en-US" sz="3800" dirty="0"/>
           </a:p>
         </p:txBody>
       </p:sp>
@@ -2696,8 +2702,8 @@
         </p:nvSpPr>
         <p:spPr>
           <a:xfrm>
-            <a:off x="6400800" y="4663440"/>
-            <a:ext cx="2103120" cy="457200"/>
+            <a:off x="6355080" y="4617720"/>
+            <a:ext cx="2194560" cy="457200"/>
           </a:xfrm>
           <a:prstGeom prst="rect">
             <a:avLst/>
@@ -2713,7 +2719,7 @@
               <a:buNone/>
             </a:pPr>
             <a:r>
-              <a:rPr lang="en-US" sz="1300" b="1" dirty="0">
+              <a:rPr lang="en-US" sz="1350" b="1" dirty="0">
                 <a:solidFill>
                   <a:srgbClr val="F8FAFC"/>
                 </a:solidFill>
@@ -2721,9 +2727,9 @@
                 <a:ea typeface="Segoe UI" pitchFamily="34" charset="-122"/>
                 <a:cs typeface="Segoe UI" pitchFamily="34" charset="-120"/>
               </a:rPr>
-              <a:t>Jakarta Servlets (MVC)</a:t>
-            </a:r>
-            <a:endParaRPr lang="en-US" sz="1300" dirty="0"/>
+              <a:t>Jakarta Servlets</a:t>
+            </a:r>
+            <a:endParaRPr lang="en-US" sz="1350" dirty="0"/>
           </a:p>
         </p:txBody>
       </p:sp>
@@ -2735,8 +2741,8 @@
         </p:nvSpPr>
         <p:spPr>
           <a:xfrm>
-            <a:off x="6400800" y="5212080"/>
-            <a:ext cx="2103120" cy="457200"/>
+            <a:off x="6355080" y="5166360"/>
+            <a:ext cx="2194560" cy="640080"/>
           </a:xfrm>
           <a:prstGeom prst="rect">
             <a:avLst/>
@@ -2749,6 +2755,9 @@
           <a:lstStyle/>
           <a:p>
             <a:pPr algn="ctr" indent="0" marL="0">
+              <a:lnSpc>
+                <a:spcPts val="1600"/>
+              </a:lnSpc>
               <a:buNone/>
             </a:pPr>
             <a:r>
@@ -2760,7 +2769,7 @@
                 <a:ea typeface="Segoe UI" pitchFamily="34" charset="-122"/>
                 <a:cs typeface="Segoe UI" pitchFamily="34" charset="-120"/>
               </a:rPr>
-              <a:t>Robust Controller Routing</a:t>
+              <a:t>Core MVC HTTP Controller Architecture</a:t>
             </a:r>
             <a:endParaRPr lang="en-US" sz="1100" dirty="0"/>
           </a:p>
@@ -2774,12 +2783,12 @@
         </p:nvSpPr>
         <p:spPr>
           <a:xfrm>
-            <a:off x="8961120" y="3657600"/>
-            <a:ext cx="2468880" cy="2286000"/>
+            <a:off x="8961120" y="3520440"/>
+            <a:ext cx="2468880" cy="2560320"/>
           </a:xfrm>
           <a:prstGeom prst="roundRect">
             <a:avLst>
-              <a:gd name="adj" fmla="val 4800"/>
+              <a:gd name="adj" fmla="val 4444"/>
             </a:avLst>
           </a:prstGeom>
           <a:solidFill>
@@ -2801,8 +2810,8 @@
         </p:nvSpPr>
         <p:spPr>
           <a:xfrm>
-            <a:off x="8961120" y="3931920"/>
-            <a:ext cx="2468880" cy="640080"/>
+            <a:off x="8961120" y="3794760"/>
+            <a:ext cx="2468880" cy="731520"/>
           </a:xfrm>
           <a:prstGeom prst="rect">
             <a:avLst/>
@@ -2818,7 +2827,7 @@
               <a:buNone/>
             </a:pPr>
             <a:r>
-              <a:rPr lang="en-US" sz="3600" b="1" dirty="0">
+              <a:rPr lang="en-US" sz="3800" b="1" dirty="0">
                 <a:solidFill>
                   <a:srgbClr val="FF6B35"/>
                 </a:solidFill>
@@ -2828,7 +2837,7 @@
               </a:rPr>
               <a:t>5</a:t>
             </a:r>
-            <a:endParaRPr lang="en-US" sz="3600" dirty="0"/>
+            <a:endParaRPr lang="en-US" sz="3800" dirty="0"/>
           </a:p>
         </p:txBody>
       </p:sp>
@@ -2840,8 +2849,8 @@
         </p:nvSpPr>
         <p:spPr>
           <a:xfrm>
-            <a:off x="9144000" y="4663440"/>
-            <a:ext cx="2103120" cy="457200"/>
+            <a:off x="9098280" y="4617720"/>
+            <a:ext cx="2194560" cy="457200"/>
           </a:xfrm>
           <a:prstGeom prst="rect">
             <a:avLst/>
@@ -2857,7 +2866,7 @@
               <a:buNone/>
             </a:pPr>
             <a:r>
-              <a:rPr lang="en-US" sz="1300" b="1" dirty="0">
+              <a:rPr lang="en-US" sz="1350" b="1" dirty="0">
                 <a:solidFill>
                   <a:srgbClr val="F8FAFC"/>
                 </a:solidFill>
@@ -2865,9 +2874,9 @@
                 <a:ea typeface="Segoe UI" pitchFamily="34" charset="-122"/>
                 <a:cs typeface="Segoe UI" pitchFamily="34" charset="-120"/>
               </a:rPr>
-              <a:t>Core Relational Tables</a:t>
-            </a:r>
-            <a:endParaRPr lang="en-US" sz="1300" dirty="0"/>
+              <a:t>Relational Tables</a:t>
+            </a:r>
+            <a:endParaRPr lang="en-US" sz="1350" dirty="0"/>
           </a:p>
         </p:txBody>
       </p:sp>
@@ -2879,8 +2888,8 @@
         </p:nvSpPr>
         <p:spPr>
           <a:xfrm>
-            <a:off x="9144000" y="5212080"/>
-            <a:ext cx="2103120" cy="457200"/>
+            <a:off x="9098280" y="5166360"/>
+            <a:ext cx="2194560" cy="640080"/>
           </a:xfrm>
           <a:prstGeom prst="rect">
             <a:avLst/>
@@ -2893,6 +2902,9 @@
           <a:lstStyle/>
           <a:p>
             <a:pPr algn="ctr" indent="0" marL="0">
+              <a:lnSpc>
+                <a:spcPts val="1600"/>
+              </a:lnSpc>
               <a:buNone/>
             </a:pPr>
             <a:r>
@@ -2904,7 +2916,7 @@
                 <a:ea typeface="Segoe UI" pitchFamily="34" charset="-122"/>
                 <a:cs typeface="Segoe UI" pitchFamily="34" charset="-120"/>
               </a:rPr>
-              <a:t>MySQL InnoDB with Cascade</a:t>
+              <a:t>MySQL 8.0 InnoDB with Foreign Keys</a:t>
             </a:r>
             <a:endParaRPr lang="en-US" sz="1100" dirty="0"/>
           </a:p>
@@ -2950,8 +2962,8 @@
         </p:nvSpPr>
         <p:spPr>
           <a:xfrm>
-            <a:off x="731520" y="320040"/>
-            <a:ext cx="2011680" cy="256032"/>
+            <a:off x="731520" y="347472"/>
+            <a:ext cx="2286000" cy="274320"/>
           </a:xfrm>
           <a:prstGeom prst="roundRect">
             <a:avLst>
@@ -2977,8 +2989,8 @@
         </p:nvSpPr>
         <p:spPr>
           <a:xfrm>
-            <a:off x="731520" y="320040"/>
-            <a:ext cx="2011680" cy="256032"/>
+            <a:off x="731520" y="347472"/>
+            <a:ext cx="2286000" cy="274320"/>
           </a:xfrm>
           <a:prstGeom prst="rect">
             <a:avLst/>
@@ -2994,7 +3006,7 @@
               <a:buNone/>
             </a:pPr>
             <a:r>
-              <a:rPr lang="en-US" sz="900" b="1" dirty="0">
+              <a:rPr lang="en-US" sz="950" b="1" dirty="0">
                 <a:solidFill>
                   <a:srgbClr val="F4B942"/>
                 </a:solidFill>
@@ -3004,7 +3016,7 @@
               </a:rPr>
               <a:t>SECTION 5 • PAGE SCREENSHOTS (6/6)</a:t>
             </a:r>
-            <a:endParaRPr lang="en-US" sz="900" dirty="0"/>
+            <a:endParaRPr lang="en-US" sz="950" dirty="0"/>
           </a:p>
         </p:txBody>
       </p:sp>
@@ -3016,8 +3028,8 @@
         </p:nvSpPr>
         <p:spPr>
           <a:xfrm>
-            <a:off x="9509760" y="320040"/>
-            <a:ext cx="1920240" cy="256032"/>
+            <a:off x="8961120" y="347472"/>
+            <a:ext cx="2468880" cy="274320"/>
           </a:xfrm>
           <a:prstGeom prst="roundRect">
             <a:avLst>
@@ -3043,8 +3055,8 @@
         </p:nvSpPr>
         <p:spPr>
           <a:xfrm>
-            <a:off x="9509760" y="320040"/>
-            <a:ext cx="1920240" cy="256032"/>
+            <a:off x="8961120" y="347472"/>
+            <a:ext cx="2468880" cy="274320"/>
           </a:xfrm>
           <a:prstGeom prst="rect">
             <a:avLst/>
@@ -3060,7 +3072,7 @@
               <a:buNone/>
             </a:pPr>
             <a:r>
-              <a:rPr lang="en-US" sz="850" b="1" dirty="0">
+              <a:rPr lang="en-US" sz="900" b="1" dirty="0">
                 <a:solidFill>
                   <a:srgbClr val="94A3B8"/>
                 </a:solidFill>
@@ -3070,7 +3082,7 @@
               </a:rPr>
               <a:t>TAP ACADEMY EVALUATION</a:t>
             </a:r>
-            <a:endParaRPr lang="en-US" sz="850" dirty="0"/>
+            <a:endParaRPr lang="en-US" sz="900" dirty="0"/>
           </a:p>
         </p:txBody>
       </p:sp>
@@ -3082,8 +3094,8 @@
         </p:nvSpPr>
         <p:spPr>
           <a:xfrm>
-            <a:off x="731520" y="658368"/>
-            <a:ext cx="10515600" cy="457200"/>
+            <a:off x="731520" y="713232"/>
+            <a:ext cx="10698480" cy="457200"/>
           </a:xfrm>
           <a:prstGeom prst="rect">
             <a:avLst/>
@@ -3107,7 +3119,7 @@
                 <a:ea typeface="Segoe UI" pitchFamily="34" charset="-122"/>
                 <a:cs typeface="Segoe UI" pitchFamily="34" charset="-120"/>
               </a:rPr>
-              <a:t>Order History &amp; Real-Time Tracking (OrderHistory.jsp)</a:t>
+              <a:t>Order History &amp; Status Tracking (OrderHistory.jsp)</a:t>
             </a:r>
             <a:endParaRPr lang="en-US" sz="2200" dirty="0"/>
           </a:p>
@@ -3121,7 +3133,7 @@
         </p:nvSpPr>
         <p:spPr>
           <a:xfrm>
-            <a:off x="731520" y="1143000"/>
+            <a:off x="731520" y="1234440"/>
             <a:ext cx="10698480" cy="0"/>
           </a:xfrm>
           <a:prstGeom prst="line">
@@ -3138,7 +3150,7 @@
       </p:sp>
       <p:pic>
         <p:nvPicPr>
-          <p:cNvPr id="8" name="Image 0" descr="C:\Users\Asus\eclipse-workspace\FoodHouse\FoodHouse_Presentation_Assets\06_order_history_tracking_page.png">    </p:cNvPr>
+          <p:cNvPr id="8" name="Image 0" descr="C:\Users\Asus\eclipse-workspace\FoodHouse\FoodHouse_Final_Presentation_Package\Presentation_Assets\06_order_history_tracking_page.png">    </p:cNvPr>
           <p:cNvPicPr>
             <a:picLocks noChangeAspect="1"/>
           </p:cNvPicPr>
@@ -3152,8 +3164,8 @@
         </p:blipFill>
         <p:spPr>
           <a:xfrm>
-            <a:off x="731520" y="1371600"/>
-            <a:ext cx="7772400" cy="4663440"/>
+            <a:off x="731520" y="1417320"/>
+            <a:ext cx="7406640" cy="4754880"/>
           </a:xfrm>
           <a:prstGeom prst="rect">
             <a:avLst/>
@@ -3168,12 +3180,12 @@
         </p:nvSpPr>
         <p:spPr>
           <a:xfrm>
-            <a:off x="8686800" y="1371600"/>
-            <a:ext cx="2743200" cy="4663440"/>
+            <a:off x="8412480" y="1417320"/>
+            <a:ext cx="3017520" cy="4754880"/>
           </a:xfrm>
           <a:prstGeom prst="roundRect">
             <a:avLst>
-              <a:gd name="adj" fmla="val 4000"/>
+              <a:gd name="adj" fmla="val 3636"/>
             </a:avLst>
           </a:prstGeom>
           <a:solidFill>
@@ -3195,8 +3207,8 @@
         </p:nvSpPr>
         <p:spPr>
           <a:xfrm>
-            <a:off x="8869680" y="1645920"/>
-            <a:ext cx="2377440" cy="274320"/>
+            <a:off x="8595360" y="1691640"/>
+            <a:ext cx="2651760" cy="320040"/>
           </a:xfrm>
           <a:prstGeom prst="rect">
             <a:avLst/>
@@ -3220,7 +3232,7 @@
                 <a:ea typeface="Segoe UI" pitchFamily="34" charset="-122"/>
                 <a:cs typeface="Segoe UI" pitchFamily="34" charset="-120"/>
               </a:rPr>
-              <a:t>Live Order Tracking</a:t>
+              <a:t>Order Tracking</a:t>
             </a:r>
             <a:endParaRPr lang="en-US" sz="1400" dirty="0"/>
           </a:p>
@@ -3234,8 +3246,8 @@
         </p:nvSpPr>
         <p:spPr>
           <a:xfrm>
-            <a:off x="8869680" y="2011680"/>
-            <a:ext cx="2377440" cy="685800"/>
+            <a:off x="8595360" y="2103120"/>
+            <a:ext cx="2651760" cy="685800"/>
           </a:xfrm>
           <a:prstGeom prst="rect">
             <a:avLst/>
@@ -3249,12 +3261,12 @@
           <a:p>
             <a:pPr indent="0" marL="0">
               <a:lnSpc>
-                <a:spcPts val="1600"/>
+                <a:spcPts val="1500"/>
               </a:lnSpc>
               <a:buNone/>
             </a:pPr>
             <a:r>
-              <a:rPr lang="en-US" sz="1100" dirty="0">
+              <a:rPr lang="en-US" sz="1050" dirty="0">
                 <a:solidFill>
                   <a:srgbClr val="F8FAFC"/>
                 </a:solidFill>
@@ -3262,9 +3274,9 @@
                 <a:ea typeface="Segoe UI" pitchFamily="34" charset="-122"/>
                 <a:cs typeface="Segoe UI" pitchFamily="34" charset="-120"/>
               </a:rPr>
-              <a:t>• Real-time Order History listing all past and active customer orders.</a:t>
-            </a:r>
-            <a:endParaRPr lang="en-US" sz="1100" dirty="0"/>
+              <a:t>• Order History page displaying past and active customer orders.</a:t>
+            </a:r>
+            <a:endParaRPr lang="en-US" sz="1050" dirty="0"/>
           </a:p>
         </p:txBody>
       </p:sp>
@@ -3276,8 +3288,8 @@
         </p:nvSpPr>
         <p:spPr>
           <a:xfrm>
-            <a:off x="8869680" y="2788920"/>
-            <a:ext cx="2377440" cy="685800"/>
+            <a:off x="8595360" y="2880360"/>
+            <a:ext cx="2651760" cy="685800"/>
           </a:xfrm>
           <a:prstGeom prst="rect">
             <a:avLst/>
@@ -3291,12 +3303,12 @@
           <a:p>
             <a:pPr indent="0" marL="0">
               <a:lnSpc>
-                <a:spcPts val="1600"/>
+                <a:spcPts val="1500"/>
               </a:lnSpc>
               <a:buNone/>
             </a:pPr>
             <a:r>
-              <a:rPr lang="en-US" sz="1100" dirty="0">
+              <a:rPr lang="en-US" sz="1050" dirty="0">
                 <a:solidFill>
                   <a:srgbClr val="F8FAFC"/>
                 </a:solidFill>
@@ -3306,7 +3318,7 @@
               </a:rPr>
               <a:t>• Dynamic 5-stage status badge (Confirmed → Accepted → Ready → On Way → Delivered).</a:t>
             </a:r>
-            <a:endParaRPr lang="en-US" sz="1100" dirty="0"/>
+            <a:endParaRPr lang="en-US" sz="1050" dirty="0"/>
           </a:p>
         </p:txBody>
       </p:sp>
@@ -3318,8 +3330,8 @@
         </p:nvSpPr>
         <p:spPr>
           <a:xfrm>
-            <a:off x="8869680" y="3566160"/>
-            <a:ext cx="2377440" cy="685800"/>
+            <a:off x="8595360" y="3657600"/>
+            <a:ext cx="2651760" cy="685800"/>
           </a:xfrm>
           <a:prstGeom prst="rect">
             <a:avLst/>
@@ -3333,12 +3345,12 @@
           <a:p>
             <a:pPr indent="0" marL="0">
               <a:lnSpc>
-                <a:spcPts val="1600"/>
+                <a:spcPts val="1500"/>
               </a:lnSpc>
               <a:buNone/>
             </a:pPr>
             <a:r>
-              <a:rPr lang="en-US" sz="1100" dirty="0">
+              <a:rPr lang="en-US" sz="1050" dirty="0">
                 <a:solidFill>
                   <a:srgbClr val="F8FAFC"/>
                 </a:solidFill>
@@ -3348,7 +3360,7 @@
               </a:rPr>
               <a:t>• Powered by OrderLifecycleManager Finite State Machine.</a:t>
             </a:r>
-            <a:endParaRPr lang="en-US" sz="1100" dirty="0"/>
+            <a:endParaRPr lang="en-US" sz="1050" dirty="0"/>
           </a:p>
         </p:txBody>
       </p:sp>
@@ -3360,8 +3372,8 @@
         </p:nvSpPr>
         <p:spPr>
           <a:xfrm>
-            <a:off x="8869680" y="4343400"/>
-            <a:ext cx="2377440" cy="685800"/>
+            <a:off x="8595360" y="4434840"/>
+            <a:ext cx="2651760" cy="685800"/>
           </a:xfrm>
           <a:prstGeom prst="rect">
             <a:avLst/>
@@ -3375,12 +3387,12 @@
           <a:p>
             <a:pPr indent="0" marL="0">
               <a:lnSpc>
-                <a:spcPts val="1600"/>
+                <a:spcPts val="1500"/>
               </a:lnSpc>
               <a:buNone/>
             </a:pPr>
             <a:r>
-              <a:rPr lang="en-US" sz="1100" dirty="0">
+              <a:rPr lang="en-US" sz="1050" dirty="0">
                 <a:solidFill>
                   <a:srgbClr val="F8FAFC"/>
                 </a:solidFill>
@@ -3388,9 +3400,9 @@
                 <a:ea typeface="Segoe UI" pitchFamily="34" charset="-122"/>
                 <a:cs typeface="Segoe UI" pitchFamily="34" charset="-120"/>
               </a:rPr>
-              <a:t>• Itemized dish recap with exact order timestamp and transaction ID.</a:t>
-            </a:r>
-            <a:endParaRPr lang="en-US" sz="1100" dirty="0"/>
+              <a:t>• Itemized dish recap with order timestamp and transaction ID.</a:t>
+            </a:r>
+            <a:endParaRPr lang="en-US" sz="1050" dirty="0"/>
           </a:p>
         </p:txBody>
       </p:sp>
@@ -3402,8 +3414,8 @@
         </p:nvSpPr>
         <p:spPr>
           <a:xfrm>
-            <a:off x="8869680" y="5120640"/>
-            <a:ext cx="2377440" cy="685800"/>
+            <a:off x="8595360" y="5212080"/>
+            <a:ext cx="2651760" cy="685800"/>
           </a:xfrm>
           <a:prstGeom prst="rect">
             <a:avLst/>
@@ -3417,12 +3429,12 @@
           <a:p>
             <a:pPr indent="0" marL="0">
               <a:lnSpc>
-                <a:spcPts val="1600"/>
+                <a:spcPts val="1500"/>
               </a:lnSpc>
               <a:buNone/>
             </a:pPr>
             <a:r>
-              <a:rPr lang="en-US" sz="1100" dirty="0">
+              <a:rPr lang="en-US" sz="1050" dirty="0">
                 <a:solidFill>
                   <a:srgbClr val="F8FAFC"/>
                 </a:solidFill>
@@ -3430,9 +3442,9 @@
                 <a:ea typeface="Segoe UI" pitchFamily="34" charset="-122"/>
                 <a:cs typeface="Segoe UI" pitchFamily="34" charset="-120"/>
               </a:rPr>
-              <a:t>• Instant "Reorder" capability to streamline repeat dining.</a:t>
-            </a:r>
-            <a:endParaRPr lang="en-US" sz="1100" dirty="0"/>
+              <a:t>• Immediate order confirmation feedback upon checkout redirect.</a:t>
+            </a:r>
+            <a:endParaRPr lang="en-US" sz="1050" dirty="0"/>
           </a:p>
         </p:txBody>
       </p:sp>
@@ -3476,8 +3488,8 @@
         </p:nvSpPr>
         <p:spPr>
           <a:xfrm>
-            <a:off x="731520" y="320040"/>
-            <a:ext cx="2011680" cy="256032"/>
+            <a:off x="731520" y="347472"/>
+            <a:ext cx="2286000" cy="274320"/>
           </a:xfrm>
           <a:prstGeom prst="roundRect">
             <a:avLst>
@@ -3503,8 +3515,8 @@
         </p:nvSpPr>
         <p:spPr>
           <a:xfrm>
-            <a:off x="731520" y="320040"/>
-            <a:ext cx="2011680" cy="256032"/>
+            <a:off x="731520" y="347472"/>
+            <a:ext cx="2286000" cy="274320"/>
           </a:xfrm>
           <a:prstGeom prst="rect">
             <a:avLst/>
@@ -3520,7 +3532,7 @@
               <a:buNone/>
             </a:pPr>
             <a:r>
-              <a:rPr lang="en-US" sz="900" b="1" dirty="0">
+              <a:rPr lang="en-US" sz="950" b="1" dirty="0">
                 <a:solidFill>
                   <a:srgbClr val="F4B942"/>
                 </a:solidFill>
@@ -3530,7 +3542,7 @@
               </a:rPr>
               <a:t>SECTION 6 • NEW FEATURES ADDED</a:t>
             </a:r>
-            <a:endParaRPr lang="en-US" sz="900" dirty="0"/>
+            <a:endParaRPr lang="en-US" sz="950" dirty="0"/>
           </a:p>
         </p:txBody>
       </p:sp>
@@ -3542,8 +3554,8 @@
         </p:nvSpPr>
         <p:spPr>
           <a:xfrm>
-            <a:off x="9509760" y="320040"/>
-            <a:ext cx="1920240" cy="256032"/>
+            <a:off x="8961120" y="347472"/>
+            <a:ext cx="2468880" cy="274320"/>
           </a:xfrm>
           <a:prstGeom prst="roundRect">
             <a:avLst>
@@ -3569,8 +3581,8 @@
         </p:nvSpPr>
         <p:spPr>
           <a:xfrm>
-            <a:off x="9509760" y="320040"/>
-            <a:ext cx="1920240" cy="256032"/>
+            <a:off x="8961120" y="347472"/>
+            <a:ext cx="2468880" cy="274320"/>
           </a:xfrm>
           <a:prstGeom prst="rect">
             <a:avLst/>
@@ -3586,7 +3598,7 @@
               <a:buNone/>
             </a:pPr>
             <a:r>
-              <a:rPr lang="en-US" sz="850" b="1" dirty="0">
+              <a:rPr lang="en-US" sz="900" b="1" dirty="0">
                 <a:solidFill>
                   <a:srgbClr val="94A3B8"/>
                 </a:solidFill>
@@ -3596,7 +3608,7 @@
               </a:rPr>
               <a:t>TAP ACADEMY EVALUATION</a:t>
             </a:r>
-            <a:endParaRPr lang="en-US" sz="850" dirty="0"/>
+            <a:endParaRPr lang="en-US" sz="900" dirty="0"/>
           </a:p>
         </p:txBody>
       </p:sp>
@@ -3608,8 +3620,8 @@
         </p:nvSpPr>
         <p:spPr>
           <a:xfrm>
-            <a:off x="731520" y="658368"/>
-            <a:ext cx="10515600" cy="457200"/>
+            <a:off x="731520" y="713232"/>
+            <a:ext cx="10698480" cy="457200"/>
           </a:xfrm>
           <a:prstGeom prst="rect">
             <a:avLst/>
@@ -3633,7 +3645,7 @@
                 <a:ea typeface="Segoe UI" pitchFamily="34" charset="-122"/>
                 <a:cs typeface="Segoe UI" pitchFamily="34" charset="-120"/>
               </a:rPr>
-              <a:t>Key Architectural Innovations Beyond Base TAP Project Requirements</a:t>
+              <a:t>Architectural Innovations Beyond Base TAP Project Requirements</a:t>
             </a:r>
             <a:endParaRPr lang="en-US" sz="2200" dirty="0"/>
           </a:p>
@@ -3647,7 +3659,7 @@
         </p:nvSpPr>
         <p:spPr>
           <a:xfrm>
-            <a:off x="731520" y="1143000"/>
+            <a:off x="731520" y="1234440"/>
             <a:ext cx="10698480" cy="0"/>
           </a:xfrm>
           <a:prstGeom prst="line">
@@ -3670,12 +3682,12 @@
         </p:nvSpPr>
         <p:spPr>
           <a:xfrm>
-            <a:off x="731520" y="1463040"/>
-            <a:ext cx="5257800" cy="2103120"/>
+            <a:off x="731520" y="1417320"/>
+            <a:ext cx="5212080" cy="2240280"/>
           </a:xfrm>
           <a:prstGeom prst="roundRect">
             <a:avLst>
-              <a:gd name="adj" fmla="val 5217"/>
+              <a:gd name="adj" fmla="val 4898"/>
             </a:avLst>
           </a:prstGeom>
           <a:solidFill>
@@ -3697,8 +3709,8 @@
         </p:nvSpPr>
         <p:spPr>
           <a:xfrm>
-            <a:off x="1005840" y="1691640"/>
-            <a:ext cx="2011680" cy="237744"/>
+            <a:off x="1005840" y="1645920"/>
+            <a:ext cx="1828800" cy="237744"/>
           </a:xfrm>
           <a:prstGeom prst="roundRect">
             <a:avLst>
@@ -3724,8 +3736,8 @@
         </p:nvSpPr>
         <p:spPr>
           <a:xfrm>
-            <a:off x="1005840" y="1691640"/>
-            <a:ext cx="2011680" cy="237744"/>
+            <a:off x="1005840" y="1645920"/>
+            <a:ext cx="1828800" cy="237744"/>
           </a:xfrm>
           <a:prstGeom prst="rect">
             <a:avLst/>
@@ -3749,7 +3761,7 @@
                 <a:ea typeface="Segoe UI" pitchFamily="34" charset="-122"/>
                 <a:cs typeface="Segoe UI" pitchFamily="34" charset="-120"/>
               </a:rPr>
-              <a:t>BACKEND ALGORITHM</a:t>
+              <a:t>BACKEND LOGIC</a:t>
             </a:r>
             <a:endParaRPr lang="en-US" sz="850" dirty="0"/>
           </a:p>
@@ -3763,8 +3775,8 @@
         </p:nvSpPr>
         <p:spPr>
           <a:xfrm>
-            <a:off x="3200400" y="1691640"/>
-            <a:ext cx="2560320" cy="274320"/>
+            <a:off x="3017520" y="1645920"/>
+            <a:ext cx="2743200" cy="274320"/>
           </a:xfrm>
           <a:prstGeom prst="rect">
             <a:avLst/>
@@ -3780,7 +3792,7 @@
               <a:buNone/>
             </a:pPr>
             <a:r>
-              <a:rPr lang="en-US" sz="1500" b="1" dirty="0">
+              <a:rPr lang="en-US" sz="1450" b="1" dirty="0">
                 <a:solidFill>
                   <a:srgbClr val="F8FAFC"/>
                 </a:solidFill>
@@ -3790,7 +3802,7 @@
               </a:rPr>
               <a:t>Order Lifecycle State Machine</a:t>
             </a:r>
-            <a:endParaRPr lang="en-US" sz="1500" dirty="0"/>
+            <a:endParaRPr lang="en-US" sz="1450" dirty="0"/>
           </a:p>
         </p:txBody>
       </p:sp>
@@ -3802,8 +3814,8 @@
         </p:nvSpPr>
         <p:spPr>
           <a:xfrm>
-            <a:off x="1005840" y="2057400"/>
-            <a:ext cx="4709160" cy="685800"/>
+            <a:off x="1005840" y="2011680"/>
+            <a:ext cx="4663440" cy="685800"/>
           </a:xfrm>
           <a:prstGeom prst="rect">
             <a:avLst/>
@@ -3817,12 +3829,12 @@
           <a:p>
             <a:pPr indent="0" marL="0">
               <a:lnSpc>
-                <a:spcPts val="1700"/>
+                <a:spcPts val="1600"/>
               </a:lnSpc>
               <a:buNone/>
             </a:pPr>
             <a:r>
-              <a:rPr lang="en-US" sz="1150" dirty="0">
+              <a:rPr lang="en-US" sz="1100" dirty="0">
                 <a:solidFill>
                   <a:srgbClr val="F8FAFC"/>
                 </a:solidFill>
@@ -3830,9 +3842,9 @@
                 <a:ea typeface="Segoe UI" pitchFamily="34" charset="-122"/>
                 <a:cs typeface="Segoe UI" pitchFamily="34" charset="-120"/>
               </a:rPr>
-              <a:t>What it does: Built OrderLifecycleManager.java to manage deterministic, forward-only status progression (Confirmed → Delivered).</a:t>
-            </a:r>
-            <a:endParaRPr lang="en-US" sz="1150" dirty="0"/>
+              <a:t>What it does: OrderLifecycleManager.java manages forward-only status progression (Confirmed to Delivered).</a:t>
+            </a:r>
+            <a:endParaRPr lang="en-US" sz="1100" dirty="0"/>
           </a:p>
         </p:txBody>
       </p:sp>
@@ -3844,8 +3856,8 @@
         </p:nvSpPr>
         <p:spPr>
           <a:xfrm>
-            <a:off x="1005840" y="2788920"/>
-            <a:ext cx="4709160" cy="594360"/>
+            <a:off x="1005840" y="2743200"/>
+            <a:ext cx="4663440" cy="685800"/>
           </a:xfrm>
           <a:prstGeom prst="rect">
             <a:avLst/>
@@ -3859,12 +3871,12 @@
           <a:p>
             <a:pPr indent="0" marL="0">
               <a:lnSpc>
-                <a:spcPts val="1700"/>
+                <a:spcPts val="1600"/>
               </a:lnSpc>
               <a:buNone/>
             </a:pPr>
             <a:r>
-              <a:rPr lang="en-US" sz="1150" dirty="0">
+              <a:rPr lang="en-US" sz="1100" dirty="0">
                 <a:solidFill>
                   <a:srgbClr val="F4B942"/>
                 </a:solidFill>
@@ -3872,9 +3884,9 @@
                 <a:ea typeface="Segoe UI" pitchFamily="34" charset="-122"/>
                 <a:cs typeface="Segoe UI" pitchFamily="34" charset="-120"/>
               </a:rPr>
-              <a:t>Why it matters: Eliminates static status values and models real-world kitchen preparation and fleet delivery tracking.</a:t>
-            </a:r>
-            <a:endParaRPr lang="en-US" sz="1150" dirty="0"/>
+              <a:t>Why it matters: Simulates realistic food preparation and delivery milestone transitions automatically.</a:t>
+            </a:r>
+            <a:endParaRPr lang="en-US" sz="1100" dirty="0"/>
           </a:p>
         </p:txBody>
       </p:sp>
@@ -3886,12 +3898,12 @@
         </p:nvSpPr>
         <p:spPr>
           <a:xfrm>
-            <a:off x="6172200" y="1463040"/>
-            <a:ext cx="5257800" cy="2103120"/>
+            <a:off x="6217920" y="1417320"/>
+            <a:ext cx="5212080" cy="2240280"/>
           </a:xfrm>
           <a:prstGeom prst="roundRect">
             <a:avLst>
-              <a:gd name="adj" fmla="val 5217"/>
+              <a:gd name="adj" fmla="val 4898"/>
             </a:avLst>
           </a:prstGeom>
           <a:solidFill>
@@ -3913,8 +3925,8 @@
         </p:nvSpPr>
         <p:spPr>
           <a:xfrm>
-            <a:off x="6446520" y="1691640"/>
-            <a:ext cx="2011680" cy="237744"/>
+            <a:off x="6492240" y="1645920"/>
+            <a:ext cx="1828800" cy="237744"/>
           </a:xfrm>
           <a:prstGeom prst="roundRect">
             <a:avLst>
@@ -3940,8 +3952,8 @@
         </p:nvSpPr>
         <p:spPr>
           <a:xfrm>
-            <a:off x="6446520" y="1691640"/>
-            <a:ext cx="2011680" cy="237744"/>
+            <a:off x="6492240" y="1645920"/>
+            <a:ext cx="1828800" cy="237744"/>
           </a:xfrm>
           <a:prstGeom prst="rect">
             <a:avLst/>
@@ -3965,7 +3977,7 @@
                 <a:ea typeface="Segoe UI" pitchFamily="34" charset="-122"/>
                 <a:cs typeface="Segoe UI" pitchFamily="34" charset="-120"/>
               </a:rPr>
-              <a:t>SECURITY UPGRADE</a:t>
+              <a:t>SECURITY</a:t>
             </a:r>
             <a:endParaRPr lang="en-US" sz="850" dirty="0"/>
           </a:p>
@@ -3979,8 +3991,8 @@
         </p:nvSpPr>
         <p:spPr>
           <a:xfrm>
-            <a:off x="8641080" y="1691640"/>
-            <a:ext cx="2560320" cy="274320"/>
+            <a:off x="8503920" y="1645920"/>
+            <a:ext cx="2743200" cy="274320"/>
           </a:xfrm>
           <a:prstGeom prst="rect">
             <a:avLst/>
@@ -3996,7 +4008,7 @@
               <a:buNone/>
             </a:pPr>
             <a:r>
-              <a:rPr lang="en-US" sz="1500" b="1" dirty="0">
+              <a:rPr lang="en-US" sz="1450" b="1" dirty="0">
                 <a:solidFill>
                   <a:srgbClr val="F8FAFC"/>
                 </a:solidFill>
@@ -4004,9 +4016,9 @@
                 <a:ea typeface="Segoe UI" pitchFamily="34" charset="-122"/>
                 <a:cs typeface="Segoe UI" pitchFamily="34" charset="-120"/>
               </a:rPr>
-              <a:t>BCrypt Security Hardening</a:t>
-            </a:r>
-            <a:endParaRPr lang="en-US" sz="1500" dirty="0"/>
+              <a:t>BCrypt Password Security</a:t>
+            </a:r>
+            <a:endParaRPr lang="en-US" sz="1450" dirty="0"/>
           </a:p>
         </p:txBody>
       </p:sp>
@@ -4018,8 +4030,8 @@
         </p:nvSpPr>
         <p:spPr>
           <a:xfrm>
-            <a:off x="6446520" y="2057400"/>
-            <a:ext cx="4709160" cy="685800"/>
+            <a:off x="6492240" y="2011680"/>
+            <a:ext cx="4663440" cy="685800"/>
           </a:xfrm>
           <a:prstGeom prst="rect">
             <a:avLst/>
@@ -4033,12 +4045,12 @@
           <a:p>
             <a:pPr indent="0" marL="0">
               <a:lnSpc>
-                <a:spcPts val="1700"/>
+                <a:spcPts val="1600"/>
               </a:lnSpc>
               <a:buNone/>
             </a:pPr>
             <a:r>
-              <a:rPr lang="en-US" sz="1150" dirty="0">
+              <a:rPr lang="en-US" sz="1100" dirty="0">
                 <a:solidFill>
                   <a:srgbClr val="F8FAFC"/>
                 </a:solidFill>
@@ -4046,9 +4058,9 @@
                 <a:ea typeface="Segoe UI" pitchFamily="34" charset="-122"/>
                 <a:cs typeface="Segoe UI" pitchFamily="34" charset="-120"/>
               </a:rPr>
-              <a:t>What it does: Replaced plain-text password storage with salted jBCrypt hashing and automated migration utility.</a:t>
-            </a:r>
-            <a:endParaRPr lang="en-US" sz="1150" dirty="0"/>
+              <a:t>What it does: Replaced plain-text storage with salted jBCrypt hashing and automated existing user migration.</a:t>
+            </a:r>
+            <a:endParaRPr lang="en-US" sz="1100" dirty="0"/>
           </a:p>
         </p:txBody>
       </p:sp>
@@ -4060,8 +4072,8 @@
         </p:nvSpPr>
         <p:spPr>
           <a:xfrm>
-            <a:off x="6446520" y="2788920"/>
-            <a:ext cx="4709160" cy="594360"/>
+            <a:off x="6492240" y="2743200"/>
+            <a:ext cx="4663440" cy="685800"/>
           </a:xfrm>
           <a:prstGeom prst="rect">
             <a:avLst/>
@@ -4075,12 +4087,12 @@
           <a:p>
             <a:pPr indent="0" marL="0">
               <a:lnSpc>
-                <a:spcPts val="1700"/>
+                <a:spcPts val="1600"/>
               </a:lnSpc>
               <a:buNone/>
             </a:pPr>
             <a:r>
-              <a:rPr lang="en-US" sz="1150" dirty="0">
+              <a:rPr lang="en-US" sz="1100" dirty="0">
                 <a:solidFill>
                   <a:srgbClr val="F4B942"/>
                 </a:solidFill>
@@ -4088,9 +4100,9 @@
                 <a:ea typeface="Segoe UI" pitchFamily="34" charset="-122"/>
                 <a:cs typeface="Segoe UI" pitchFamily="34" charset="-120"/>
               </a:rPr>
-              <a:t>Why it matters: Guarantees enterprise protection against database breach vulnerabilities and protects user credentials.</a:t>
-            </a:r>
-            <a:endParaRPr lang="en-US" sz="1150" dirty="0"/>
+              <a:t>Why it matters: Prevents credential exposure in the database and neutralizes dictionary/rainbow table attacks.</a:t>
+            </a:r>
+            <a:endParaRPr lang="en-US" sz="1100" dirty="0"/>
           </a:p>
         </p:txBody>
       </p:sp>
@@ -4102,12 +4114,12 @@
         </p:nvSpPr>
         <p:spPr>
           <a:xfrm>
-            <a:off x="731520" y="3749040"/>
-            <a:ext cx="5257800" cy="2103120"/>
+            <a:off x="731520" y="3886200"/>
+            <a:ext cx="5212080" cy="2240280"/>
           </a:xfrm>
           <a:prstGeom prst="roundRect">
             <a:avLst>
-              <a:gd name="adj" fmla="val 5217"/>
+              <a:gd name="adj" fmla="val 4898"/>
             </a:avLst>
           </a:prstGeom>
           <a:solidFill>
@@ -4129,8 +4141,8 @@
         </p:nvSpPr>
         <p:spPr>
           <a:xfrm>
-            <a:off x="1005840" y="3977640"/>
-            <a:ext cx="2011680" cy="237744"/>
+            <a:off x="1005840" y="4114800"/>
+            <a:ext cx="1828800" cy="237744"/>
           </a:xfrm>
           <a:prstGeom prst="roundRect">
             <a:avLst>
@@ -4156,8 +4168,8 @@
         </p:nvSpPr>
         <p:spPr>
           <a:xfrm>
-            <a:off x="1005840" y="3977640"/>
-            <a:ext cx="2011680" cy="237744"/>
+            <a:off x="1005840" y="4114800"/>
+            <a:ext cx="1828800" cy="237744"/>
           </a:xfrm>
           <a:prstGeom prst="rect">
             <a:avLst/>
@@ -4181,7 +4193,7 @@
                 <a:ea typeface="Segoe UI" pitchFamily="34" charset="-122"/>
                 <a:cs typeface="Segoe UI" pitchFamily="34" charset="-120"/>
               </a:rPr>
-              <a:t>FRONTEND INNOVATION</a:t>
+              <a:t>USER EXPERIENCE</a:t>
             </a:r>
             <a:endParaRPr lang="en-US" sz="850" dirty="0"/>
           </a:p>
@@ -4195,8 +4207,8 @@
         </p:nvSpPr>
         <p:spPr>
           <a:xfrm>
-            <a:off x="3200400" y="3977640"/>
-            <a:ext cx="2560320" cy="274320"/>
+            <a:off x="3017520" y="4114800"/>
+            <a:ext cx="2743200" cy="274320"/>
           </a:xfrm>
           <a:prstGeom prst="rect">
             <a:avLst/>
@@ -4212,7 +4224,7 @@
               <a:buNone/>
             </a:pPr>
             <a:r>
-              <a:rPr lang="en-US" sz="1500" b="1" dirty="0">
+              <a:rPr lang="en-US" sz="1450" b="1" dirty="0">
                 <a:solidFill>
                   <a:srgbClr val="F8FAFC"/>
                 </a:solidFill>
@@ -4222,7 +4234,7 @@
               </a:rPr>
               <a:t>Zero-Jump Dynamic Menu UX</a:t>
             </a:r>
-            <a:endParaRPr lang="en-US" sz="1500" dirty="0"/>
+            <a:endParaRPr lang="en-US" sz="1450" dirty="0"/>
           </a:p>
         </p:txBody>
       </p:sp>
@@ -4234,8 +4246,8 @@
         </p:nvSpPr>
         <p:spPr>
           <a:xfrm>
-            <a:off x="1005840" y="4343400"/>
-            <a:ext cx="4709160" cy="685800"/>
+            <a:off x="1005840" y="4480560"/>
+            <a:ext cx="4663440" cy="685800"/>
           </a:xfrm>
           <a:prstGeom prst="rect">
             <a:avLst/>
@@ -4249,12 +4261,12 @@
           <a:p>
             <a:pPr indent="0" marL="0">
               <a:lnSpc>
-                <a:spcPts val="1700"/>
+                <a:spcPts val="1600"/>
               </a:lnSpc>
               <a:buNone/>
             </a:pPr>
             <a:r>
-              <a:rPr lang="en-US" sz="1150" dirty="0">
+              <a:rPr lang="en-US" sz="1100" dirty="0">
                 <a:solidFill>
                   <a:srgbClr val="F8FAFC"/>
                 </a:solidFill>
@@ -4262,9 +4274,9 @@
                 <a:ea typeface="Segoe UI" pitchFamily="34" charset="-122"/>
                 <a:cs typeface="Segoe UI" pitchFamily="34" charset="-120"/>
               </a:rPr>
-              <a:t>What it does: Engineered asynchronous cart modification with scroll-anchor preservation on dish cards.</a:t>
-            </a:r>
-            <a:endParaRPr lang="en-US" sz="1150" dirty="0"/>
+              <a:t>What it does: Asynchronous fetch() cart updates with scroll-anchor preservation on dish cards.</a:t>
+            </a:r>
+            <a:endParaRPr lang="en-US" sz="1100" dirty="0"/>
           </a:p>
         </p:txBody>
       </p:sp>
@@ -4276,8 +4288,8 @@
         </p:nvSpPr>
         <p:spPr>
           <a:xfrm>
-            <a:off x="1005840" y="5074920"/>
-            <a:ext cx="4709160" cy="594360"/>
+            <a:off x="1005840" y="5212080"/>
+            <a:ext cx="4663440" cy="685800"/>
           </a:xfrm>
           <a:prstGeom prst="rect">
             <a:avLst/>
@@ -4291,12 +4303,12 @@
           <a:p>
             <a:pPr indent="0" marL="0">
               <a:lnSpc>
-                <a:spcPts val="1700"/>
+                <a:spcPts val="1600"/>
               </a:lnSpc>
               <a:buNone/>
             </a:pPr>
             <a:r>
-              <a:rPr lang="en-US" sz="1150" dirty="0">
+              <a:rPr lang="en-US" sz="1100" dirty="0">
                 <a:solidFill>
                   <a:srgbClr val="F4B942"/>
                 </a:solidFill>
@@ -4304,9 +4316,9 @@
                 <a:ea typeface="Segoe UI" pitchFamily="34" charset="-122"/>
                 <a:cs typeface="Segoe UI" pitchFamily="34" charset="-120"/>
               </a:rPr>
-              <a:t>Why it matters: Prevents disorienting page reloads when browsing lengthy menus, delivering a native app-like experience.</a:t>
-            </a:r>
-            <a:endParaRPr lang="en-US" sz="1150" dirty="0"/>
+              <a:t>Why it matters: Prevents disorienting page reloads when adding dishes, keeping the user in their browsing context.</a:t>
+            </a:r>
+            <a:endParaRPr lang="en-US" sz="1100" dirty="0"/>
           </a:p>
         </p:txBody>
       </p:sp>
@@ -4318,12 +4330,12 @@
         </p:nvSpPr>
         <p:spPr>
           <a:xfrm>
-            <a:off x="6172200" y="3749040"/>
-            <a:ext cx="5257800" cy="2103120"/>
+            <a:off x="6217920" y="3886200"/>
+            <a:ext cx="5212080" cy="2240280"/>
           </a:xfrm>
           <a:prstGeom prst="roundRect">
             <a:avLst>
-              <a:gd name="adj" fmla="val 5217"/>
+              <a:gd name="adj" fmla="val 4898"/>
             </a:avLst>
           </a:prstGeom>
           <a:solidFill>
@@ -4345,8 +4357,8 @@
         </p:nvSpPr>
         <p:spPr>
           <a:xfrm>
-            <a:off x="6446520" y="3977640"/>
-            <a:ext cx="2011680" cy="237744"/>
+            <a:off x="6492240" y="4114800"/>
+            <a:ext cx="1828800" cy="237744"/>
           </a:xfrm>
           <a:prstGeom prst="roundRect">
             <a:avLst>
@@ -4372,8 +4384,8 @@
         </p:nvSpPr>
         <p:spPr>
           <a:xfrm>
-            <a:off x="6446520" y="3977640"/>
-            <a:ext cx="2011680" cy="237744"/>
+            <a:off x="6492240" y="4114800"/>
+            <a:ext cx="1828800" cy="237744"/>
           </a:xfrm>
           <a:prstGeom prst="rect">
             <a:avLst/>
@@ -4411,8 +4423,8 @@
         </p:nvSpPr>
         <p:spPr>
           <a:xfrm>
-            <a:off x="8641080" y="3977640"/>
-            <a:ext cx="2560320" cy="274320"/>
+            <a:off x="8503920" y="4114800"/>
+            <a:ext cx="2743200" cy="274320"/>
           </a:xfrm>
           <a:prstGeom prst="rect">
             <a:avLst/>
@@ -4428,7 +4440,7 @@
               <a:buNone/>
             </a:pPr>
             <a:r>
-              <a:rPr lang="en-US" sz="1500" b="1" dirty="0">
+              <a:rPr lang="en-US" sz="1450" b="1" dirty="0">
                 <a:solidFill>
                   <a:srgbClr val="F8FAFC"/>
                 </a:solidFill>
@@ -4438,7 +4450,7 @@
               </a:rPr>
               <a:t>Dynamic Dual-Theme Engine</a:t>
             </a:r>
-            <a:endParaRPr lang="en-US" sz="1500" dirty="0"/>
+            <a:endParaRPr lang="en-US" sz="1450" dirty="0"/>
           </a:p>
         </p:txBody>
       </p:sp>
@@ -4450,8 +4462,8 @@
         </p:nvSpPr>
         <p:spPr>
           <a:xfrm>
-            <a:off x="6446520" y="4343400"/>
-            <a:ext cx="4709160" cy="685800"/>
+            <a:off x="6492240" y="4480560"/>
+            <a:ext cx="4663440" cy="685800"/>
           </a:xfrm>
           <a:prstGeom prst="rect">
             <a:avLst/>
@@ -4465,12 +4477,12 @@
           <a:p>
             <a:pPr indent="0" marL="0">
               <a:lnSpc>
-                <a:spcPts val="1700"/>
+                <a:spcPts val="1600"/>
               </a:lnSpc>
               <a:buNone/>
             </a:pPr>
             <a:r>
-              <a:rPr lang="en-US" sz="1150" dirty="0">
+              <a:rPr lang="en-US" sz="1100" dirty="0">
                 <a:solidFill>
                   <a:srgbClr val="F8FAFC"/>
                 </a:solidFill>
@@ -4478,9 +4490,9 @@
                 <a:ea typeface="Segoe UI" pitchFamily="34" charset="-122"/>
                 <a:cs typeface="Segoe UI" pitchFamily="34" charset="-120"/>
               </a:rPr>
-              <a:t>What it does: Implemented dynamic Dark/Light theme toggle with CSS custom properties and persistent state.</a:t>
-            </a:r>
-            <a:endParaRPr lang="en-US" sz="1150" dirty="0"/>
+              <a:t>What it does: Implemented dynamic Dark/Light theme toggle using CSS custom properties.</a:t>
+            </a:r>
+            <a:endParaRPr lang="en-US" sz="1100" dirty="0"/>
           </a:p>
         </p:txBody>
       </p:sp>
@@ -4492,8 +4504,8 @@
         </p:nvSpPr>
         <p:spPr>
           <a:xfrm>
-            <a:off x="6446520" y="5074920"/>
-            <a:ext cx="4709160" cy="594360"/>
+            <a:off x="6492240" y="5212080"/>
+            <a:ext cx="4663440" cy="685800"/>
           </a:xfrm>
           <a:prstGeom prst="rect">
             <a:avLst/>
@@ -4507,12 +4519,12 @@
           <a:p>
             <a:pPr indent="0" marL="0">
               <a:lnSpc>
-                <a:spcPts val="1700"/>
+                <a:spcPts val="1600"/>
               </a:lnSpc>
               <a:buNone/>
             </a:pPr>
             <a:r>
-              <a:rPr lang="en-US" sz="1150" dirty="0">
+              <a:rPr lang="en-US" sz="1100" dirty="0">
                 <a:solidFill>
                   <a:srgbClr val="F4B942"/>
                 </a:solidFill>
@@ -4520,9 +4532,9 @@
                 <a:ea typeface="Segoe UI" pitchFamily="34" charset="-122"/>
                 <a:cs typeface="Segoe UI" pitchFamily="34" charset="-120"/>
               </a:rPr>
-              <a:t>Why it matters: Provides comfortable viewing in both night and daytime dining environments with seamless contrast.</a:t>
-            </a:r>
-            <a:endParaRPr lang="en-US" sz="1150" dirty="0"/>
+              <a:t>Why it matters: Provides comfortable viewing in both night and daytime dining environments.</a:t>
+            </a:r>
+            <a:endParaRPr lang="en-US" sz="1100" dirty="0"/>
           </a:p>
         </p:txBody>
       </p:sp>
@@ -4566,8 +4578,8 @@
         </p:nvSpPr>
         <p:spPr>
           <a:xfrm>
-            <a:off x="731520" y="320040"/>
-            <a:ext cx="2011680" cy="256032"/>
+            <a:off x="731520" y="347472"/>
+            <a:ext cx="2286000" cy="274320"/>
           </a:xfrm>
           <a:prstGeom prst="roundRect">
             <a:avLst>
@@ -4593,8 +4605,8 @@
         </p:nvSpPr>
         <p:spPr>
           <a:xfrm>
-            <a:off x="731520" y="320040"/>
-            <a:ext cx="2011680" cy="256032"/>
+            <a:off x="731520" y="347472"/>
+            <a:ext cx="2286000" cy="274320"/>
           </a:xfrm>
           <a:prstGeom prst="rect">
             <a:avLst/>
@@ -4610,7 +4622,7 @@
               <a:buNone/>
             </a:pPr>
             <a:r>
-              <a:rPr lang="en-US" sz="900" b="1" dirty="0">
+              <a:rPr lang="en-US" sz="950" b="1" dirty="0">
                 <a:solidFill>
                   <a:srgbClr val="F4B942"/>
                 </a:solidFill>
@@ -4620,7 +4632,7 @@
               </a:rPr>
               <a:t>SECTION 7 • IMPORTANT ALGORITHMS</a:t>
             </a:r>
-            <a:endParaRPr lang="en-US" sz="900" dirty="0"/>
+            <a:endParaRPr lang="en-US" sz="950" dirty="0"/>
           </a:p>
         </p:txBody>
       </p:sp>
@@ -4632,8 +4644,8 @@
         </p:nvSpPr>
         <p:spPr>
           <a:xfrm>
-            <a:off x="9509760" y="320040"/>
-            <a:ext cx="1920240" cy="256032"/>
+            <a:off x="8961120" y="347472"/>
+            <a:ext cx="2468880" cy="274320"/>
           </a:xfrm>
           <a:prstGeom prst="roundRect">
             <a:avLst>
@@ -4659,8 +4671,8 @@
         </p:nvSpPr>
         <p:spPr>
           <a:xfrm>
-            <a:off x="9509760" y="320040"/>
-            <a:ext cx="1920240" cy="256032"/>
+            <a:off x="8961120" y="347472"/>
+            <a:ext cx="2468880" cy="274320"/>
           </a:xfrm>
           <a:prstGeom prst="rect">
             <a:avLst/>
@@ -4676,7 +4688,7 @@
               <a:buNone/>
             </a:pPr>
             <a:r>
-              <a:rPr lang="en-US" sz="850" b="1" dirty="0">
+              <a:rPr lang="en-US" sz="900" b="1" dirty="0">
                 <a:solidFill>
                   <a:srgbClr val="94A3B8"/>
                 </a:solidFill>
@@ -4686,7 +4698,7 @@
               </a:rPr>
               <a:t>TAP ACADEMY EVALUATION</a:t>
             </a:r>
-            <a:endParaRPr lang="en-US" sz="850" dirty="0"/>
+            <a:endParaRPr lang="en-US" sz="900" dirty="0"/>
           </a:p>
         </p:txBody>
       </p:sp>
@@ -4698,8 +4710,8 @@
         </p:nvSpPr>
         <p:spPr>
           <a:xfrm>
-            <a:off x="731520" y="658368"/>
-            <a:ext cx="10515600" cy="457200"/>
+            <a:off x="731520" y="713232"/>
+            <a:ext cx="10698480" cy="457200"/>
           </a:xfrm>
           <a:prstGeom prst="rect">
             <a:avLst/>
@@ -4723,7 +4735,7 @@
                 <a:ea typeface="Segoe UI" pitchFamily="34" charset="-122"/>
                 <a:cs typeface="Segoe UI" pitchFamily="34" charset="-120"/>
               </a:rPr>
-              <a:t>OrderLifecycleManager Finite State Machine &amp; Transactional Persistence</a:t>
+              <a:t>OrderLifecycleManager State Machine &amp; Transactional Persistence</a:t>
             </a:r>
             <a:endParaRPr lang="en-US" sz="2200" dirty="0"/>
           </a:p>
@@ -4737,7 +4749,7 @@
         </p:nvSpPr>
         <p:spPr>
           <a:xfrm>
-            <a:off x="731520" y="1143000"/>
+            <a:off x="731520" y="1234440"/>
             <a:ext cx="10698480" cy="0"/>
           </a:xfrm>
           <a:prstGeom prst="line">
@@ -4754,7 +4766,7 @@
       </p:sp>
       <p:pic>
         <p:nvPicPr>
-          <p:cNvPr id="8" name="Image 0" descr="C:\Users\Asus\eclipse-workspace\FoodHouse\FoodHouse_Presentation_Assets\09_algorithm_architecture.png">    </p:cNvPr>
+          <p:cNvPr id="8" name="Image 0" descr="C:\Users\Asus\eclipse-workspace\FoodHouse\FoodHouse_Final_Presentation_Package\Presentation_Assets\09_algorithm_architecture.png">    </p:cNvPr>
           <p:cNvPicPr>
             <a:picLocks noChangeAspect="1"/>
           </p:cNvPicPr>
@@ -4768,8 +4780,8 @@
         </p:blipFill>
         <p:spPr>
           <a:xfrm>
-            <a:off x="731520" y="1371600"/>
-            <a:ext cx="10698480" cy="4663440"/>
+            <a:off x="731520" y="1417320"/>
+            <a:ext cx="10698480" cy="4846320"/>
           </a:xfrm>
           <a:prstGeom prst="rect">
             <a:avLst/>
@@ -4816,8 +4828,8 @@
         </p:nvSpPr>
         <p:spPr>
           <a:xfrm>
-            <a:off x="731520" y="320040"/>
-            <a:ext cx="2011680" cy="256032"/>
+            <a:off x="731520" y="347472"/>
+            <a:ext cx="2286000" cy="274320"/>
           </a:xfrm>
           <a:prstGeom prst="roundRect">
             <a:avLst>
@@ -4843,8 +4855,8 @@
         </p:nvSpPr>
         <p:spPr>
           <a:xfrm>
-            <a:off x="731520" y="320040"/>
-            <a:ext cx="2011680" cy="256032"/>
+            <a:off x="731520" y="347472"/>
+            <a:ext cx="2286000" cy="274320"/>
           </a:xfrm>
           <a:prstGeom prst="rect">
             <a:avLst/>
@@ -4860,7 +4872,7 @@
               <a:buNone/>
             </a:pPr>
             <a:r>
-              <a:rPr lang="en-US" sz="900" b="1" dirty="0">
+              <a:rPr lang="en-US" sz="950" b="1" dirty="0">
                 <a:solidFill>
                   <a:srgbClr val="F4B942"/>
                 </a:solidFill>
@@ -4870,7 +4882,7 @@
               </a:rPr>
               <a:t>SECTION 8 • MAJOR CHALLENGE FACED</a:t>
             </a:r>
-            <a:endParaRPr lang="en-US" sz="900" dirty="0"/>
+            <a:endParaRPr lang="en-US" sz="950" dirty="0"/>
           </a:p>
         </p:txBody>
       </p:sp>
@@ -4882,8 +4894,8 @@
         </p:nvSpPr>
         <p:spPr>
           <a:xfrm>
-            <a:off x="9509760" y="320040"/>
-            <a:ext cx="1920240" cy="256032"/>
+            <a:off x="8961120" y="347472"/>
+            <a:ext cx="2468880" cy="274320"/>
           </a:xfrm>
           <a:prstGeom prst="roundRect">
             <a:avLst>
@@ -4909,8 +4921,8 @@
         </p:nvSpPr>
         <p:spPr>
           <a:xfrm>
-            <a:off x="9509760" y="320040"/>
-            <a:ext cx="1920240" cy="256032"/>
+            <a:off x="8961120" y="347472"/>
+            <a:ext cx="2468880" cy="274320"/>
           </a:xfrm>
           <a:prstGeom prst="rect">
             <a:avLst/>
@@ -4926,7 +4938,7 @@
               <a:buNone/>
             </a:pPr>
             <a:r>
-              <a:rPr lang="en-US" sz="850" b="1" dirty="0">
+              <a:rPr lang="en-US" sz="900" b="1" dirty="0">
                 <a:solidFill>
                   <a:srgbClr val="94A3B8"/>
                 </a:solidFill>
@@ -4936,7 +4948,7 @@
               </a:rPr>
               <a:t>TAP ACADEMY EVALUATION</a:t>
             </a:r>
-            <a:endParaRPr lang="en-US" sz="850" dirty="0"/>
+            <a:endParaRPr lang="en-US" sz="900" dirty="0"/>
           </a:p>
         </p:txBody>
       </p:sp>
@@ -4948,8 +4960,8 @@
         </p:nvSpPr>
         <p:spPr>
           <a:xfrm>
-            <a:off x="731520" y="658368"/>
-            <a:ext cx="10515600" cy="457200"/>
+            <a:off x="731520" y="713232"/>
+            <a:ext cx="10698480" cy="457200"/>
           </a:xfrm>
           <a:prstGeom prst="rect">
             <a:avLst/>
@@ -4973,7 +4985,7 @@
                 <a:ea typeface="Segoe UI" pitchFamily="34" charset="-122"/>
                 <a:cs typeface="Segoe UI" pitchFamily="34" charset="-120"/>
               </a:rPr>
-              <a:t>Viewport Scroll Jump Disorientation &amp; Password Encryption Migration</a:t>
+              <a:t>Viewport Scroll Jump Disorientation &amp; Password Migration</a:t>
             </a:r>
             <a:endParaRPr lang="en-US" sz="2200" dirty="0"/>
           </a:p>
@@ -4987,7 +4999,7 @@
         </p:nvSpPr>
         <p:spPr>
           <a:xfrm>
-            <a:off x="731520" y="1143000"/>
+            <a:off x="731520" y="1234440"/>
             <a:ext cx="10698480" cy="0"/>
           </a:xfrm>
           <a:prstGeom prst="line">
@@ -5004,7 +5016,7 @@
       </p:sp>
       <p:pic>
         <p:nvPicPr>
-          <p:cNvPr id="8" name="Image 0" descr="C:\Users\Asus\eclipse-workspace\FoodHouse\FoodHouse_Presentation_Assets\10_challenge_solution.png">    </p:cNvPr>
+          <p:cNvPr id="8" name="Image 0" descr="C:\Users\Asus\eclipse-workspace\FoodHouse\FoodHouse_Final_Presentation_Package\Presentation_Assets\10_challenge_solution.png">    </p:cNvPr>
           <p:cNvPicPr>
             <a:picLocks noChangeAspect="1"/>
           </p:cNvPicPr>
@@ -5018,8 +5030,8 @@
         </p:blipFill>
         <p:spPr>
           <a:xfrm>
-            <a:off x="731520" y="1371600"/>
-            <a:ext cx="10698480" cy="4663440"/>
+            <a:off x="731520" y="1417320"/>
+            <a:ext cx="10698480" cy="4846320"/>
           </a:xfrm>
           <a:prstGeom prst="rect">
             <a:avLst/>
@@ -5066,8 +5078,8 @@
         </p:nvSpPr>
         <p:spPr>
           <a:xfrm>
-            <a:off x="731520" y="320040"/>
-            <a:ext cx="2011680" cy="256032"/>
+            <a:off x="731520" y="347472"/>
+            <a:ext cx="2286000" cy="274320"/>
           </a:xfrm>
           <a:prstGeom prst="roundRect">
             <a:avLst>
@@ -5093,8 +5105,8 @@
         </p:nvSpPr>
         <p:spPr>
           <a:xfrm>
-            <a:off x="731520" y="320040"/>
-            <a:ext cx="2011680" cy="256032"/>
+            <a:off x="731520" y="347472"/>
+            <a:ext cx="2286000" cy="274320"/>
           </a:xfrm>
           <a:prstGeom prst="rect">
             <a:avLst/>
@@ -5110,7 +5122,7 @@
               <a:buNone/>
             </a:pPr>
             <a:r>
-              <a:rPr lang="en-US" sz="900" b="1" dirty="0">
+              <a:rPr lang="en-US" sz="950" b="1" dirty="0">
                 <a:solidFill>
                   <a:srgbClr val="F4B942"/>
                 </a:solidFill>
@@ -5120,7 +5132,7 @@
               </a:rPr>
               <a:t>SECTION 9 • WHAT I'LL ADD NEXT</a:t>
             </a:r>
-            <a:endParaRPr lang="en-US" sz="900" dirty="0"/>
+            <a:endParaRPr lang="en-US" sz="950" dirty="0"/>
           </a:p>
         </p:txBody>
       </p:sp>
@@ -5132,8 +5144,8 @@
         </p:nvSpPr>
         <p:spPr>
           <a:xfrm>
-            <a:off x="9509760" y="320040"/>
-            <a:ext cx="1920240" cy="256032"/>
+            <a:off x="8961120" y="347472"/>
+            <a:ext cx="2468880" cy="274320"/>
           </a:xfrm>
           <a:prstGeom prst="roundRect">
             <a:avLst>
@@ -5159,8 +5171,8 @@
         </p:nvSpPr>
         <p:spPr>
           <a:xfrm>
-            <a:off x="9509760" y="320040"/>
-            <a:ext cx="1920240" cy="256032"/>
+            <a:off x="8961120" y="347472"/>
+            <a:ext cx="2468880" cy="274320"/>
           </a:xfrm>
           <a:prstGeom prst="rect">
             <a:avLst/>
@@ -5176,7 +5188,7 @@
               <a:buNone/>
             </a:pPr>
             <a:r>
-              <a:rPr lang="en-US" sz="850" b="1" dirty="0">
+              <a:rPr lang="en-US" sz="900" b="1" dirty="0">
                 <a:solidFill>
                   <a:srgbClr val="94A3B8"/>
                 </a:solidFill>
@@ -5186,7 +5198,7 @@
               </a:rPr>
               <a:t>TAP ACADEMY EVALUATION</a:t>
             </a:r>
-            <a:endParaRPr lang="en-US" sz="850" dirty="0"/>
+            <a:endParaRPr lang="en-US" sz="900" dirty="0"/>
           </a:p>
         </p:txBody>
       </p:sp>
@@ -5198,8 +5210,8 @@
         </p:nvSpPr>
         <p:spPr>
           <a:xfrm>
-            <a:off x="731520" y="658368"/>
-            <a:ext cx="10515600" cy="457200"/>
+            <a:off x="731520" y="713232"/>
+            <a:ext cx="10698480" cy="457200"/>
           </a:xfrm>
           <a:prstGeom prst="rect">
             <a:avLst/>
@@ -5223,7 +5235,7 @@
                 <a:ea typeface="Segoe UI" pitchFamily="34" charset="-122"/>
                 <a:cs typeface="Segoe UI" pitchFamily="34" charset="-120"/>
               </a:rPr>
-              <a:t>Future Architectural Enhancements &amp; Production Roadmap</a:t>
+              <a:t>Future Technical Enhancements &amp; Roadmap</a:t>
             </a:r>
             <a:endParaRPr lang="en-US" sz="2200" dirty="0"/>
           </a:p>
@@ -5237,7 +5249,7 @@
         </p:nvSpPr>
         <p:spPr>
           <a:xfrm>
-            <a:off x="731520" y="1143000"/>
+            <a:off x="731520" y="1234440"/>
             <a:ext cx="10698480" cy="0"/>
           </a:xfrm>
           <a:prstGeom prst="line">
@@ -5260,8 +5272,8 @@
         </p:nvSpPr>
         <p:spPr>
           <a:xfrm>
-            <a:off x="731520" y="1463040"/>
-            <a:ext cx="2468880" cy="4480560"/>
+            <a:off x="731520" y="1417320"/>
+            <a:ext cx="2468880" cy="4754880"/>
           </a:xfrm>
           <a:prstGeom prst="roundRect">
             <a:avLst>
@@ -5287,7 +5299,7 @@
         </p:nvSpPr>
         <p:spPr>
           <a:xfrm>
-            <a:off x="1005840" y="1737360"/>
+            <a:off x="1005840" y="1691640"/>
             <a:ext cx="1920240" cy="548640"/>
           </a:xfrm>
           <a:prstGeom prst="rect">
@@ -5326,7 +5338,7 @@
         </p:nvSpPr>
         <p:spPr>
           <a:xfrm>
-            <a:off x="1005840" y="2377440"/>
+            <a:off x="1005840" y="2331720"/>
             <a:ext cx="1920240" cy="548640"/>
           </a:xfrm>
           <a:prstGeom prst="rect">
@@ -5365,7 +5377,7 @@
         </p:nvSpPr>
         <p:spPr>
           <a:xfrm>
-            <a:off x="1005840" y="3017520"/>
+            <a:off x="1005840" y="2971800"/>
             <a:ext cx="1920240" cy="274320"/>
           </a:xfrm>
           <a:prstGeom prst="roundRect">
@@ -5392,7 +5404,7 @@
         </p:nvSpPr>
         <p:spPr>
           <a:xfrm>
-            <a:off x="1005840" y="3017520"/>
+            <a:off x="1005840" y="2971800"/>
             <a:ext cx="1920240" cy="274320"/>
           </a:xfrm>
           <a:prstGeom prst="rect">
@@ -5431,8 +5443,8 @@
         </p:nvSpPr>
         <p:spPr>
           <a:xfrm>
-            <a:off x="1005840" y="3474720"/>
-            <a:ext cx="1920240" cy="2194560"/>
+            <a:off x="1005840" y="3429000"/>
+            <a:ext cx="1920240" cy="2377440"/>
           </a:xfrm>
           <a:prstGeom prst="rect">
             <a:avLst/>
@@ -5446,12 +5458,12 @@
           <a:p>
             <a:pPr indent="0" marL="0">
               <a:lnSpc>
-                <a:spcPts val="1800"/>
+                <a:spcPts val="1700"/>
               </a:lnSpc>
               <a:buNone/>
             </a:pPr>
             <a:r>
-              <a:rPr lang="en-US" sz="1200" dirty="0">
+              <a:rPr lang="en-US" sz="1150" dirty="0">
                 <a:solidFill>
                   <a:srgbClr val="94A3B8"/>
                 </a:solidFill>
@@ -5461,7 +5473,7 @@
               </a:rPr>
               <a:t>Integrate real online payments supporting UPI intent, credit/debit cards, net banking, and automatic webhook refund processing.</a:t>
             </a:r>
-            <a:endParaRPr lang="en-US" sz="1200" dirty="0"/>
+            <a:endParaRPr lang="en-US" sz="1150" dirty="0"/>
           </a:p>
         </p:txBody>
       </p:sp>
@@ -5473,8 +5485,8 @@
         </p:nvSpPr>
         <p:spPr>
           <a:xfrm>
-            <a:off x="3474720" y="1463040"/>
-            <a:ext cx="2468880" cy="4480560"/>
+            <a:off x="3474720" y="1417320"/>
+            <a:ext cx="2468880" cy="4754880"/>
           </a:xfrm>
           <a:prstGeom prst="roundRect">
             <a:avLst>
@@ -5500,7 +5512,7 @@
         </p:nvSpPr>
         <p:spPr>
           <a:xfrm>
-            <a:off x="3749040" y="1737360"/>
+            <a:off x="3749040" y="1691640"/>
             <a:ext cx="1920240" cy="548640"/>
           </a:xfrm>
           <a:prstGeom prst="rect">
@@ -5539,7 +5551,7 @@
         </p:nvSpPr>
         <p:spPr>
           <a:xfrm>
-            <a:off x="3749040" y="2377440"/>
+            <a:off x="3749040" y="2331720"/>
             <a:ext cx="1920240" cy="548640"/>
           </a:xfrm>
           <a:prstGeom prst="rect">
@@ -5578,7 +5590,7 @@
         </p:nvSpPr>
         <p:spPr>
           <a:xfrm>
-            <a:off x="3749040" y="3017520"/>
+            <a:off x="3749040" y="2971800"/>
             <a:ext cx="1920240" cy="274320"/>
           </a:xfrm>
           <a:prstGeom prst="roundRect">
@@ -5605,7 +5617,7 @@
         </p:nvSpPr>
         <p:spPr>
           <a:xfrm>
-            <a:off x="3749040" y="3017520"/>
+            <a:off x="3749040" y="2971800"/>
             <a:ext cx="1920240" cy="274320"/>
           </a:xfrm>
           <a:prstGeom prst="rect">
@@ -5644,8 +5656,8 @@
         </p:nvSpPr>
         <p:spPr>
           <a:xfrm>
-            <a:off x="3749040" y="3474720"/>
-            <a:ext cx="1920240" cy="2194560"/>
+            <a:off x="3749040" y="3429000"/>
+            <a:ext cx="1920240" cy="2377440"/>
           </a:xfrm>
           <a:prstGeom prst="rect">
             <a:avLst/>
@@ -5659,12 +5671,12 @@
           <a:p>
             <a:pPr indent="0" marL="0">
               <a:lnSpc>
-                <a:spcPts val="1800"/>
+                <a:spcPts val="1700"/>
               </a:lnSpc>
               <a:buNone/>
             </a:pPr>
             <a:r>
-              <a:rPr lang="en-US" sz="1200" dirty="0">
+              <a:rPr lang="en-US" sz="1150" dirty="0">
                 <a:solidFill>
                   <a:srgbClr val="94A3B8"/>
                 </a:solidFill>
@@ -5674,7 +5686,7 @@
               </a:rPr>
               <a:t>Render interactive map visualizer showing real-time delivery rider coordinates, route polylines, and dynamic traffic-based ETA.</a:t>
             </a:r>
-            <a:endParaRPr lang="en-US" sz="1200" dirty="0"/>
+            <a:endParaRPr lang="en-US" sz="1150" dirty="0"/>
           </a:p>
         </p:txBody>
       </p:sp>
@@ -5686,8 +5698,8 @@
         </p:nvSpPr>
         <p:spPr>
           <a:xfrm>
-            <a:off x="6217920" y="1463040"/>
-            <a:ext cx="2468880" cy="4480560"/>
+            <a:off x="6217920" y="1417320"/>
+            <a:ext cx="2468880" cy="4754880"/>
           </a:xfrm>
           <a:prstGeom prst="roundRect">
             <a:avLst>
@@ -5713,7 +5725,7 @@
         </p:nvSpPr>
         <p:spPr>
           <a:xfrm>
-            <a:off x="6492240" y="1737360"/>
+            <a:off x="6492240" y="1691640"/>
             <a:ext cx="1920240" cy="548640"/>
           </a:xfrm>
           <a:prstGeom prst="rect">
@@ -5752,7 +5764,7 @@
         </p:nvSpPr>
         <p:spPr>
           <a:xfrm>
-            <a:off x="6492240" y="2377440"/>
+            <a:off x="6492240" y="2331720"/>
             <a:ext cx="1920240" cy="548640"/>
           </a:xfrm>
           <a:prstGeom prst="rect">
@@ -5791,7 +5803,7 @@
         </p:nvSpPr>
         <p:spPr>
           <a:xfrm>
-            <a:off x="6492240" y="3017520"/>
+            <a:off x="6492240" y="2971800"/>
             <a:ext cx="1920240" cy="274320"/>
           </a:xfrm>
           <a:prstGeom prst="roundRect">
@@ -5818,7 +5830,7 @@
         </p:nvSpPr>
         <p:spPr>
           <a:xfrm>
-            <a:off x="6492240" y="3017520"/>
+            <a:off x="6492240" y="2971800"/>
             <a:ext cx="1920240" cy="274320"/>
           </a:xfrm>
           <a:prstGeom prst="rect">
@@ -5857,8 +5869,8 @@
         </p:nvSpPr>
         <p:spPr>
           <a:xfrm>
-            <a:off x="6492240" y="3474720"/>
-            <a:ext cx="1920240" cy="2194560"/>
+            <a:off x="6492240" y="3429000"/>
+            <a:ext cx="1920240" cy="2377440"/>
           </a:xfrm>
           <a:prstGeom prst="rect">
             <a:avLst/>
@@ -5872,12 +5884,12 @@
           <a:p>
             <a:pPr indent="0" marL="0">
               <a:lnSpc>
-                <a:spcPts val="1800"/>
+                <a:spcPts val="1700"/>
               </a:lnSpc>
               <a:buNone/>
             </a:pPr>
             <a:r>
-              <a:rPr lang="en-US" sz="1200" dirty="0">
+              <a:rPr lang="en-US" sz="1150" dirty="0">
                 <a:solidFill>
                   <a:srgbClr val="94A3B8"/>
                 </a:solidFill>
@@ -5887,7 +5899,7 @@
               </a:rPr>
               <a:t>Automated dispatch notifications, OTP verification at delivery handover, and live order confirmation alerts to customer phone.</a:t>
             </a:r>
-            <a:endParaRPr lang="en-US" sz="1200" dirty="0"/>
+            <a:endParaRPr lang="en-US" sz="1150" dirty="0"/>
           </a:p>
         </p:txBody>
       </p:sp>
@@ -5899,8 +5911,8 @@
         </p:nvSpPr>
         <p:spPr>
           <a:xfrm>
-            <a:off x="8961120" y="1463040"/>
-            <a:ext cx="2468880" cy="4480560"/>
+            <a:off x="8961120" y="1417320"/>
+            <a:ext cx="2468880" cy="4754880"/>
           </a:xfrm>
           <a:prstGeom prst="roundRect">
             <a:avLst>
@@ -5926,7 +5938,7 @@
         </p:nvSpPr>
         <p:spPr>
           <a:xfrm>
-            <a:off x="9235440" y="1737360"/>
+            <a:off x="9235440" y="1691640"/>
             <a:ext cx="1920240" cy="548640"/>
           </a:xfrm>
           <a:prstGeom prst="rect">
@@ -5965,7 +5977,7 @@
         </p:nvSpPr>
         <p:spPr>
           <a:xfrm>
-            <a:off x="9235440" y="2377440"/>
+            <a:off x="9235440" y="2331720"/>
             <a:ext cx="1920240" cy="548640"/>
           </a:xfrm>
           <a:prstGeom prst="rect">
@@ -6004,7 +6016,7 @@
         </p:nvSpPr>
         <p:spPr>
           <a:xfrm>
-            <a:off x="9235440" y="3017520"/>
+            <a:off x="9235440" y="2971800"/>
             <a:ext cx="1920240" cy="274320"/>
           </a:xfrm>
           <a:prstGeom prst="roundRect">
@@ -6031,7 +6043,7 @@
         </p:nvSpPr>
         <p:spPr>
           <a:xfrm>
-            <a:off x="9235440" y="3017520"/>
+            <a:off x="9235440" y="2971800"/>
             <a:ext cx="1920240" cy="274320"/>
           </a:xfrm>
           <a:prstGeom prst="rect">
@@ -6070,8 +6082,8 @@
         </p:nvSpPr>
         <p:spPr>
           <a:xfrm>
-            <a:off x="9235440" y="3474720"/>
-            <a:ext cx="1920240" cy="2194560"/>
+            <a:off x="9235440" y="3429000"/>
+            <a:ext cx="1920240" cy="2377440"/>
           </a:xfrm>
           <a:prstGeom prst="rect">
             <a:avLst/>
@@ -6085,12 +6097,12 @@
           <a:p>
             <a:pPr indent="0" marL="0">
               <a:lnSpc>
-                <a:spcPts val="1800"/>
+                <a:spcPts val="1700"/>
               </a:lnSpc>
               <a:buNone/>
             </a:pPr>
             <a:r>
-              <a:rPr lang="en-US" sz="1200" dirty="0">
+              <a:rPr lang="en-US" sz="1150" dirty="0">
                 <a:solidFill>
                   <a:srgbClr val="94A3B8"/>
                 </a:solidFill>
@@ -6100,7 +6112,7 @@
               </a:rPr>
               <a:t>Interactive business dashboard with revenue charts, top-selling dishes, peak dining hours, and delivery fleet velocity metrics.</a:t>
             </a:r>
-            <a:endParaRPr lang="en-US" sz="1200" dirty="0"/>
+            <a:endParaRPr lang="en-US" sz="1150" dirty="0"/>
           </a:p>
         </p:txBody>
       </p:sp>
@@ -6144,8 +6156,8 @@
         </p:nvSpPr>
         <p:spPr>
           <a:xfrm>
-            <a:off x="731520" y="320040"/>
-            <a:ext cx="2011680" cy="256032"/>
+            <a:off x="731520" y="347472"/>
+            <a:ext cx="2286000" cy="274320"/>
           </a:xfrm>
           <a:prstGeom prst="roundRect">
             <a:avLst>
@@ -6171,8 +6183,8 @@
         </p:nvSpPr>
         <p:spPr>
           <a:xfrm>
-            <a:off x="731520" y="320040"/>
-            <a:ext cx="2011680" cy="256032"/>
+            <a:off x="731520" y="347472"/>
+            <a:ext cx="2286000" cy="274320"/>
           </a:xfrm>
           <a:prstGeom prst="rect">
             <a:avLst/>
@@ -6188,7 +6200,7 @@
               <a:buNone/>
             </a:pPr>
             <a:r>
-              <a:rPr lang="en-US" sz="900" b="1" dirty="0">
+              <a:rPr lang="en-US" sz="950" b="1" dirty="0">
                 <a:solidFill>
                   <a:srgbClr val="F4B942"/>
                 </a:solidFill>
@@ -6198,7 +6210,7 @@
               </a:rPr>
               <a:t>SECTION 2 • TECHNOLOGY STACK</a:t>
             </a:r>
-            <a:endParaRPr lang="en-US" sz="900" dirty="0"/>
+            <a:endParaRPr lang="en-US" sz="950" dirty="0"/>
           </a:p>
         </p:txBody>
       </p:sp>
@@ -6210,8 +6222,8 @@
         </p:nvSpPr>
         <p:spPr>
           <a:xfrm>
-            <a:off x="9509760" y="320040"/>
-            <a:ext cx="1920240" cy="256032"/>
+            <a:off x="8961120" y="347472"/>
+            <a:ext cx="2468880" cy="274320"/>
           </a:xfrm>
           <a:prstGeom prst="roundRect">
             <a:avLst>
@@ -6237,8 +6249,8 @@
         </p:nvSpPr>
         <p:spPr>
           <a:xfrm>
-            <a:off x="9509760" y="320040"/>
-            <a:ext cx="1920240" cy="256032"/>
+            <a:off x="8961120" y="347472"/>
+            <a:ext cx="2468880" cy="274320"/>
           </a:xfrm>
           <a:prstGeom prst="rect">
             <a:avLst/>
@@ -6254,7 +6266,7 @@
               <a:buNone/>
             </a:pPr>
             <a:r>
-              <a:rPr lang="en-US" sz="850" b="1" dirty="0">
+              <a:rPr lang="en-US" sz="900" b="1" dirty="0">
                 <a:solidFill>
                   <a:srgbClr val="94A3B8"/>
                 </a:solidFill>
@@ -6264,7 +6276,7 @@
               </a:rPr>
               <a:t>TAP ACADEMY EVALUATION</a:t>
             </a:r>
-            <a:endParaRPr lang="en-US" sz="850" dirty="0"/>
+            <a:endParaRPr lang="en-US" sz="900" dirty="0"/>
           </a:p>
         </p:txBody>
       </p:sp>
@@ -6276,8 +6288,8 @@
         </p:nvSpPr>
         <p:spPr>
           <a:xfrm>
-            <a:off x="731520" y="658368"/>
-            <a:ext cx="10515600" cy="457200"/>
+            <a:off x="731520" y="713232"/>
+            <a:ext cx="10698480" cy="457200"/>
           </a:xfrm>
           <a:prstGeom prst="rect">
             <a:avLst/>
@@ -6301,7 +6313,7 @@
                 <a:ea typeface="Segoe UI" pitchFamily="34" charset="-122"/>
                 <a:cs typeface="Segoe UI" pitchFamily="34" charset="-120"/>
               </a:rPr>
-              <a:t>Production Technology Stack &amp; Architectural Tooling</a:t>
+              <a:t>Verified Production Technology Stack &amp; Tools</a:t>
             </a:r>
             <a:endParaRPr lang="en-US" sz="2200" dirty="0"/>
           </a:p>
@@ -6315,7 +6327,7 @@
         </p:nvSpPr>
         <p:spPr>
           <a:xfrm>
-            <a:off x="731520" y="1143000"/>
+            <a:off x="731520" y="1234440"/>
             <a:ext cx="10698480" cy="0"/>
           </a:xfrm>
           <a:prstGeom prst="line">
@@ -6338,8 +6350,8 @@
         </p:nvSpPr>
         <p:spPr>
           <a:xfrm>
-            <a:off x="731520" y="1463040"/>
-            <a:ext cx="2468880" cy="4480560"/>
+            <a:off x="731520" y="1417320"/>
+            <a:ext cx="2468880" cy="4754880"/>
           </a:xfrm>
           <a:prstGeom prst="roundRect">
             <a:avLst>
@@ -6365,7 +6377,7 @@
         </p:nvSpPr>
         <p:spPr>
           <a:xfrm>
-            <a:off x="1005840" y="1737360"/>
+            <a:off x="1005840" y="1691640"/>
             <a:ext cx="1920240" cy="256032"/>
           </a:xfrm>
           <a:prstGeom prst="roundRect">
@@ -6392,7 +6404,7 @@
         </p:nvSpPr>
         <p:spPr>
           <a:xfrm>
-            <a:off x="1005840" y="1737360"/>
+            <a:off x="1005840" y="1691640"/>
             <a:ext cx="1920240" cy="256032"/>
           </a:xfrm>
           <a:prstGeom prst="rect">
@@ -6431,8 +6443,8 @@
         </p:nvSpPr>
         <p:spPr>
           <a:xfrm>
-            <a:off x="914400" y="2148840"/>
-            <a:ext cx="2103120" cy="365760"/>
+            <a:off x="868680" y="2057400"/>
+            <a:ext cx="2194560" cy="365760"/>
           </a:xfrm>
           <a:prstGeom prst="rect">
             <a:avLst/>
@@ -6470,12 +6482,12 @@
         </p:nvSpPr>
         <p:spPr>
           <a:xfrm>
-            <a:off x="960120" y="2743200"/>
-            <a:ext cx="2011680" cy="594360"/>
+            <a:off x="914400" y="2606040"/>
+            <a:ext cx="2103120" cy="685800"/>
           </a:xfrm>
           <a:prstGeom prst="roundRect">
             <a:avLst>
-              <a:gd name="adj" fmla="val 12308"/>
+              <a:gd name="adj" fmla="val 10667"/>
             </a:avLst>
           </a:prstGeom>
           <a:solidFill>
@@ -6497,8 +6509,8 @@
         </p:nvSpPr>
         <p:spPr>
           <a:xfrm>
-            <a:off x="1051560" y="2743200"/>
-            <a:ext cx="1828800" cy="594360"/>
+            <a:off x="1005840" y="2606040"/>
+            <a:ext cx="1920240" cy="685800"/>
           </a:xfrm>
           <a:prstGeom prst="rect">
             <a:avLst/>
@@ -6511,10 +6523,13 @@
           <a:lstStyle/>
           <a:p>
             <a:pPr indent="0" marL="0">
-              <a:buNone/>
-            </a:pPr>
-            <a:r>
-              <a:rPr lang="en-US" sz="1100" dirty="0">
+              <a:lnSpc>
+                <a:spcPts val="1400"/>
+              </a:lnSpc>
+              <a:buNone/>
+            </a:pPr>
+            <a:r>
+              <a:rPr lang="en-US" sz="1050" dirty="0">
                 <a:solidFill>
                   <a:srgbClr val="F8FAFC"/>
                 </a:solidFill>
@@ -6522,9 +6537,9 @@
                 <a:ea typeface="Segoe UI" pitchFamily="34" charset="-122"/>
                 <a:cs typeface="Segoe UI" pitchFamily="34" charset="-120"/>
               </a:rPr>
-              <a:t>✔ HTML5 &amp; Semantic Markup</a:t>
-            </a:r>
-            <a:endParaRPr lang="en-US" sz="1100" dirty="0"/>
+              <a:t>✔ HTML5 Semantic Markup</a:t>
+            </a:r>
+            <a:endParaRPr lang="en-US" sz="1050" dirty="0"/>
           </a:p>
         </p:txBody>
       </p:sp>
@@ -6536,12 +6551,12 @@
         </p:nvSpPr>
         <p:spPr>
           <a:xfrm>
-            <a:off x="960120" y="3520440"/>
-            <a:ext cx="2011680" cy="594360"/>
+            <a:off x="914400" y="3474720"/>
+            <a:ext cx="2103120" cy="685800"/>
           </a:xfrm>
           <a:prstGeom prst="roundRect">
             <a:avLst>
-              <a:gd name="adj" fmla="val 12308"/>
+              <a:gd name="adj" fmla="val 10667"/>
             </a:avLst>
           </a:prstGeom>
           <a:solidFill>
@@ -6563,8 +6578,8 @@
         </p:nvSpPr>
         <p:spPr>
           <a:xfrm>
-            <a:off x="1051560" y="3520440"/>
-            <a:ext cx="1828800" cy="594360"/>
+            <a:off x="1005840" y="3474720"/>
+            <a:ext cx="1920240" cy="685800"/>
           </a:xfrm>
           <a:prstGeom prst="rect">
             <a:avLst/>
@@ -6577,10 +6592,13 @@
           <a:lstStyle/>
           <a:p>
             <a:pPr indent="0" marL="0">
-              <a:buNone/>
-            </a:pPr>
-            <a:r>
-              <a:rPr lang="en-US" sz="1100" dirty="0">
+              <a:lnSpc>
+                <a:spcPts val="1400"/>
+              </a:lnSpc>
+              <a:buNone/>
+            </a:pPr>
+            <a:r>
+              <a:rPr lang="en-US" sz="1050" dirty="0">
                 <a:solidFill>
                   <a:srgbClr val="F8FAFC"/>
                 </a:solidFill>
@@ -6588,9 +6606,9 @@
                 <a:ea typeface="Segoe UI" pitchFamily="34" charset="-122"/>
                 <a:cs typeface="Segoe UI" pitchFamily="34" charset="-120"/>
               </a:rPr>
-              <a:t>✔ CSS3 (Glassmorphism &amp; Responsive)</a:t>
-            </a:r>
-            <a:endParaRPr lang="en-US" sz="1100" dirty="0"/>
+              <a:t>✔ CSS3 Glassmorphic Styling</a:t>
+            </a:r>
+            <a:endParaRPr lang="en-US" sz="1050" dirty="0"/>
           </a:p>
         </p:txBody>
       </p:sp>
@@ -6602,12 +6620,12 @@
         </p:nvSpPr>
         <p:spPr>
           <a:xfrm>
-            <a:off x="960120" y="4297680"/>
-            <a:ext cx="2011680" cy="594360"/>
+            <a:off x="914400" y="4343400"/>
+            <a:ext cx="2103120" cy="685800"/>
           </a:xfrm>
           <a:prstGeom prst="roundRect">
             <a:avLst>
-              <a:gd name="adj" fmla="val 12308"/>
+              <a:gd name="adj" fmla="val 10667"/>
             </a:avLst>
           </a:prstGeom>
           <a:solidFill>
@@ -6629,8 +6647,8 @@
         </p:nvSpPr>
         <p:spPr>
           <a:xfrm>
-            <a:off x="1051560" y="4297680"/>
-            <a:ext cx="1828800" cy="594360"/>
+            <a:off x="1005840" y="4343400"/>
+            <a:ext cx="1920240" cy="685800"/>
           </a:xfrm>
           <a:prstGeom prst="rect">
             <a:avLst/>
@@ -6643,10 +6661,13 @@
           <a:lstStyle/>
           <a:p>
             <a:pPr indent="0" marL="0">
-              <a:buNone/>
-            </a:pPr>
-            <a:r>
-              <a:rPr lang="en-US" sz="1100" dirty="0">
+              <a:lnSpc>
+                <a:spcPts val="1400"/>
+              </a:lnSpc>
+              <a:buNone/>
+            </a:pPr>
+            <a:r>
+              <a:rPr lang="en-US" sz="1050" dirty="0">
                 <a:solidFill>
                   <a:srgbClr val="F8FAFC"/>
                 </a:solidFill>
@@ -6654,9 +6675,9 @@
                 <a:ea typeface="Segoe UI" pitchFamily="34" charset="-122"/>
                 <a:cs typeface="Segoe UI" pitchFamily="34" charset="-120"/>
               </a:rPr>
-              <a:t>✔ Vanilla JavaScript (DOM &amp; Fetch API)</a:t>
-            </a:r>
-            <a:endParaRPr lang="en-US" sz="1100" dirty="0"/>
+              <a:t>✔ Vanilla JavaScript (DOM &amp; Fetch)</a:t>
+            </a:r>
+            <a:endParaRPr lang="en-US" sz="1050" dirty="0"/>
           </a:p>
         </p:txBody>
       </p:sp>
@@ -6668,12 +6689,12 @@
         </p:nvSpPr>
         <p:spPr>
           <a:xfrm>
-            <a:off x="960120" y="5074920"/>
-            <a:ext cx="2011680" cy="594360"/>
+            <a:off x="914400" y="5212080"/>
+            <a:ext cx="2103120" cy="685800"/>
           </a:xfrm>
           <a:prstGeom prst="roundRect">
             <a:avLst>
-              <a:gd name="adj" fmla="val 12308"/>
+              <a:gd name="adj" fmla="val 10667"/>
             </a:avLst>
           </a:prstGeom>
           <a:solidFill>
@@ -6695,8 +6716,8 @@
         </p:nvSpPr>
         <p:spPr>
           <a:xfrm>
-            <a:off x="1051560" y="5074920"/>
-            <a:ext cx="1828800" cy="594360"/>
+            <a:off x="1005840" y="5212080"/>
+            <a:ext cx="1920240" cy="685800"/>
           </a:xfrm>
           <a:prstGeom prst="rect">
             <a:avLst/>
@@ -6709,10 +6730,13 @@
           <a:lstStyle/>
           <a:p>
             <a:pPr indent="0" marL="0">
-              <a:buNone/>
-            </a:pPr>
-            <a:r>
-              <a:rPr lang="en-US" sz="1100" dirty="0">
+              <a:lnSpc>
+                <a:spcPts val="1400"/>
+              </a:lnSpc>
+              <a:buNone/>
+            </a:pPr>
+            <a:r>
+              <a:rPr lang="en-US" sz="1050" dirty="0">
                 <a:solidFill>
                   <a:srgbClr val="F8FAFC"/>
                 </a:solidFill>
@@ -6720,9 +6744,9 @@
                 <a:ea typeface="Segoe UI" pitchFamily="34" charset="-122"/>
                 <a:cs typeface="Segoe UI" pitchFamily="34" charset="-120"/>
               </a:rPr>
-              <a:t>✔ JSP 2.3 &amp; JSTL Expression Language</a:t>
-            </a:r>
-            <a:endParaRPr lang="en-US" sz="1100" dirty="0"/>
+              <a:t>✔ JSP 2.3 &amp; JSTL Expression Lang.</a:t>
+            </a:r>
+            <a:endParaRPr lang="en-US" sz="1050" dirty="0"/>
           </a:p>
         </p:txBody>
       </p:sp>
@@ -6734,8 +6758,8 @@
         </p:nvSpPr>
         <p:spPr>
           <a:xfrm>
-            <a:off x="3474720" y="1463040"/>
-            <a:ext cx="2468880" cy="4480560"/>
+            <a:off x="3474720" y="1417320"/>
+            <a:ext cx="2468880" cy="4754880"/>
           </a:xfrm>
           <a:prstGeom prst="roundRect">
             <a:avLst>
@@ -6761,7 +6785,7 @@
         </p:nvSpPr>
         <p:spPr>
           <a:xfrm>
-            <a:off x="3749040" y="1737360"/>
+            <a:off x="3749040" y="1691640"/>
             <a:ext cx="1920240" cy="256032"/>
           </a:xfrm>
           <a:prstGeom prst="roundRect">
@@ -6788,7 +6812,7 @@
         </p:nvSpPr>
         <p:spPr>
           <a:xfrm>
-            <a:off x="3749040" y="1737360"/>
+            <a:off x="3749040" y="1691640"/>
             <a:ext cx="1920240" cy="256032"/>
           </a:xfrm>
           <a:prstGeom prst="rect">
@@ -6827,8 +6851,8 @@
         </p:nvSpPr>
         <p:spPr>
           <a:xfrm>
-            <a:off x="3657600" y="2148840"/>
-            <a:ext cx="2103120" cy="365760"/>
+            <a:off x="3611880" y="2057400"/>
+            <a:ext cx="2194560" cy="365760"/>
           </a:xfrm>
           <a:prstGeom prst="rect">
             <a:avLst/>
@@ -6866,12 +6890,12 @@
         </p:nvSpPr>
         <p:spPr>
           <a:xfrm>
-            <a:off x="3703320" y="2743200"/>
-            <a:ext cx="2011680" cy="594360"/>
+            <a:off x="3657600" y="2606040"/>
+            <a:ext cx="2103120" cy="685800"/>
           </a:xfrm>
           <a:prstGeom prst="roundRect">
             <a:avLst>
-              <a:gd name="adj" fmla="val 12308"/>
+              <a:gd name="adj" fmla="val 10667"/>
             </a:avLst>
           </a:prstGeom>
           <a:solidFill>
@@ -6893,8 +6917,8 @@
         </p:nvSpPr>
         <p:spPr>
           <a:xfrm>
-            <a:off x="3794760" y="2743200"/>
-            <a:ext cx="1828800" cy="594360"/>
+            <a:off x="3749040" y="2606040"/>
+            <a:ext cx="1920240" cy="685800"/>
           </a:xfrm>
           <a:prstGeom prst="rect">
             <a:avLst/>
@@ -6907,10 +6931,13 @@
           <a:lstStyle/>
           <a:p>
             <a:pPr indent="0" marL="0">
-              <a:buNone/>
-            </a:pPr>
-            <a:r>
-              <a:rPr lang="en-US" sz="1100" dirty="0">
+              <a:lnSpc>
+                <a:spcPts val="1400"/>
+              </a:lnSpc>
+              <a:buNone/>
+            </a:pPr>
+            <a:r>
+              <a:rPr lang="en-US" sz="1050" dirty="0">
                 <a:solidFill>
                   <a:srgbClr val="F8FAFC"/>
                 </a:solidFill>
@@ -6920,7 +6947,7 @@
               </a:rPr>
               <a:t>✔ Java SE 21 (LTS Release)</a:t>
             </a:r>
-            <a:endParaRPr lang="en-US" sz="1100" dirty="0"/>
+            <a:endParaRPr lang="en-US" sz="1050" dirty="0"/>
           </a:p>
         </p:txBody>
       </p:sp>
@@ -6932,12 +6959,12 @@
         </p:nvSpPr>
         <p:spPr>
           <a:xfrm>
-            <a:off x="3703320" y="3520440"/>
-            <a:ext cx="2011680" cy="594360"/>
+            <a:off x="3657600" y="3474720"/>
+            <a:ext cx="2103120" cy="685800"/>
           </a:xfrm>
           <a:prstGeom prst="roundRect">
             <a:avLst>
-              <a:gd name="adj" fmla="val 12308"/>
+              <a:gd name="adj" fmla="val 10667"/>
             </a:avLst>
           </a:prstGeom>
           <a:solidFill>
@@ -6959,8 +6986,8 @@
         </p:nvSpPr>
         <p:spPr>
           <a:xfrm>
-            <a:off x="3794760" y="3520440"/>
-            <a:ext cx="1828800" cy="594360"/>
+            <a:off x="3749040" y="3474720"/>
+            <a:ext cx="1920240" cy="685800"/>
           </a:xfrm>
           <a:prstGeom prst="rect">
             <a:avLst/>
@@ -6973,10 +7000,13 @@
           <a:lstStyle/>
           <a:p>
             <a:pPr indent="0" marL="0">
-              <a:buNone/>
-            </a:pPr>
-            <a:r>
-              <a:rPr lang="en-US" sz="1100" dirty="0">
+              <a:lnSpc>
+                <a:spcPts val="1400"/>
+              </a:lnSpc>
+              <a:buNone/>
+            </a:pPr>
+            <a:r>
+              <a:rPr lang="en-US" sz="1050" dirty="0">
                 <a:solidFill>
                   <a:srgbClr val="F8FAFC"/>
                 </a:solidFill>
@@ -6986,7 +7016,7 @@
               </a:rPr>
               <a:t>✔ Jakarta Servlet 6.0 Specification</a:t>
             </a:r>
-            <a:endParaRPr lang="en-US" sz="1100" dirty="0"/>
+            <a:endParaRPr lang="en-US" sz="1050" dirty="0"/>
           </a:p>
         </p:txBody>
       </p:sp>
@@ -6998,12 +7028,12 @@
         </p:nvSpPr>
         <p:spPr>
           <a:xfrm>
-            <a:off x="3703320" y="4297680"/>
-            <a:ext cx="2011680" cy="594360"/>
+            <a:off x="3657600" y="4343400"/>
+            <a:ext cx="2103120" cy="685800"/>
           </a:xfrm>
           <a:prstGeom prst="roundRect">
             <a:avLst>
-              <a:gd name="adj" fmla="val 12308"/>
+              <a:gd name="adj" fmla="val 10667"/>
             </a:avLst>
           </a:prstGeom>
           <a:solidFill>
@@ -7025,8 +7055,8 @@
         </p:nvSpPr>
         <p:spPr>
           <a:xfrm>
-            <a:off x="3794760" y="4297680"/>
-            <a:ext cx="1828800" cy="594360"/>
+            <a:off x="3749040" y="4343400"/>
+            <a:ext cx="1920240" cy="685800"/>
           </a:xfrm>
           <a:prstGeom prst="rect">
             <a:avLst/>
@@ -7039,10 +7069,13 @@
           <a:lstStyle/>
           <a:p>
             <a:pPr indent="0" marL="0">
-              <a:buNone/>
-            </a:pPr>
-            <a:r>
-              <a:rPr lang="en-US" sz="1100" dirty="0">
+              <a:lnSpc>
+                <a:spcPts val="1400"/>
+              </a:lnSpc>
+              <a:buNone/>
+            </a:pPr>
+            <a:r>
+              <a:rPr lang="en-US" sz="1050" dirty="0">
                 <a:solidFill>
                   <a:srgbClr val="F8FAFC"/>
                 </a:solidFill>
@@ -7050,9 +7083,9 @@
                 <a:ea typeface="Segoe UI" pitchFamily="34" charset="-122"/>
                 <a:cs typeface="Segoe UI" pitchFamily="34" charset="-120"/>
               </a:rPr>
-              <a:t>✔ MVC Architecture Implementation</a:t>
-            </a:r>
-            <a:endParaRPr lang="en-US" sz="1100" dirty="0"/>
+              <a:t>✔ MVC Architectural Pattern</a:t>
+            </a:r>
+            <a:endParaRPr lang="en-US" sz="1050" dirty="0"/>
           </a:p>
         </p:txBody>
       </p:sp>
@@ -7064,12 +7097,12 @@
         </p:nvSpPr>
         <p:spPr>
           <a:xfrm>
-            <a:off x="3703320" y="5074920"/>
-            <a:ext cx="2011680" cy="594360"/>
+            <a:off x="3657600" y="5212080"/>
+            <a:ext cx="2103120" cy="685800"/>
           </a:xfrm>
           <a:prstGeom prst="roundRect">
             <a:avLst>
-              <a:gd name="adj" fmla="val 12308"/>
+              <a:gd name="adj" fmla="val 10667"/>
             </a:avLst>
           </a:prstGeom>
           <a:solidFill>
@@ -7091,8 +7124,8 @@
         </p:nvSpPr>
         <p:spPr>
           <a:xfrm>
-            <a:off x="3794760" y="5074920"/>
-            <a:ext cx="1828800" cy="594360"/>
+            <a:off x="3749040" y="5212080"/>
+            <a:ext cx="1920240" cy="685800"/>
           </a:xfrm>
           <a:prstGeom prst="rect">
             <a:avLst/>
@@ -7105,10 +7138,13 @@
           <a:lstStyle/>
           <a:p>
             <a:pPr indent="0" marL="0">
-              <a:buNone/>
-            </a:pPr>
-            <a:r>
-              <a:rPr lang="en-US" sz="1100" dirty="0">
+              <a:lnSpc>
+                <a:spcPts val="1400"/>
+              </a:lnSpc>
+              <a:buNone/>
+            </a:pPr>
+            <a:r>
+              <a:rPr lang="en-US" sz="1050" dirty="0">
                 <a:solidFill>
                   <a:srgbClr val="F8FAFC"/>
                 </a:solidFill>
@@ -7116,9 +7152,9 @@
                 <a:ea typeface="Segoe UI" pitchFamily="34" charset="-122"/>
                 <a:cs typeface="Segoe UI" pitchFamily="34" charset="-120"/>
               </a:rPr>
-              <a:t>✔ Session Management (HTTPSession)</a:t>
-            </a:r>
-            <a:endParaRPr lang="en-US" sz="1100" dirty="0"/>
+              <a:t>✔ HttpSession State Management</a:t>
+            </a:r>
+            <a:endParaRPr lang="en-US" sz="1050" dirty="0"/>
           </a:p>
         </p:txBody>
       </p:sp>
@@ -7130,8 +7166,8 @@
         </p:nvSpPr>
         <p:spPr>
           <a:xfrm>
-            <a:off x="6217920" y="1463040"/>
-            <a:ext cx="2468880" cy="4480560"/>
+            <a:off x="6217920" y="1417320"/>
+            <a:ext cx="2468880" cy="4754880"/>
           </a:xfrm>
           <a:prstGeom prst="roundRect">
             <a:avLst>
@@ -7157,7 +7193,7 @@
         </p:nvSpPr>
         <p:spPr>
           <a:xfrm>
-            <a:off x="6492240" y="1737360"/>
+            <a:off x="6492240" y="1691640"/>
             <a:ext cx="1920240" cy="256032"/>
           </a:xfrm>
           <a:prstGeom prst="roundRect">
@@ -7184,7 +7220,7 @@
         </p:nvSpPr>
         <p:spPr>
           <a:xfrm>
-            <a:off x="6492240" y="1737360"/>
+            <a:off x="6492240" y="1691640"/>
             <a:ext cx="1920240" cy="256032"/>
           </a:xfrm>
           <a:prstGeom prst="rect">
@@ -7209,7 +7245,7 @@
                 <a:ea typeface="Segoe UI" pitchFamily="34" charset="-122"/>
                 <a:cs typeface="Segoe UI" pitchFamily="34" charset="-120"/>
               </a:rPr>
-              <a:t>PERSISTENCE</a:t>
+              <a:t>DATA PERSISTENCE</a:t>
             </a:r>
             <a:endParaRPr lang="en-US" sz="900" dirty="0"/>
           </a:p>
@@ -7223,8 +7259,8 @@
         </p:nvSpPr>
         <p:spPr>
           <a:xfrm>
-            <a:off x="6400800" y="2148840"/>
-            <a:ext cx="2103120" cy="365760"/>
+            <a:off x="6355080" y="2057400"/>
+            <a:ext cx="2194560" cy="365760"/>
           </a:xfrm>
           <a:prstGeom prst="rect">
             <a:avLst/>
@@ -7262,12 +7298,12 @@
         </p:nvSpPr>
         <p:spPr>
           <a:xfrm>
-            <a:off x="6446520" y="2743200"/>
-            <a:ext cx="2011680" cy="594360"/>
+            <a:off x="6400800" y="2606040"/>
+            <a:ext cx="2103120" cy="685800"/>
           </a:xfrm>
           <a:prstGeom prst="roundRect">
             <a:avLst>
-              <a:gd name="adj" fmla="val 12308"/>
+              <a:gd name="adj" fmla="val 10667"/>
             </a:avLst>
           </a:prstGeom>
           <a:solidFill>
@@ -7289,8 +7325,8 @@
         </p:nvSpPr>
         <p:spPr>
           <a:xfrm>
-            <a:off x="6537960" y="2743200"/>
-            <a:ext cx="1828800" cy="594360"/>
+            <a:off x="6492240" y="2606040"/>
+            <a:ext cx="1920240" cy="685800"/>
           </a:xfrm>
           <a:prstGeom prst="rect">
             <a:avLst/>
@@ -7303,10 +7339,13 @@
           <a:lstStyle/>
           <a:p>
             <a:pPr indent="0" marL="0">
-              <a:buNone/>
-            </a:pPr>
-            <a:r>
-              <a:rPr lang="en-US" sz="1100" dirty="0">
+              <a:lnSpc>
+                <a:spcPts val="1400"/>
+              </a:lnSpc>
+              <a:buNone/>
+            </a:pPr>
+            <a:r>
+              <a:rPr lang="en-US" sz="1050" dirty="0">
                 <a:solidFill>
                   <a:srgbClr val="F8FAFC"/>
                 </a:solidFill>
@@ -7316,7 +7355,7 @@
               </a:rPr>
               <a:t>✔ MySQL 8.0 Relational Engine</a:t>
             </a:r>
-            <a:endParaRPr lang="en-US" sz="1100" dirty="0"/>
+            <a:endParaRPr lang="en-US" sz="1050" dirty="0"/>
           </a:p>
         </p:txBody>
       </p:sp>
@@ -7328,12 +7367,12 @@
         </p:nvSpPr>
         <p:spPr>
           <a:xfrm>
-            <a:off x="6446520" y="3520440"/>
-            <a:ext cx="2011680" cy="594360"/>
+            <a:off x="6400800" y="3474720"/>
+            <a:ext cx="2103120" cy="685800"/>
           </a:xfrm>
           <a:prstGeom prst="roundRect">
             <a:avLst>
-              <a:gd name="adj" fmla="val 12308"/>
+              <a:gd name="adj" fmla="val 10667"/>
             </a:avLst>
           </a:prstGeom>
           <a:solidFill>
@@ -7355,8 +7394,8 @@
         </p:nvSpPr>
         <p:spPr>
           <a:xfrm>
-            <a:off x="6537960" y="3520440"/>
-            <a:ext cx="1828800" cy="594360"/>
+            <a:off x="6492240" y="3474720"/>
+            <a:ext cx="1920240" cy="685800"/>
           </a:xfrm>
           <a:prstGeom prst="rect">
             <a:avLst/>
@@ -7369,10 +7408,13 @@
           <a:lstStyle/>
           <a:p>
             <a:pPr indent="0" marL="0">
-              <a:buNone/>
-            </a:pPr>
-            <a:r>
-              <a:rPr lang="en-US" sz="1100" dirty="0">
+              <a:lnSpc>
+                <a:spcPts val="1400"/>
+              </a:lnSpc>
+              <a:buNone/>
+            </a:pPr>
+            <a:r>
+              <a:rPr lang="en-US" sz="1050" dirty="0">
                 <a:solidFill>
                   <a:srgbClr val="F8FAFC"/>
                 </a:solidFill>
@@ -7380,9 +7422,9 @@
                 <a:ea typeface="Segoe UI" pitchFamily="34" charset="-122"/>
                 <a:cs typeface="Segoe UI" pitchFamily="34" charset="-120"/>
               </a:rPr>
-              <a:t>✔ JDBC (Java Database Connectivity)</a:t>
-            </a:r>
-            <a:endParaRPr lang="en-US" sz="1100" dirty="0"/>
+              <a:t>✔ JDBC (java.sql API)</a:t>
+            </a:r>
+            <a:endParaRPr lang="en-US" sz="1050" dirty="0"/>
           </a:p>
         </p:txBody>
       </p:sp>
@@ -7394,12 +7436,12 @@
         </p:nvSpPr>
         <p:spPr>
           <a:xfrm>
-            <a:off x="6446520" y="4297680"/>
-            <a:ext cx="2011680" cy="594360"/>
+            <a:off x="6400800" y="4343400"/>
+            <a:ext cx="2103120" cy="685800"/>
           </a:xfrm>
           <a:prstGeom prst="roundRect">
             <a:avLst>
-              <a:gd name="adj" fmla="val 12308"/>
+              <a:gd name="adj" fmla="val 10667"/>
             </a:avLst>
           </a:prstGeom>
           <a:solidFill>
@@ -7421,8 +7463,8 @@
         </p:nvSpPr>
         <p:spPr>
           <a:xfrm>
-            <a:off x="6537960" y="4297680"/>
-            <a:ext cx="1828800" cy="594360"/>
+            <a:off x="6492240" y="4343400"/>
+            <a:ext cx="1920240" cy="685800"/>
           </a:xfrm>
           <a:prstGeom prst="rect">
             <a:avLst/>
@@ -7435,10 +7477,13 @@
           <a:lstStyle/>
           <a:p>
             <a:pPr indent="0" marL="0">
-              <a:buNone/>
-            </a:pPr>
-            <a:r>
-              <a:rPr lang="en-US" sz="1100" dirty="0">
+              <a:lnSpc>
+                <a:spcPts val="1400"/>
+              </a:lnSpc>
+              <a:buNone/>
+            </a:pPr>
+            <a:r>
+              <a:rPr lang="en-US" sz="1050" dirty="0">
                 <a:solidFill>
                   <a:srgbClr val="F8FAFC"/>
                 </a:solidFill>
@@ -7446,9 +7491,9 @@
                 <a:ea typeface="Segoe UI" pitchFamily="34" charset="-122"/>
                 <a:cs typeface="Segoe UI" pitchFamily="34" charset="-120"/>
               </a:rPr>
-              <a:t>✔ PreparedStatement Batch Insertion</a:t>
-            </a:r>
-            <a:endParaRPr lang="en-US" sz="1100" dirty="0"/>
+              <a:t>✔ PreparedStatement SQL Security</a:t>
+            </a:r>
+            <a:endParaRPr lang="en-US" sz="1050" dirty="0"/>
           </a:p>
         </p:txBody>
       </p:sp>
@@ -7460,12 +7505,12 @@
         </p:nvSpPr>
         <p:spPr>
           <a:xfrm>
-            <a:off x="6446520" y="5074920"/>
-            <a:ext cx="2011680" cy="594360"/>
+            <a:off x="6400800" y="5212080"/>
+            <a:ext cx="2103120" cy="685800"/>
           </a:xfrm>
           <a:prstGeom prst="roundRect">
             <a:avLst>
-              <a:gd name="adj" fmla="val 12308"/>
+              <a:gd name="adj" fmla="val 10667"/>
             </a:avLst>
           </a:prstGeom>
           <a:solidFill>
@@ -7487,8 +7532,8 @@
         </p:nvSpPr>
         <p:spPr>
           <a:xfrm>
-            <a:off x="6537960" y="5074920"/>
-            <a:ext cx="1828800" cy="594360"/>
+            <a:off x="6492240" y="5212080"/>
+            <a:ext cx="1920240" cy="685800"/>
           </a:xfrm>
           <a:prstGeom prst="rect">
             <a:avLst/>
@@ -7501,10 +7546,13 @@
           <a:lstStyle/>
           <a:p>
             <a:pPr indent="0" marL="0">
-              <a:buNone/>
-            </a:pPr>
-            <a:r>
-              <a:rPr lang="en-US" sz="1100" dirty="0">
+              <a:lnSpc>
+                <a:spcPts val="1400"/>
+              </a:lnSpc>
+              <a:buNone/>
+            </a:pPr>
+            <a:r>
+              <a:rPr lang="en-US" sz="1050" dirty="0">
                 <a:solidFill>
                   <a:srgbClr val="F8FAFC"/>
                 </a:solidFill>
@@ -7514,7 +7562,7 @@
               </a:rPr>
               <a:t>✔ InnoDB Foreign Key Constraints</a:t>
             </a:r>
-            <a:endParaRPr lang="en-US" sz="1100" dirty="0"/>
+            <a:endParaRPr lang="en-US" sz="1050" dirty="0"/>
           </a:p>
         </p:txBody>
       </p:sp>
@@ -7526,8 +7574,8 @@
         </p:nvSpPr>
         <p:spPr>
           <a:xfrm>
-            <a:off x="8961120" y="1463040"/>
-            <a:ext cx="2468880" cy="4480560"/>
+            <a:off x="8961120" y="1417320"/>
+            <a:ext cx="2468880" cy="4754880"/>
           </a:xfrm>
           <a:prstGeom prst="roundRect">
             <a:avLst>
@@ -7553,7 +7601,7 @@
         </p:nvSpPr>
         <p:spPr>
           <a:xfrm>
-            <a:off x="9235440" y="1737360"/>
+            <a:off x="9235440" y="1691640"/>
             <a:ext cx="1920240" cy="256032"/>
           </a:xfrm>
           <a:prstGeom prst="roundRect">
@@ -7580,7 +7628,7 @@
         </p:nvSpPr>
         <p:spPr>
           <a:xfrm>
-            <a:off x="9235440" y="1737360"/>
+            <a:off x="9235440" y="1691640"/>
             <a:ext cx="1920240" cy="256032"/>
           </a:xfrm>
           <a:prstGeom prst="rect">
@@ -7619,8 +7667,8 @@
         </p:nvSpPr>
         <p:spPr>
           <a:xfrm>
-            <a:off x="9144000" y="2148840"/>
-            <a:ext cx="2103120" cy="365760"/>
+            <a:off x="9098280" y="2057400"/>
+            <a:ext cx="2194560" cy="365760"/>
           </a:xfrm>
           <a:prstGeom prst="rect">
             <a:avLst/>
@@ -7644,7 +7692,7 @@
                 <a:ea typeface="Segoe UI" pitchFamily="34" charset="-122"/>
                 <a:cs typeface="Segoe UI" pitchFamily="34" charset="-120"/>
               </a:rPr>
-              <a:t>Environment &amp; Tooling</a:t>
+              <a:t>Environment &amp; Tools</a:t>
             </a:r>
             <a:endParaRPr lang="en-US" sz="1600" dirty="0"/>
           </a:p>
@@ -7658,12 +7706,12 @@
         </p:nvSpPr>
         <p:spPr>
           <a:xfrm>
-            <a:off x="9189720" y="2743200"/>
-            <a:ext cx="2011680" cy="594360"/>
+            <a:off x="9144000" y="2606040"/>
+            <a:ext cx="2103120" cy="685800"/>
           </a:xfrm>
           <a:prstGeom prst="roundRect">
             <a:avLst>
-              <a:gd name="adj" fmla="val 12308"/>
+              <a:gd name="adj" fmla="val 10667"/>
             </a:avLst>
           </a:prstGeom>
           <a:solidFill>
@@ -7685,8 +7733,8 @@
         </p:nvSpPr>
         <p:spPr>
           <a:xfrm>
-            <a:off x="9281160" y="2743200"/>
-            <a:ext cx="1828800" cy="594360"/>
+            <a:off x="9235440" y="2606040"/>
+            <a:ext cx="1920240" cy="685800"/>
           </a:xfrm>
           <a:prstGeom prst="rect">
             <a:avLst/>
@@ -7699,10 +7747,13 @@
           <a:lstStyle/>
           <a:p>
             <a:pPr indent="0" marL="0">
-              <a:buNone/>
-            </a:pPr>
-            <a:r>
-              <a:rPr lang="en-US" sz="1100" dirty="0">
+              <a:lnSpc>
+                <a:spcPts val="1400"/>
+              </a:lnSpc>
+              <a:buNone/>
+            </a:pPr>
+            <a:r>
+              <a:rPr lang="en-US" sz="1050" dirty="0">
                 <a:solidFill>
                   <a:srgbClr val="F8FAFC"/>
                 </a:solidFill>
@@ -7712,7 +7763,7 @@
               </a:rPr>
               <a:t>✔ Apache Tomcat 10.1 Web Server</a:t>
             </a:r>
-            <a:endParaRPr lang="en-US" sz="1100" dirty="0"/>
+            <a:endParaRPr lang="en-US" sz="1050" dirty="0"/>
           </a:p>
         </p:txBody>
       </p:sp>
@@ -7724,12 +7775,12 @@
         </p:nvSpPr>
         <p:spPr>
           <a:xfrm>
-            <a:off x="9189720" y="3520440"/>
-            <a:ext cx="2011680" cy="594360"/>
+            <a:off x="9144000" y="3474720"/>
+            <a:ext cx="2103120" cy="685800"/>
           </a:xfrm>
           <a:prstGeom prst="roundRect">
             <a:avLst>
-              <a:gd name="adj" fmla="val 12308"/>
+              <a:gd name="adj" fmla="val 10667"/>
             </a:avLst>
           </a:prstGeom>
           <a:solidFill>
@@ -7751,8 +7802,8 @@
         </p:nvSpPr>
         <p:spPr>
           <a:xfrm>
-            <a:off x="9281160" y="3520440"/>
-            <a:ext cx="1828800" cy="594360"/>
+            <a:off x="9235440" y="3474720"/>
+            <a:ext cx="1920240" cy="685800"/>
           </a:xfrm>
           <a:prstGeom prst="rect">
             <a:avLst/>
@@ -7765,10 +7816,13 @@
           <a:lstStyle/>
           <a:p>
             <a:pPr indent="0" marL="0">
-              <a:buNone/>
-            </a:pPr>
-            <a:r>
-              <a:rPr lang="en-US" sz="1100" dirty="0">
+              <a:lnSpc>
+                <a:spcPts val="1400"/>
+              </a:lnSpc>
+              <a:buNone/>
+            </a:pPr>
+            <a:r>
+              <a:rPr lang="en-US" sz="1050" dirty="0">
                 <a:solidFill>
                   <a:srgbClr val="F8FAFC"/>
                 </a:solidFill>
@@ -7776,9 +7830,9 @@
                 <a:ea typeface="Segoe UI" pitchFamily="34" charset="-122"/>
                 <a:cs typeface="Segoe UI" pitchFamily="34" charset="-120"/>
               </a:rPr>
-              <a:t>✔ Eclipse IDE for Enterprise Java</a:t>
-            </a:r>
-            <a:endParaRPr lang="en-US" sz="1100" dirty="0"/>
+              <a:t>✔ Eclipse Enterprise IDE</a:t>
+            </a:r>
+            <a:endParaRPr lang="en-US" sz="1050" dirty="0"/>
           </a:p>
         </p:txBody>
       </p:sp>
@@ -7790,12 +7844,12 @@
         </p:nvSpPr>
         <p:spPr>
           <a:xfrm>
-            <a:off x="9189720" y="4297680"/>
-            <a:ext cx="2011680" cy="594360"/>
+            <a:off x="9144000" y="4343400"/>
+            <a:ext cx="2103120" cy="685800"/>
           </a:xfrm>
           <a:prstGeom prst="roundRect">
             <a:avLst>
-              <a:gd name="adj" fmla="val 12308"/>
+              <a:gd name="adj" fmla="val 10667"/>
             </a:avLst>
           </a:prstGeom>
           <a:solidFill>
@@ -7817,8 +7871,8 @@
         </p:nvSpPr>
         <p:spPr>
           <a:xfrm>
-            <a:off x="9281160" y="4297680"/>
-            <a:ext cx="1828800" cy="594360"/>
+            <a:off x="9235440" y="4343400"/>
+            <a:ext cx="1920240" cy="685800"/>
           </a:xfrm>
           <a:prstGeom prst="rect">
             <a:avLst/>
@@ -7831,10 +7885,13 @@
           <a:lstStyle/>
           <a:p>
             <a:pPr indent="0" marL="0">
-              <a:buNone/>
-            </a:pPr>
-            <a:r>
-              <a:rPr lang="en-US" sz="1100" dirty="0">
+              <a:lnSpc>
+                <a:spcPts val="1400"/>
+              </a:lnSpc>
+              <a:buNone/>
+            </a:pPr>
+            <a:r>
+              <a:rPr lang="en-US" sz="1050" dirty="0">
                 <a:solidFill>
                   <a:srgbClr val="F8FAFC"/>
                 </a:solidFill>
@@ -7842,9 +7899,9 @@
                 <a:ea typeface="Segoe UI" pitchFamily="34" charset="-122"/>
                 <a:cs typeface="Segoe UI" pitchFamily="34" charset="-120"/>
               </a:rPr>
-              <a:t>✔ jBCrypt 0.4 (Password Security)</a:t>
-            </a:r>
-            <a:endParaRPr lang="en-US" sz="1100" dirty="0"/>
+              <a:t>✔ jBCrypt 0.4 Password Hashing</a:t>
+            </a:r>
+            <a:endParaRPr lang="en-US" sz="1050" dirty="0"/>
           </a:p>
         </p:txBody>
       </p:sp>
@@ -7856,12 +7913,12 @@
         </p:nvSpPr>
         <p:spPr>
           <a:xfrm>
-            <a:off x="9189720" y="5074920"/>
-            <a:ext cx="2011680" cy="594360"/>
+            <a:off x="9144000" y="5212080"/>
+            <a:ext cx="2103120" cy="685800"/>
           </a:xfrm>
           <a:prstGeom prst="roundRect">
             <a:avLst>
-              <a:gd name="adj" fmla="val 12308"/>
+              <a:gd name="adj" fmla="val 10667"/>
             </a:avLst>
           </a:prstGeom>
           <a:solidFill>
@@ -7883,8 +7940,8 @@
         </p:nvSpPr>
         <p:spPr>
           <a:xfrm>
-            <a:off x="9281160" y="5074920"/>
-            <a:ext cx="1828800" cy="594360"/>
+            <a:off x="9235440" y="5212080"/>
+            <a:ext cx="1920240" cy="685800"/>
           </a:xfrm>
           <a:prstGeom prst="rect">
             <a:avLst/>
@@ -7897,10 +7954,13 @@
           <a:lstStyle/>
           <a:p>
             <a:pPr indent="0" marL="0">
-              <a:buNone/>
-            </a:pPr>
-            <a:r>
-              <a:rPr lang="en-US" sz="1100" dirty="0">
+              <a:lnSpc>
+                <a:spcPts val="1400"/>
+              </a:lnSpc>
+              <a:buNone/>
+            </a:pPr>
+            <a:r>
+              <a:rPr lang="en-US" sz="1050" dirty="0">
                 <a:solidFill>
                   <a:srgbClr val="F8FAFC"/>
                 </a:solidFill>
@@ -7910,7 +7970,7 @@
               </a:rPr>
               <a:t>✔ MySQL Connector/J 9.2.0 Driver</a:t>
             </a:r>
-            <a:endParaRPr lang="en-US" sz="1100" dirty="0"/>
+            <a:endParaRPr lang="en-US" sz="1050" dirty="0"/>
           </a:p>
         </p:txBody>
       </p:sp>
@@ -7954,8 +8014,8 @@
         </p:nvSpPr>
         <p:spPr>
           <a:xfrm>
-            <a:off x="731520" y="320040"/>
-            <a:ext cx="2011680" cy="256032"/>
+            <a:off x="731520" y="347472"/>
+            <a:ext cx="2286000" cy="274320"/>
           </a:xfrm>
           <a:prstGeom prst="roundRect">
             <a:avLst>
@@ -7981,8 +8041,8 @@
         </p:nvSpPr>
         <p:spPr>
           <a:xfrm>
-            <a:off x="731520" y="320040"/>
-            <a:ext cx="2011680" cy="256032"/>
+            <a:off x="731520" y="347472"/>
+            <a:ext cx="2286000" cy="274320"/>
           </a:xfrm>
           <a:prstGeom prst="rect">
             <a:avLst/>
@@ -7998,7 +8058,7 @@
               <a:buNone/>
             </a:pPr>
             <a:r>
-              <a:rPr lang="en-US" sz="900" b="1" dirty="0">
+              <a:rPr lang="en-US" sz="950" b="1" dirty="0">
                 <a:solidFill>
                   <a:srgbClr val="F4B942"/>
                 </a:solidFill>
@@ -8008,7 +8068,7 @@
               </a:rPr>
               <a:t>SECTION 3 • PROJECT STRUCTURE</a:t>
             </a:r>
-            <a:endParaRPr lang="en-US" sz="900" dirty="0"/>
+            <a:endParaRPr lang="en-US" sz="950" dirty="0"/>
           </a:p>
         </p:txBody>
       </p:sp>
@@ -8020,8 +8080,8 @@
         </p:nvSpPr>
         <p:spPr>
           <a:xfrm>
-            <a:off x="9509760" y="320040"/>
-            <a:ext cx="1920240" cy="256032"/>
+            <a:off x="8961120" y="347472"/>
+            <a:ext cx="2468880" cy="274320"/>
           </a:xfrm>
           <a:prstGeom prst="roundRect">
             <a:avLst>
@@ -8047,8 +8107,8 @@
         </p:nvSpPr>
         <p:spPr>
           <a:xfrm>
-            <a:off x="9509760" y="320040"/>
-            <a:ext cx="1920240" cy="256032"/>
+            <a:off x="8961120" y="347472"/>
+            <a:ext cx="2468880" cy="274320"/>
           </a:xfrm>
           <a:prstGeom prst="rect">
             <a:avLst/>
@@ -8064,7 +8124,7 @@
               <a:buNone/>
             </a:pPr>
             <a:r>
-              <a:rPr lang="en-US" sz="850" b="1" dirty="0">
+              <a:rPr lang="en-US" sz="900" b="1" dirty="0">
                 <a:solidFill>
                   <a:srgbClr val="94A3B8"/>
                 </a:solidFill>
@@ -8074,7 +8134,7 @@
               </a:rPr>
               <a:t>TAP ACADEMY EVALUATION</a:t>
             </a:r>
-            <a:endParaRPr lang="en-US" sz="850" dirty="0"/>
+            <a:endParaRPr lang="en-US" sz="900" dirty="0"/>
           </a:p>
         </p:txBody>
       </p:sp>
@@ -8086,8 +8146,8 @@
         </p:nvSpPr>
         <p:spPr>
           <a:xfrm>
-            <a:off x="731520" y="658368"/>
-            <a:ext cx="10515600" cy="457200"/>
+            <a:off x="731520" y="713232"/>
+            <a:ext cx="10698480" cy="457200"/>
           </a:xfrm>
           <a:prstGeom prst="rect">
             <a:avLst/>
@@ -8111,7 +8171,7 @@
                 <a:ea typeface="Segoe UI" pitchFamily="34" charset="-122"/>
                 <a:cs typeface="Segoe UI" pitchFamily="34" charset="-120"/>
               </a:rPr>
-              <a:t>Eclipse Dynamic Web Project &amp; Layered Package Organization</a:t>
+              <a:t>Eclipse Dynamic Web Project &amp; Layered Organization</a:t>
             </a:r>
             <a:endParaRPr lang="en-US" sz="2200" dirty="0"/>
           </a:p>
@@ -8125,7 +8185,7 @@
         </p:nvSpPr>
         <p:spPr>
           <a:xfrm>
-            <a:off x="731520" y="1143000"/>
+            <a:off x="731520" y="1234440"/>
             <a:ext cx="10698480" cy="0"/>
           </a:xfrm>
           <a:prstGeom prst="line">
@@ -8142,7 +8202,7 @@
       </p:sp>
       <p:pic>
         <p:nvPicPr>
-          <p:cNvPr id="8" name="Image 0" descr="C:\Users\Asus\eclipse-workspace\FoodHouse\FoodHouse_Presentation_Assets\00_project_structure.png">    </p:cNvPr>
+          <p:cNvPr id="8" name="Image 0" descr="C:\Users\Asus\eclipse-workspace\FoodHouse\FoodHouse_Final_Presentation_Package\Presentation_Assets\00_project_structure.png">    </p:cNvPr>
           <p:cNvPicPr>
             <a:picLocks noChangeAspect="1"/>
           </p:cNvPicPr>
@@ -8156,8 +8216,8 @@
         </p:blipFill>
         <p:spPr>
           <a:xfrm>
-            <a:off x="731520" y="1371600"/>
-            <a:ext cx="10698480" cy="4663440"/>
+            <a:off x="731520" y="1417320"/>
+            <a:ext cx="10698480" cy="4846320"/>
           </a:xfrm>
           <a:prstGeom prst="rect">
             <a:avLst/>
@@ -8204,8 +8264,8 @@
         </p:nvSpPr>
         <p:spPr>
           <a:xfrm>
-            <a:off x="731520" y="320040"/>
-            <a:ext cx="2011680" cy="256032"/>
+            <a:off x="731520" y="347472"/>
+            <a:ext cx="2286000" cy="274320"/>
           </a:xfrm>
           <a:prstGeom prst="roundRect">
             <a:avLst>
@@ -8231,8 +8291,8 @@
         </p:nvSpPr>
         <p:spPr>
           <a:xfrm>
-            <a:off x="731520" y="320040"/>
-            <a:ext cx="2011680" cy="256032"/>
+            <a:off x="731520" y="347472"/>
+            <a:ext cx="2286000" cy="274320"/>
           </a:xfrm>
           <a:prstGeom prst="rect">
             <a:avLst/>
@@ -8248,7 +8308,7 @@
               <a:buNone/>
             </a:pPr>
             <a:r>
-              <a:rPr lang="en-US" sz="900" b="1" dirty="0">
+              <a:rPr lang="en-US" sz="950" b="1" dirty="0">
                 <a:solidFill>
                   <a:srgbClr val="F4B942"/>
                 </a:solidFill>
@@ -8258,7 +8318,7 @@
               </a:rPr>
               <a:t>SECTION 4 • ER DIAGRAM</a:t>
             </a:r>
-            <a:endParaRPr lang="en-US" sz="900" dirty="0"/>
+            <a:endParaRPr lang="en-US" sz="950" dirty="0"/>
           </a:p>
         </p:txBody>
       </p:sp>
@@ -8270,8 +8330,8 @@
         </p:nvSpPr>
         <p:spPr>
           <a:xfrm>
-            <a:off x="9509760" y="320040"/>
-            <a:ext cx="1920240" cy="256032"/>
+            <a:off x="8961120" y="347472"/>
+            <a:ext cx="2468880" cy="274320"/>
           </a:xfrm>
           <a:prstGeom prst="roundRect">
             <a:avLst>
@@ -8297,8 +8357,8 @@
         </p:nvSpPr>
         <p:spPr>
           <a:xfrm>
-            <a:off x="9509760" y="320040"/>
-            <a:ext cx="1920240" cy="256032"/>
+            <a:off x="8961120" y="347472"/>
+            <a:ext cx="2468880" cy="274320"/>
           </a:xfrm>
           <a:prstGeom prst="rect">
             <a:avLst/>
@@ -8314,7 +8374,7 @@
               <a:buNone/>
             </a:pPr>
             <a:r>
-              <a:rPr lang="en-US" sz="850" b="1" dirty="0">
+              <a:rPr lang="en-US" sz="900" b="1" dirty="0">
                 <a:solidFill>
                   <a:srgbClr val="94A3B8"/>
                 </a:solidFill>
@@ -8324,7 +8384,7 @@
               </a:rPr>
               <a:t>TAP ACADEMY EVALUATION</a:t>
             </a:r>
-            <a:endParaRPr lang="en-US" sz="850" dirty="0"/>
+            <a:endParaRPr lang="en-US" sz="900" dirty="0"/>
           </a:p>
         </p:txBody>
       </p:sp>
@@ -8336,8 +8396,8 @@
         </p:nvSpPr>
         <p:spPr>
           <a:xfrm>
-            <a:off x="731520" y="658368"/>
-            <a:ext cx="10515600" cy="457200"/>
+            <a:off x="731520" y="713232"/>
+            <a:ext cx="10698480" cy="457200"/>
           </a:xfrm>
           <a:prstGeom prst="rect">
             <a:avLst/>
@@ -8361,7 +8421,7 @@
                 <a:ea typeface="Segoe UI" pitchFamily="34" charset="-122"/>
                 <a:cs typeface="Segoe UI" pitchFamily="34" charset="-120"/>
               </a:rPr>
-              <a:t>MySQL Normalized Relational Database Schema &amp; Entity Relationships</a:t>
+              <a:t>MySQL Relational Database Schema &amp; Entity Relationships</a:t>
             </a:r>
             <a:endParaRPr lang="en-US" sz="2200" dirty="0"/>
           </a:p>
@@ -8375,7 +8435,7 @@
         </p:nvSpPr>
         <p:spPr>
           <a:xfrm>
-            <a:off x="731520" y="1143000"/>
+            <a:off x="731520" y="1234440"/>
             <a:ext cx="10698480" cy="0"/>
           </a:xfrm>
           <a:prstGeom prst="line">
@@ -8392,7 +8452,7 @@
       </p:sp>
       <p:pic>
         <p:nvPicPr>
-          <p:cNvPr id="8" name="Image 0" descr="C:\Users\Asus\eclipse-workspace\FoodHouse\FoodHouse_Presentation_Assets\FoodHouse_ER_Diagram.png">    </p:cNvPr>
+          <p:cNvPr id="8" name="Image 0" descr="C:\Users\Asus\eclipse-workspace\FoodHouse\FoodHouse_Final_Presentation_Package\Presentation_Assets\FoodHouse_ER_Diagram.png">    </p:cNvPr>
           <p:cNvPicPr>
             <a:picLocks noChangeAspect="1"/>
           </p:cNvPicPr>
@@ -8406,8 +8466,8 @@
         </p:blipFill>
         <p:spPr>
           <a:xfrm>
-            <a:off x="731520" y="1371600"/>
-            <a:ext cx="10698480" cy="4663440"/>
+            <a:off x="731520" y="1417320"/>
+            <a:ext cx="10698480" cy="4846320"/>
           </a:xfrm>
           <a:prstGeom prst="rect">
             <a:avLst/>
@@ -8454,8 +8514,8 @@
         </p:nvSpPr>
         <p:spPr>
           <a:xfrm>
-            <a:off x="731520" y="320040"/>
-            <a:ext cx="2011680" cy="256032"/>
+            <a:off x="731520" y="347472"/>
+            <a:ext cx="2286000" cy="274320"/>
           </a:xfrm>
           <a:prstGeom prst="roundRect">
             <a:avLst>
@@ -8481,8 +8541,8 @@
         </p:nvSpPr>
         <p:spPr>
           <a:xfrm>
-            <a:off x="731520" y="320040"/>
-            <a:ext cx="2011680" cy="256032"/>
+            <a:off x="731520" y="347472"/>
+            <a:ext cx="2286000" cy="274320"/>
           </a:xfrm>
           <a:prstGeom prst="rect">
             <a:avLst/>
@@ -8498,7 +8558,7 @@
               <a:buNone/>
             </a:pPr>
             <a:r>
-              <a:rPr lang="en-US" sz="900" b="1" dirty="0">
+              <a:rPr lang="en-US" sz="950" b="1" dirty="0">
                 <a:solidFill>
                   <a:srgbClr val="F4B942"/>
                 </a:solidFill>
@@ -8508,7 +8568,7 @@
               </a:rPr>
               <a:t>SECTION 5 • PAGE SCREENSHOTS (1/6)</a:t>
             </a:r>
-            <a:endParaRPr lang="en-US" sz="900" dirty="0"/>
+            <a:endParaRPr lang="en-US" sz="950" dirty="0"/>
           </a:p>
         </p:txBody>
       </p:sp>
@@ -8520,8 +8580,8 @@
         </p:nvSpPr>
         <p:spPr>
           <a:xfrm>
-            <a:off x="9509760" y="320040"/>
-            <a:ext cx="1920240" cy="256032"/>
+            <a:off x="8961120" y="347472"/>
+            <a:ext cx="2468880" cy="274320"/>
           </a:xfrm>
           <a:prstGeom prst="roundRect">
             <a:avLst>
@@ -8547,8 +8607,8 @@
         </p:nvSpPr>
         <p:spPr>
           <a:xfrm>
-            <a:off x="9509760" y="320040"/>
-            <a:ext cx="1920240" cy="256032"/>
+            <a:off x="8961120" y="347472"/>
+            <a:ext cx="2468880" cy="274320"/>
           </a:xfrm>
           <a:prstGeom prst="rect">
             <a:avLst/>
@@ -8564,7 +8624,7 @@
               <a:buNone/>
             </a:pPr>
             <a:r>
-              <a:rPr lang="en-US" sz="850" b="1" dirty="0">
+              <a:rPr lang="en-US" sz="900" b="1" dirty="0">
                 <a:solidFill>
                   <a:srgbClr val="94A3B8"/>
                 </a:solidFill>
@@ -8574,7 +8634,7 @@
               </a:rPr>
               <a:t>TAP ACADEMY EVALUATION</a:t>
             </a:r>
-            <a:endParaRPr lang="en-US" sz="850" dirty="0"/>
+            <a:endParaRPr lang="en-US" sz="900" dirty="0"/>
           </a:p>
         </p:txBody>
       </p:sp>
@@ -8586,8 +8646,8 @@
         </p:nvSpPr>
         <p:spPr>
           <a:xfrm>
-            <a:off x="731520" y="658368"/>
-            <a:ext cx="10515600" cy="457200"/>
+            <a:off x="731520" y="713232"/>
+            <a:ext cx="10698480" cy="457200"/>
           </a:xfrm>
           <a:prstGeom prst="rect">
             <a:avLst/>
@@ -8611,7 +8671,7 @@
                 <a:ea typeface="Segoe UI" pitchFamily="34" charset="-122"/>
                 <a:cs typeface="Segoe UI" pitchFamily="34" charset="-120"/>
               </a:rPr>
-              <a:t>Home &amp; Restaurant Discovery Portal (Restaurant.jsp)</a:t>
+              <a:t>Home &amp; Restaurant Discovery (Restaurant.jsp)</a:t>
             </a:r>
             <a:endParaRPr lang="en-US" sz="2200" dirty="0"/>
           </a:p>
@@ -8625,7 +8685,7 @@
         </p:nvSpPr>
         <p:spPr>
           <a:xfrm>
-            <a:off x="731520" y="1143000"/>
+            <a:off x="731520" y="1234440"/>
             <a:ext cx="10698480" cy="0"/>
           </a:xfrm>
           <a:prstGeom prst="line">
@@ -8642,7 +8702,7 @@
       </p:sp>
       <p:pic>
         <p:nvPicPr>
-          <p:cNvPr id="8" name="Image 0" descr="C:\Users\Asus\eclipse-workspace\FoodHouse\FoodHouse_Presentation_Assets\01_home_restaurant_page.png">    </p:cNvPr>
+          <p:cNvPr id="8" name="Image 0" descr="C:\Users\Asus\eclipse-workspace\FoodHouse\FoodHouse_Final_Presentation_Package\Presentation_Assets\01_home_restaurant_page.png">    </p:cNvPr>
           <p:cNvPicPr>
             <a:picLocks noChangeAspect="1"/>
           </p:cNvPicPr>
@@ -8656,8 +8716,8 @@
         </p:blipFill>
         <p:spPr>
           <a:xfrm>
-            <a:off x="731520" y="1371600"/>
-            <a:ext cx="7772400" cy="4663440"/>
+            <a:off x="731520" y="1417320"/>
+            <a:ext cx="7406640" cy="4754880"/>
           </a:xfrm>
           <a:prstGeom prst="rect">
             <a:avLst/>
@@ -8672,12 +8732,12 @@
         </p:nvSpPr>
         <p:spPr>
           <a:xfrm>
-            <a:off x="8686800" y="1371600"/>
-            <a:ext cx="2743200" cy="4663440"/>
+            <a:off x="8412480" y="1417320"/>
+            <a:ext cx="3017520" cy="4754880"/>
           </a:xfrm>
           <a:prstGeom prst="roundRect">
             <a:avLst>
-              <a:gd name="adj" fmla="val 4000"/>
+              <a:gd name="adj" fmla="val 3636"/>
             </a:avLst>
           </a:prstGeom>
           <a:solidFill>
@@ -8699,8 +8759,8 @@
         </p:nvSpPr>
         <p:spPr>
           <a:xfrm>
-            <a:off x="8869680" y="1645920"/>
-            <a:ext cx="2377440" cy="274320"/>
+            <a:off x="8595360" y="1691640"/>
+            <a:ext cx="2651760" cy="320040"/>
           </a:xfrm>
           <a:prstGeom prst="rect">
             <a:avLst/>
@@ -8738,8 +8798,8 @@
         </p:nvSpPr>
         <p:spPr>
           <a:xfrm>
-            <a:off x="8869680" y="2011680"/>
-            <a:ext cx="2377440" cy="685800"/>
+            <a:off x="8595360" y="2103120"/>
+            <a:ext cx="2651760" cy="685800"/>
           </a:xfrm>
           <a:prstGeom prst="rect">
             <a:avLst/>
@@ -8753,12 +8813,12 @@
           <a:p>
             <a:pPr indent="0" marL="0">
               <a:lnSpc>
-                <a:spcPts val="1600"/>
+                <a:spcPts val="1500"/>
               </a:lnSpc>
               <a:buNone/>
             </a:pPr>
             <a:r>
-              <a:rPr lang="en-US" sz="1100" dirty="0">
+              <a:rPr lang="en-US" sz="1050" dirty="0">
                 <a:solidFill>
                   <a:srgbClr val="F8FAFC"/>
                 </a:solidFill>
@@ -8766,9 +8826,9 @@
                 <a:ea typeface="Segoe UI" pitchFamily="34" charset="-122"/>
                 <a:cs typeface="Segoe UI" pitchFamily="34" charset="-120"/>
               </a:rPr>
-              <a:t>• Dynamic 30-Restaurant Catalog retrieved via RestaurantDAOImpl.</a:t>
-            </a:r>
-            <a:endParaRPr lang="en-US" sz="1100" dirty="0"/>
+              <a:t>• Dynamic 30-Restaurant Catalog loaded via RestaurantDAOImpl.</a:t>
+            </a:r>
+            <a:endParaRPr lang="en-US" sz="1050" dirty="0"/>
           </a:p>
         </p:txBody>
       </p:sp>
@@ -8780,8 +8840,8 @@
         </p:nvSpPr>
         <p:spPr>
           <a:xfrm>
-            <a:off x="8869680" y="2788920"/>
-            <a:ext cx="2377440" cy="685800"/>
+            <a:off x="8595360" y="2880360"/>
+            <a:ext cx="2651760" cy="685800"/>
           </a:xfrm>
           <a:prstGeom prst="rect">
             <a:avLst/>
@@ -8795,12 +8855,12 @@
           <a:p>
             <a:pPr indent="0" marL="0">
               <a:lnSpc>
-                <a:spcPts val="1600"/>
+                <a:spcPts val="1500"/>
               </a:lnSpc>
               <a:buNone/>
             </a:pPr>
             <a:r>
-              <a:rPr lang="en-US" sz="1100" dirty="0">
+              <a:rPr lang="en-US" sz="1050" dirty="0">
                 <a:solidFill>
                   <a:srgbClr val="F8FAFC"/>
                 </a:solidFill>
@@ -8810,7 +8870,7 @@
               </a:rPr>
               <a:t>• Location filter for Indiranagar, Koramangala, and Central Bangalore.</a:t>
             </a:r>
-            <a:endParaRPr lang="en-US" sz="1100" dirty="0"/>
+            <a:endParaRPr lang="en-US" sz="1050" dirty="0"/>
           </a:p>
         </p:txBody>
       </p:sp>
@@ -8822,8 +8882,8 @@
         </p:nvSpPr>
         <p:spPr>
           <a:xfrm>
-            <a:off x="8869680" y="3566160"/>
-            <a:ext cx="2377440" cy="685800"/>
+            <a:off x="8595360" y="3657600"/>
+            <a:ext cx="2651760" cy="685800"/>
           </a:xfrm>
           <a:prstGeom prst="rect">
             <a:avLst/>
@@ -8837,12 +8897,12 @@
           <a:p>
             <a:pPr indent="0" marL="0">
               <a:lnSpc>
-                <a:spcPts val="1600"/>
+                <a:spcPts val="1500"/>
               </a:lnSpc>
               <a:buNone/>
             </a:pPr>
             <a:r>
-              <a:rPr lang="en-US" sz="1100" dirty="0">
+              <a:rPr lang="en-US" sz="1050" dirty="0">
                 <a:solidFill>
                   <a:srgbClr val="F8FAFC"/>
                 </a:solidFill>
@@ -8852,7 +8912,7 @@
               </a:rPr>
               <a:t>• Instant keyword search and cuisine tag filtering.</a:t>
             </a:r>
-            <a:endParaRPr lang="en-US" sz="1100" dirty="0"/>
+            <a:endParaRPr lang="en-US" sz="1050" dirty="0"/>
           </a:p>
         </p:txBody>
       </p:sp>
@@ -8864,8 +8924,8 @@
         </p:nvSpPr>
         <p:spPr>
           <a:xfrm>
-            <a:off x="8869680" y="4343400"/>
-            <a:ext cx="2377440" cy="685800"/>
+            <a:off x="8595360" y="4434840"/>
+            <a:ext cx="2651760" cy="685800"/>
           </a:xfrm>
           <a:prstGeom prst="rect">
             <a:avLst/>
@@ -8879,12 +8939,12 @@
           <a:p>
             <a:pPr indent="0" marL="0">
               <a:lnSpc>
-                <a:spcPts val="1600"/>
+                <a:spcPts val="1500"/>
               </a:lnSpc>
               <a:buNone/>
             </a:pPr>
             <a:r>
-              <a:rPr lang="en-US" sz="1100" dirty="0">
+              <a:rPr lang="en-US" sz="1050" dirty="0">
                 <a:solidFill>
                   <a:srgbClr val="F8FAFC"/>
                 </a:solidFill>
@@ -8892,9 +8952,9 @@
                 <a:ea typeface="Segoe UI" pitchFamily="34" charset="-122"/>
                 <a:cs typeface="Segoe UI" pitchFamily="34" charset="-120"/>
               </a:rPr>
-              <a:t>• Live Fleet Velocity Simulator (Eco, Hyper, Express, Race modes).</a:t>
-            </a:r>
-            <a:endParaRPr lang="en-US" sz="1100" dirty="0"/>
+              <a:t>• Fleet velocity controls simulating delivery speeds and ETA calculation.</a:t>
+            </a:r>
+            <a:endParaRPr lang="en-US" sz="1050" dirty="0"/>
           </a:p>
         </p:txBody>
       </p:sp>
@@ -8906,8 +8966,8 @@
         </p:nvSpPr>
         <p:spPr>
           <a:xfrm>
-            <a:off x="8869680" y="5120640"/>
-            <a:ext cx="2377440" cy="685800"/>
+            <a:off x="8595360" y="5212080"/>
+            <a:ext cx="2651760" cy="685800"/>
           </a:xfrm>
           <a:prstGeom prst="rect">
             <a:avLst/>
@@ -8921,12 +8981,12 @@
           <a:p>
             <a:pPr indent="0" marL="0">
               <a:lnSpc>
-                <a:spcPts val="1600"/>
+                <a:spcPts val="1500"/>
               </a:lnSpc>
               <a:buNone/>
             </a:pPr>
             <a:r>
-              <a:rPr lang="en-US" sz="1100" dirty="0">
+              <a:rPr lang="en-US" sz="1050" dirty="0">
                 <a:solidFill>
                   <a:srgbClr val="F8FAFC"/>
                 </a:solidFill>
@@ -8934,9 +8994,9 @@
                 <a:ea typeface="Segoe UI" pitchFamily="34" charset="-122"/>
                 <a:cs typeface="Segoe UI" pitchFamily="34" charset="-120"/>
               </a:rPr>
-              <a:t>• Dark / Light theme toggle with high-contrast glassmorphism.</a:t>
-            </a:r>
-            <a:endParaRPr lang="en-US" sz="1100" dirty="0"/>
+              <a:t>• Dark and Light theme toggle with high-contrast glassmorphism.</a:t>
+            </a:r>
+            <a:endParaRPr lang="en-US" sz="1050" dirty="0"/>
           </a:p>
         </p:txBody>
       </p:sp>
@@ -8980,8 +9040,8 @@
         </p:nvSpPr>
         <p:spPr>
           <a:xfrm>
-            <a:off x="731520" y="320040"/>
-            <a:ext cx="2011680" cy="256032"/>
+            <a:off x="731520" y="347472"/>
+            <a:ext cx="2286000" cy="274320"/>
           </a:xfrm>
           <a:prstGeom prst="roundRect">
             <a:avLst>
@@ -9007,8 +9067,8 @@
         </p:nvSpPr>
         <p:spPr>
           <a:xfrm>
-            <a:off x="731520" y="320040"/>
-            <a:ext cx="2011680" cy="256032"/>
+            <a:off x="731520" y="347472"/>
+            <a:ext cx="2286000" cy="274320"/>
           </a:xfrm>
           <a:prstGeom prst="rect">
             <a:avLst/>
@@ -9024,7 +9084,7 @@
               <a:buNone/>
             </a:pPr>
             <a:r>
-              <a:rPr lang="en-US" sz="900" b="1" dirty="0">
+              <a:rPr lang="en-US" sz="950" b="1" dirty="0">
                 <a:solidFill>
                   <a:srgbClr val="F4B942"/>
                 </a:solidFill>
@@ -9034,7 +9094,7 @@
               </a:rPr>
               <a:t>SECTION 5 • PAGE SCREENSHOTS (2/6)</a:t>
             </a:r>
-            <a:endParaRPr lang="en-US" sz="900" dirty="0"/>
+            <a:endParaRPr lang="en-US" sz="950" dirty="0"/>
           </a:p>
         </p:txBody>
       </p:sp>
@@ -9046,8 +9106,8 @@
         </p:nvSpPr>
         <p:spPr>
           <a:xfrm>
-            <a:off x="9509760" y="320040"/>
-            <a:ext cx="1920240" cy="256032"/>
+            <a:off x="8961120" y="347472"/>
+            <a:ext cx="2468880" cy="274320"/>
           </a:xfrm>
           <a:prstGeom prst="roundRect">
             <a:avLst>
@@ -9073,8 +9133,8 @@
         </p:nvSpPr>
         <p:spPr>
           <a:xfrm>
-            <a:off x="9509760" y="320040"/>
-            <a:ext cx="1920240" cy="256032"/>
+            <a:off x="8961120" y="347472"/>
+            <a:ext cx="2468880" cy="274320"/>
           </a:xfrm>
           <a:prstGeom prst="rect">
             <a:avLst/>
@@ -9090,7 +9150,7 @@
               <a:buNone/>
             </a:pPr>
             <a:r>
-              <a:rPr lang="en-US" sz="850" b="1" dirty="0">
+              <a:rPr lang="en-US" sz="900" b="1" dirty="0">
                 <a:solidFill>
                   <a:srgbClr val="94A3B8"/>
                 </a:solidFill>
@@ -9100,7 +9160,7 @@
               </a:rPr>
               <a:t>TAP ACADEMY EVALUATION</a:t>
             </a:r>
-            <a:endParaRPr lang="en-US" sz="850" dirty="0"/>
+            <a:endParaRPr lang="en-US" sz="900" dirty="0"/>
           </a:p>
         </p:txBody>
       </p:sp>
@@ -9112,8 +9172,8 @@
         </p:nvSpPr>
         <p:spPr>
           <a:xfrm>
-            <a:off x="731520" y="658368"/>
-            <a:ext cx="10515600" cy="457200"/>
+            <a:off x="731520" y="713232"/>
+            <a:ext cx="10698480" cy="457200"/>
           </a:xfrm>
           <a:prstGeom prst="rect">
             <a:avLst/>
@@ -9151,7 +9211,7 @@
         </p:nvSpPr>
         <p:spPr>
           <a:xfrm>
-            <a:off x="731520" y="1143000"/>
+            <a:off x="731520" y="1234440"/>
             <a:ext cx="10698480" cy="0"/>
           </a:xfrm>
           <a:prstGeom prst="line">
@@ -9168,7 +9228,7 @@
       </p:sp>
       <p:pic>
         <p:nvPicPr>
-          <p:cNvPr id="8" name="Image 0" descr="C:\Users\Asus\eclipse-workspace\FoodHouse\FoodHouse_Presentation_Assets\02_login_register_page.png">    </p:cNvPr>
+          <p:cNvPr id="8" name="Image 0" descr="C:\Users\Asus\eclipse-workspace\FoodHouse\FoodHouse_Final_Presentation_Package\Presentation_Assets\02_login_register_page.png">    </p:cNvPr>
           <p:cNvPicPr>
             <a:picLocks noChangeAspect="1"/>
           </p:cNvPicPr>
@@ -9182,8 +9242,8 @@
         </p:blipFill>
         <p:spPr>
           <a:xfrm>
-            <a:off x="731520" y="1371600"/>
-            <a:ext cx="7772400" cy="4663440"/>
+            <a:off x="731520" y="1417320"/>
+            <a:ext cx="7406640" cy="4754880"/>
           </a:xfrm>
           <a:prstGeom prst="rect">
             <a:avLst/>
@@ -9198,12 +9258,12 @@
         </p:nvSpPr>
         <p:spPr>
           <a:xfrm>
-            <a:off x="8686800" y="1371600"/>
-            <a:ext cx="2743200" cy="4663440"/>
+            <a:off x="8412480" y="1417320"/>
+            <a:ext cx="3017520" cy="4754880"/>
           </a:xfrm>
           <a:prstGeom prst="roundRect">
             <a:avLst>
-              <a:gd name="adj" fmla="val 4000"/>
+              <a:gd name="adj" fmla="val 3636"/>
             </a:avLst>
           </a:prstGeom>
           <a:solidFill>
@@ -9225,8 +9285,8 @@
         </p:nvSpPr>
         <p:spPr>
           <a:xfrm>
-            <a:off x="8869680" y="1645920"/>
-            <a:ext cx="2377440" cy="274320"/>
+            <a:off x="8595360" y="1691640"/>
+            <a:ext cx="2651760" cy="320040"/>
           </a:xfrm>
           <a:prstGeom prst="rect">
             <a:avLst/>
@@ -9250,7 +9310,7 @@
                 <a:ea typeface="Segoe UI" pitchFamily="34" charset="-122"/>
                 <a:cs typeface="Segoe UI" pitchFamily="34" charset="-120"/>
               </a:rPr>
-              <a:t>Security Highlights</a:t>
+              <a:t>Authentication Features</a:t>
             </a:r>
             <a:endParaRPr lang="en-US" sz="1400" dirty="0"/>
           </a:p>
@@ -9264,8 +9324,8 @@
         </p:nvSpPr>
         <p:spPr>
           <a:xfrm>
-            <a:off x="8869680" y="2011680"/>
-            <a:ext cx="2377440" cy="685800"/>
+            <a:off x="8595360" y="2103120"/>
+            <a:ext cx="2651760" cy="685800"/>
           </a:xfrm>
           <a:prstGeom prst="rect">
             <a:avLst/>
@@ -9279,12 +9339,12 @@
           <a:p>
             <a:pPr indent="0" marL="0">
               <a:lnSpc>
-                <a:spcPts val="1600"/>
+                <a:spcPts val="1500"/>
               </a:lnSpc>
               <a:buNone/>
             </a:pPr>
             <a:r>
-              <a:rPr lang="en-US" sz="1100" dirty="0">
+              <a:rPr lang="en-US" sz="1050" dirty="0">
                 <a:solidFill>
                   <a:srgbClr val="F8FAFC"/>
                 </a:solidFill>
@@ -9292,9 +9352,9 @@
                 <a:ea typeface="Segoe UI" pitchFamily="34" charset="-122"/>
                 <a:cs typeface="Segoe UI" pitchFamily="34" charset="-120"/>
               </a:rPr>
-              <a:t>• Unified 1-page Auth Portal with tabbed Login &amp; Register views.</a:t>
-            </a:r>
-            <a:endParaRPr lang="en-US" sz="1100" dirty="0"/>
+              <a:t>• Unified 1-page Auth Portal with tabbed Login and Register modal.</a:t>
+            </a:r>
+            <a:endParaRPr lang="en-US" sz="1050" dirty="0"/>
           </a:p>
         </p:txBody>
       </p:sp>
@@ -9306,8 +9366,8 @@
         </p:nvSpPr>
         <p:spPr>
           <a:xfrm>
-            <a:off x="8869680" y="2788920"/>
-            <a:ext cx="2377440" cy="685800"/>
+            <a:off x="8595360" y="2880360"/>
+            <a:ext cx="2651760" cy="685800"/>
           </a:xfrm>
           <a:prstGeom prst="rect">
             <a:avLst/>
@@ -9321,12 +9381,12 @@
           <a:p>
             <a:pPr indent="0" marL="0">
               <a:lnSpc>
-                <a:spcPts val="1600"/>
+                <a:spcPts val="1500"/>
               </a:lnSpc>
               <a:buNone/>
             </a:pPr>
             <a:r>
-              <a:rPr lang="en-US" sz="1100" dirty="0">
+              <a:rPr lang="en-US" sz="1050" dirty="0">
                 <a:solidFill>
                   <a:srgbClr val="F8FAFC"/>
                 </a:solidFill>
@@ -9334,9 +9394,9 @@
                 <a:ea typeface="Segoe UI" pitchFamily="34" charset="-122"/>
                 <a:cs typeface="Segoe UI" pitchFamily="34" charset="-120"/>
               </a:rPr>
-              <a:t>• Enterprise jBCrypt password hashing with unique per-user salt.</a:t>
-            </a:r>
-            <a:endParaRPr lang="en-US" sz="1100" dirty="0"/>
+              <a:t>• jBCrypt salted password hashing prevents plain-text storage.</a:t>
+            </a:r>
+            <a:endParaRPr lang="en-US" sz="1050" dirty="0"/>
           </a:p>
         </p:txBody>
       </p:sp>
@@ -9348,8 +9408,8 @@
         </p:nvSpPr>
         <p:spPr>
           <a:xfrm>
-            <a:off x="8869680" y="3566160"/>
-            <a:ext cx="2377440" cy="685800"/>
+            <a:off x="8595360" y="3657600"/>
+            <a:ext cx="2651760" cy="685800"/>
           </a:xfrm>
           <a:prstGeom prst="rect">
             <a:avLst/>
@@ -9363,12 +9423,12 @@
           <a:p>
             <a:pPr indent="0" marL="0">
               <a:lnSpc>
-                <a:spcPts val="1600"/>
+                <a:spcPts val="1500"/>
               </a:lnSpc>
               <a:buNone/>
             </a:pPr>
             <a:r>
-              <a:rPr lang="en-US" sz="1100" dirty="0">
+              <a:rPr lang="en-US" sz="1050" dirty="0">
                 <a:solidFill>
                   <a:srgbClr val="F8FAFC"/>
                 </a:solidFill>
@@ -9376,9 +9436,9 @@
                 <a:ea typeface="Segoe UI" pitchFamily="34" charset="-122"/>
                 <a:cs typeface="Segoe UI" pitchFamily="34" charset="-120"/>
               </a:rPr>
-              <a:t>• Protects against SQL injection via JDBC PreparedStatements.</a:t>
-            </a:r>
-            <a:endParaRPr lang="en-US" sz="1100" dirty="0"/>
+              <a:t>• PreparedStatement parameterized queries prevent SQL injection.</a:t>
+            </a:r>
+            <a:endParaRPr lang="en-US" sz="1050" dirty="0"/>
           </a:p>
         </p:txBody>
       </p:sp>
@@ -9390,8 +9450,8 @@
         </p:nvSpPr>
         <p:spPr>
           <a:xfrm>
-            <a:off x="8869680" y="4343400"/>
-            <a:ext cx="2377440" cy="685800"/>
+            <a:off x="8595360" y="4434840"/>
+            <a:ext cx="2651760" cy="685800"/>
           </a:xfrm>
           <a:prstGeom prst="rect">
             <a:avLst/>
@@ -9405,12 +9465,12 @@
           <a:p>
             <a:pPr indent="0" marL="0">
               <a:lnSpc>
-                <a:spcPts val="1600"/>
+                <a:spcPts val="1500"/>
               </a:lnSpc>
               <a:buNone/>
             </a:pPr>
             <a:r>
-              <a:rPr lang="en-US" sz="1100" dirty="0">
+              <a:rPr lang="en-US" sz="1050" dirty="0">
                 <a:solidFill>
                   <a:srgbClr val="F8FAFC"/>
                 </a:solidFill>
@@ -9418,9 +9478,9 @@
                 <a:ea typeface="Segoe UI" pitchFamily="34" charset="-122"/>
                 <a:cs typeface="Segoe UI" pitchFamily="34" charset="-120"/>
               </a:rPr>
-              <a:t>• HttpSession management preserves authenticated user identity across checkout.</a:t>
-            </a:r>
-            <a:endParaRPr lang="en-US" sz="1100" dirty="0"/>
+              <a:t>• HttpSession initialization binds user identity across checkout.</a:t>
+            </a:r>
+            <a:endParaRPr lang="en-US" sz="1050" dirty="0"/>
           </a:p>
         </p:txBody>
       </p:sp>
@@ -9432,8 +9492,8 @@
         </p:nvSpPr>
         <p:spPr>
           <a:xfrm>
-            <a:off x="8869680" y="5120640"/>
-            <a:ext cx="2377440" cy="685800"/>
+            <a:off x="8595360" y="5212080"/>
+            <a:ext cx="2651760" cy="685800"/>
           </a:xfrm>
           <a:prstGeom prst="rect">
             <a:avLst/>
@@ -9447,12 +9507,12 @@
           <a:p>
             <a:pPr indent="0" marL="0">
               <a:lnSpc>
-                <a:spcPts val="1600"/>
+                <a:spcPts val="1500"/>
               </a:lnSpc>
               <a:buNone/>
             </a:pPr>
             <a:r>
-              <a:rPr lang="en-US" sz="1100" dirty="0">
+              <a:rPr lang="en-US" sz="1050" dirty="0">
                 <a:solidFill>
                   <a:srgbClr val="F8FAFC"/>
                 </a:solidFill>
@@ -9460,9 +9520,9 @@
                 <a:ea typeface="Segoe UI" pitchFamily="34" charset="-122"/>
                 <a:cs typeface="Segoe UI" pitchFamily="34" charset="-120"/>
               </a:rPr>
-              <a:t>• Auto-redirect back to the active shopping session.</a:t>
-            </a:r>
-            <a:endParaRPr lang="en-US" sz="1100" dirty="0"/>
+              <a:t>• Role-based redirect sends users back to their active shopping session.</a:t>
+            </a:r>
+            <a:endParaRPr lang="en-US" sz="1050" dirty="0"/>
           </a:p>
         </p:txBody>
       </p:sp>
@@ -9506,8 +9566,8 @@
         </p:nvSpPr>
         <p:spPr>
           <a:xfrm>
-            <a:off x="731520" y="320040"/>
-            <a:ext cx="2011680" cy="256032"/>
+            <a:off x="731520" y="347472"/>
+            <a:ext cx="2286000" cy="274320"/>
           </a:xfrm>
           <a:prstGeom prst="roundRect">
             <a:avLst>
@@ -9533,8 +9593,8 @@
         </p:nvSpPr>
         <p:spPr>
           <a:xfrm>
-            <a:off x="731520" y="320040"/>
-            <a:ext cx="2011680" cy="256032"/>
+            <a:off x="731520" y="347472"/>
+            <a:ext cx="2286000" cy="274320"/>
           </a:xfrm>
           <a:prstGeom prst="rect">
             <a:avLst/>
@@ -9550,7 +9610,7 @@
               <a:buNone/>
             </a:pPr>
             <a:r>
-              <a:rPr lang="en-US" sz="900" b="1" dirty="0">
+              <a:rPr lang="en-US" sz="950" b="1" dirty="0">
                 <a:solidFill>
                   <a:srgbClr val="F4B942"/>
                 </a:solidFill>
@@ -9560,7 +9620,7 @@
               </a:rPr>
               <a:t>SECTION 5 • PAGE SCREENSHOTS (3/6)</a:t>
             </a:r>
-            <a:endParaRPr lang="en-US" sz="900" dirty="0"/>
+            <a:endParaRPr lang="en-US" sz="950" dirty="0"/>
           </a:p>
         </p:txBody>
       </p:sp>
@@ -9572,8 +9632,8 @@
         </p:nvSpPr>
         <p:spPr>
           <a:xfrm>
-            <a:off x="9509760" y="320040"/>
-            <a:ext cx="1920240" cy="256032"/>
+            <a:off x="8961120" y="347472"/>
+            <a:ext cx="2468880" cy="274320"/>
           </a:xfrm>
           <a:prstGeom prst="roundRect">
             <a:avLst>
@@ -9599,8 +9659,8 @@
         </p:nvSpPr>
         <p:spPr>
           <a:xfrm>
-            <a:off x="9509760" y="320040"/>
-            <a:ext cx="1920240" cy="256032"/>
+            <a:off x="8961120" y="347472"/>
+            <a:ext cx="2468880" cy="274320"/>
           </a:xfrm>
           <a:prstGeom prst="rect">
             <a:avLst/>
@@ -9616,7 +9676,7 @@
               <a:buNone/>
             </a:pPr>
             <a:r>
-              <a:rPr lang="en-US" sz="850" b="1" dirty="0">
+              <a:rPr lang="en-US" sz="900" b="1" dirty="0">
                 <a:solidFill>
                   <a:srgbClr val="94A3B8"/>
                 </a:solidFill>
@@ -9626,7 +9686,7 @@
               </a:rPr>
               <a:t>TAP ACADEMY EVALUATION</a:t>
             </a:r>
-            <a:endParaRPr lang="en-US" sz="850" dirty="0"/>
+            <a:endParaRPr lang="en-US" sz="900" dirty="0"/>
           </a:p>
         </p:txBody>
       </p:sp>
@@ -9638,8 +9698,8 @@
         </p:nvSpPr>
         <p:spPr>
           <a:xfrm>
-            <a:off x="731520" y="658368"/>
-            <a:ext cx="10515600" cy="457200"/>
+            <a:off x="731520" y="713232"/>
+            <a:ext cx="10698480" cy="457200"/>
           </a:xfrm>
           <a:prstGeom prst="rect">
             <a:avLst/>
@@ -9663,7 +9723,7 @@
                 <a:ea typeface="Segoe UI" pitchFamily="34" charset="-122"/>
                 <a:cs typeface="Segoe UI" pitchFamily="34" charset="-120"/>
               </a:rPr>
-              <a:t>Curated Restaurant Menu &amp; Dish Selection (Menu.jsp)</a:t>
+              <a:t>Curated Restaurant Menu (Menu.jsp)</a:t>
             </a:r>
             <a:endParaRPr lang="en-US" sz="2200" dirty="0"/>
           </a:p>
@@ -9677,7 +9737,7 @@
         </p:nvSpPr>
         <p:spPr>
           <a:xfrm>
-            <a:off x="731520" y="1143000"/>
+            <a:off x="731520" y="1234440"/>
             <a:ext cx="10698480" cy="0"/>
           </a:xfrm>
           <a:prstGeom prst="line">
@@ -9694,7 +9754,7 @@
       </p:sp>
       <p:pic>
         <p:nvPicPr>
-          <p:cNvPr id="8" name="Image 0" descr="C:\Users\Asus\eclipse-workspace\FoodHouse\FoodHouse_Presentation_Assets\03_menu_page.png">    </p:cNvPr>
+          <p:cNvPr id="8" name="Image 0" descr="C:\Users\Asus\eclipse-workspace\FoodHouse\FoodHouse_Final_Presentation_Package\Presentation_Assets\03_menu_page.png">    </p:cNvPr>
           <p:cNvPicPr>
             <a:picLocks noChangeAspect="1"/>
           </p:cNvPicPr>
@@ -9708,8 +9768,8 @@
         </p:blipFill>
         <p:spPr>
           <a:xfrm>
-            <a:off x="731520" y="1371600"/>
-            <a:ext cx="7772400" cy="4663440"/>
+            <a:off x="731520" y="1417320"/>
+            <a:ext cx="7406640" cy="4754880"/>
           </a:xfrm>
           <a:prstGeom prst="rect">
             <a:avLst/>
@@ -9724,12 +9784,12 @@
         </p:nvSpPr>
         <p:spPr>
           <a:xfrm>
-            <a:off x="8686800" y="1371600"/>
-            <a:ext cx="2743200" cy="4663440"/>
+            <a:off x="8412480" y="1417320"/>
+            <a:ext cx="3017520" cy="4754880"/>
           </a:xfrm>
           <a:prstGeom prst="roundRect">
             <a:avLst>
-              <a:gd name="adj" fmla="val 4000"/>
+              <a:gd name="adj" fmla="val 3636"/>
             </a:avLst>
           </a:prstGeom>
           <a:solidFill>
@@ -9751,8 +9811,8 @@
         </p:nvSpPr>
         <p:spPr>
           <a:xfrm>
-            <a:off x="8869680" y="1645920"/>
-            <a:ext cx="2377440" cy="274320"/>
+            <a:off x="8595360" y="1691640"/>
+            <a:ext cx="2651760" cy="320040"/>
           </a:xfrm>
           <a:prstGeom prst="rect">
             <a:avLst/>
@@ -9776,7 +9836,7 @@
                 <a:ea typeface="Segoe UI" pitchFamily="34" charset="-122"/>
                 <a:cs typeface="Segoe UI" pitchFamily="34" charset="-120"/>
               </a:rPr>
-              <a:t>Menu Engineering</a:t>
+              <a:t>Menu Interaction</a:t>
             </a:r>
             <a:endParaRPr lang="en-US" sz="1400" dirty="0"/>
           </a:p>
@@ -9790,8 +9850,8 @@
         </p:nvSpPr>
         <p:spPr>
           <a:xfrm>
-            <a:off x="8869680" y="2011680"/>
-            <a:ext cx="2377440" cy="685800"/>
+            <a:off x="8595360" y="2103120"/>
+            <a:ext cx="2651760" cy="685800"/>
           </a:xfrm>
           <a:prstGeom prst="rect">
             <a:avLst/>
@@ -9805,12 +9865,12 @@
           <a:p>
             <a:pPr indent="0" marL="0">
               <a:lnSpc>
-                <a:spcPts val="1600"/>
+                <a:spcPts val="1500"/>
               </a:lnSpc>
               <a:buNone/>
             </a:pPr>
             <a:r>
-              <a:rPr lang="en-US" sz="1100" dirty="0">
+              <a:rPr lang="en-US" sz="1050" dirty="0">
                 <a:solidFill>
                   <a:srgbClr val="F8FAFC"/>
                 </a:solidFill>
@@ -9818,9 +9878,9 @@
                 <a:ea typeface="Segoe UI" pitchFamily="34" charset="-122"/>
                 <a:cs typeface="Segoe UI" pitchFamily="34" charset="-120"/>
               </a:rPr>
-              <a:t>• Restaurant-specific menu querying (e.g. 12 dishes for Meghana Foods).</a:t>
-            </a:r>
-            <a:endParaRPr lang="en-US" sz="1100" dirty="0"/>
+              <a:t>• Restaurant-specific catalog retrieval (e.g. 12 dishes for Meghana Foods).</a:t>
+            </a:r>
+            <a:endParaRPr lang="en-US" sz="1050" dirty="0"/>
           </a:p>
         </p:txBody>
       </p:sp>
@@ -9832,8 +9892,8 @@
         </p:nvSpPr>
         <p:spPr>
           <a:xfrm>
-            <a:off x="8869680" y="2788920"/>
-            <a:ext cx="2377440" cy="685800"/>
+            <a:off x="8595360" y="2880360"/>
+            <a:ext cx="2651760" cy="685800"/>
           </a:xfrm>
           <a:prstGeom prst="rect">
             <a:avLst/>
@@ -9847,12 +9907,12 @@
           <a:p>
             <a:pPr indent="0" marL="0">
               <a:lnSpc>
-                <a:spcPts val="1600"/>
+                <a:spcPts val="1500"/>
               </a:lnSpc>
               <a:buNone/>
             </a:pPr>
             <a:r>
-              <a:rPr lang="en-US" sz="1100" dirty="0">
+              <a:rPr lang="en-US" sz="1050" dirty="0">
                 <a:solidFill>
                   <a:srgbClr val="F8FAFC"/>
                 </a:solidFill>
@@ -9860,9 +9920,9 @@
                 <a:ea typeface="Segoe UI" pitchFamily="34" charset="-122"/>
                 <a:cs typeface="Segoe UI" pitchFamily="34" charset="-120"/>
               </a:rPr>
-              <a:t>• Veg and Non-Veg visual badge indicators with pricing in INR.</a:t>
-            </a:r>
-            <a:endParaRPr lang="en-US" sz="1100" dirty="0"/>
+              <a:t>• Veg and Non-Veg indicators with pricing in INR.</a:t>
+            </a:r>
+            <a:endParaRPr lang="en-US" sz="1050" dirty="0"/>
           </a:p>
         </p:txBody>
       </p:sp>
@@ -9874,8 +9934,8 @@
         </p:nvSpPr>
         <p:spPr>
           <a:xfrm>
-            <a:off x="8869680" y="3566160"/>
-            <a:ext cx="2377440" cy="685800"/>
+            <a:off x="8595360" y="3657600"/>
+            <a:ext cx="2651760" cy="685800"/>
           </a:xfrm>
           <a:prstGeom prst="rect">
             <a:avLst/>
@@ -9889,12 +9949,12 @@
           <a:p>
             <a:pPr indent="0" marL="0">
               <a:lnSpc>
-                <a:spcPts val="1600"/>
+                <a:spcPts val="1500"/>
               </a:lnSpc>
               <a:buNone/>
             </a:pPr>
             <a:r>
-              <a:rPr lang="en-US" sz="1100" dirty="0">
+              <a:rPr lang="en-US" sz="1050" dirty="0">
                 <a:solidFill>
                   <a:srgbClr val="F8FAFC"/>
                 </a:solidFill>
@@ -9904,7 +9964,7 @@
               </a:rPr>
               <a:t>• Zero-Jump AJAX Add-to-Cart prevents page reloads and scroll disorientation.</a:t>
             </a:r>
-            <a:endParaRPr lang="en-US" sz="1100" dirty="0"/>
+            <a:endParaRPr lang="en-US" sz="1050" dirty="0"/>
           </a:p>
         </p:txBody>
       </p:sp>
@@ -9916,8 +9976,8 @@
         </p:nvSpPr>
         <p:spPr>
           <a:xfrm>
-            <a:off x="8869680" y="4343400"/>
-            <a:ext cx="2377440" cy="685800"/>
+            <a:off x="8595360" y="4434840"/>
+            <a:ext cx="2651760" cy="685800"/>
           </a:xfrm>
           <a:prstGeom prst="rect">
             <a:avLst/>
@@ -9931,12 +9991,12 @@
           <a:p>
             <a:pPr indent="0" marL="0">
               <a:lnSpc>
-                <a:spcPts val="1600"/>
+                <a:spcPts val="1500"/>
               </a:lnSpc>
               <a:buNone/>
             </a:pPr>
             <a:r>
-              <a:rPr lang="en-US" sz="1100" dirty="0">
+              <a:rPr lang="en-US" sz="1050" dirty="0">
                 <a:solidFill>
                   <a:srgbClr val="F8FAFC"/>
                 </a:solidFill>
@@ -9946,7 +10006,7 @@
               </a:rPr>
               <a:t>• Instant Quantity Stepper (+ / -) directly on dish cards.</a:t>
             </a:r>
-            <a:endParaRPr lang="en-US" sz="1100" dirty="0"/>
+            <a:endParaRPr lang="en-US" sz="1050" dirty="0"/>
           </a:p>
         </p:txBody>
       </p:sp>
@@ -9958,8 +10018,8 @@
         </p:nvSpPr>
         <p:spPr>
           <a:xfrm>
-            <a:off x="8869680" y="5120640"/>
-            <a:ext cx="2377440" cy="685800"/>
+            <a:off x="8595360" y="5212080"/>
+            <a:ext cx="2651760" cy="685800"/>
           </a:xfrm>
           <a:prstGeom prst="rect">
             <a:avLst/>
@@ -9973,12 +10033,12 @@
           <a:p>
             <a:pPr indent="0" marL="0">
               <a:lnSpc>
-                <a:spcPts val="1600"/>
+                <a:spcPts val="1500"/>
               </a:lnSpc>
               <a:buNone/>
             </a:pPr>
             <a:r>
-              <a:rPr lang="en-US" sz="1100" dirty="0">
+              <a:rPr lang="en-US" sz="1050" dirty="0">
                 <a:solidFill>
                   <a:srgbClr val="F8FAFC"/>
                 </a:solidFill>
@@ -9986,9 +10046,9 @@
                 <a:ea typeface="Segoe UI" pitchFamily="34" charset="-122"/>
                 <a:cs typeface="Segoe UI" pitchFamily="34" charset="-120"/>
               </a:rPr>
-              <a:t>• Floating bottom cart summary bar with live item count and total.</a:t>
-            </a:r>
-            <a:endParaRPr lang="en-US" sz="1100" dirty="0"/>
+              <a:t>• Floating bottom cart summary bar with live count and subtotal.</a:t>
+            </a:r>
+            <a:endParaRPr lang="en-US" sz="1050" dirty="0"/>
           </a:p>
         </p:txBody>
       </p:sp>
@@ -10032,8 +10092,8 @@
         </p:nvSpPr>
         <p:spPr>
           <a:xfrm>
-            <a:off x="731520" y="320040"/>
-            <a:ext cx="2011680" cy="256032"/>
+            <a:off x="731520" y="347472"/>
+            <a:ext cx="2286000" cy="274320"/>
           </a:xfrm>
           <a:prstGeom prst="roundRect">
             <a:avLst>
@@ -10059,8 +10119,8 @@
         </p:nvSpPr>
         <p:spPr>
           <a:xfrm>
-            <a:off x="731520" y="320040"/>
-            <a:ext cx="2011680" cy="256032"/>
+            <a:off x="731520" y="347472"/>
+            <a:ext cx="2286000" cy="274320"/>
           </a:xfrm>
           <a:prstGeom prst="rect">
             <a:avLst/>
@@ -10076,7 +10136,7 @@
               <a:buNone/>
             </a:pPr>
             <a:r>
-              <a:rPr lang="en-US" sz="900" b="1" dirty="0">
+              <a:rPr lang="en-US" sz="950" b="1" dirty="0">
                 <a:solidFill>
                   <a:srgbClr val="F4B942"/>
                 </a:solidFill>
@@ -10086,7 +10146,7 @@
               </a:rPr>
               <a:t>SECTION 5 • PAGE SCREENSHOTS (4/6)</a:t>
             </a:r>
-            <a:endParaRPr lang="en-US" sz="900" dirty="0"/>
+            <a:endParaRPr lang="en-US" sz="950" dirty="0"/>
           </a:p>
         </p:txBody>
       </p:sp>
@@ -10098,8 +10158,8 @@
         </p:nvSpPr>
         <p:spPr>
           <a:xfrm>
-            <a:off x="9509760" y="320040"/>
-            <a:ext cx="1920240" cy="256032"/>
+            <a:off x="8961120" y="347472"/>
+            <a:ext cx="2468880" cy="274320"/>
           </a:xfrm>
           <a:prstGeom prst="roundRect">
             <a:avLst>
@@ -10125,8 +10185,8 @@
         </p:nvSpPr>
         <p:spPr>
           <a:xfrm>
-            <a:off x="9509760" y="320040"/>
-            <a:ext cx="1920240" cy="256032"/>
+            <a:off x="8961120" y="347472"/>
+            <a:ext cx="2468880" cy="274320"/>
           </a:xfrm>
           <a:prstGeom prst="rect">
             <a:avLst/>
@@ -10142,7 +10202,7 @@
               <a:buNone/>
             </a:pPr>
             <a:r>
-              <a:rPr lang="en-US" sz="850" b="1" dirty="0">
+              <a:rPr lang="en-US" sz="900" b="1" dirty="0">
                 <a:solidFill>
                   <a:srgbClr val="94A3B8"/>
                 </a:solidFill>
@@ -10152,7 +10212,7 @@
               </a:rPr>
               <a:t>TAP ACADEMY EVALUATION</a:t>
             </a:r>
-            <a:endParaRPr lang="en-US" sz="850" dirty="0"/>
+            <a:endParaRPr lang="en-US" sz="900" dirty="0"/>
           </a:p>
         </p:txBody>
       </p:sp>
@@ -10164,8 +10224,8 @@
         </p:nvSpPr>
         <p:spPr>
           <a:xfrm>
-            <a:off x="731520" y="658368"/>
-            <a:ext cx="10515600" cy="457200"/>
+            <a:off x="731520" y="713232"/>
+            <a:ext cx="10698480" cy="457200"/>
           </a:xfrm>
           <a:prstGeom prst="rect">
             <a:avLst/>
@@ -10189,7 +10249,7 @@
                 <a:ea typeface="Segoe UI" pitchFamily="34" charset="-122"/>
                 <a:cs typeface="Segoe UI" pitchFamily="34" charset="-120"/>
               </a:rPr>
-              <a:t>Interactive Shopping Cart &amp; Financial Calculations (Cart.jsp)</a:t>
+              <a:t>Shopping Cart &amp; Totals (Cart.jsp)</a:t>
             </a:r>
             <a:endParaRPr lang="en-US" sz="2200" dirty="0"/>
           </a:p>
@@ -10203,7 +10263,7 @@
         </p:nvSpPr>
         <p:spPr>
           <a:xfrm>
-            <a:off x="731520" y="1143000"/>
+            <a:off x="731520" y="1234440"/>
             <a:ext cx="10698480" cy="0"/>
           </a:xfrm>
           <a:prstGeom prst="line">
@@ -10220,7 +10280,7 @@
       </p:sp>
       <p:pic>
         <p:nvPicPr>
-          <p:cNvPr id="8" name="Image 0" descr="C:\Users\Asus\eclipse-workspace\FoodHouse\FoodHouse_Presentation_Assets\04_cart_page.png">    </p:cNvPr>
+          <p:cNvPr id="8" name="Image 0" descr="C:\Users\Asus\eclipse-workspace\FoodHouse\FoodHouse_Final_Presentation_Package\Presentation_Assets\04_cart_page.png">    </p:cNvPr>
           <p:cNvPicPr>
             <a:picLocks noChangeAspect="1"/>
           </p:cNvPicPr>
@@ -10234,8 +10294,8 @@
         </p:blipFill>
         <p:spPr>
           <a:xfrm>
-            <a:off x="731520" y="1371600"/>
-            <a:ext cx="7772400" cy="4663440"/>
+            <a:off x="731520" y="1417320"/>
+            <a:ext cx="7406640" cy="4754880"/>
           </a:xfrm>
           <a:prstGeom prst="rect">
             <a:avLst/>
@@ -10250,12 +10310,12 @@
         </p:nvSpPr>
         <p:spPr>
           <a:xfrm>
-            <a:off x="8686800" y="1371600"/>
-            <a:ext cx="2743200" cy="4663440"/>
+            <a:off x="8412480" y="1417320"/>
+            <a:ext cx="3017520" cy="4754880"/>
           </a:xfrm>
           <a:prstGeom prst="roundRect">
             <a:avLst>
-              <a:gd name="adj" fmla="val 4000"/>
+              <a:gd name="adj" fmla="val 3636"/>
             </a:avLst>
           </a:prstGeom>
           <a:solidFill>
@@ -10277,8 +10337,8 @@
         </p:nvSpPr>
         <p:spPr>
           <a:xfrm>
-            <a:off x="8869680" y="1645920"/>
-            <a:ext cx="2377440" cy="274320"/>
+            <a:off x="8595360" y="1691640"/>
+            <a:ext cx="2651760" cy="320040"/>
           </a:xfrm>
           <a:prstGeom prst="rect">
             <a:avLst/>
@@ -10316,8 +10376,8 @@
         </p:nvSpPr>
         <p:spPr>
           <a:xfrm>
-            <a:off x="8869680" y="2011680"/>
-            <a:ext cx="2377440" cy="685800"/>
+            <a:off x="8595360" y="2103120"/>
+            <a:ext cx="2651760" cy="685800"/>
           </a:xfrm>
           <a:prstGeom prst="rect">
             <a:avLst/>
@@ -10331,12 +10391,12 @@
           <a:p>
             <a:pPr indent="0" marL="0">
               <a:lnSpc>
-                <a:spcPts val="1600"/>
+                <a:spcPts val="1500"/>
               </a:lnSpc>
               <a:buNone/>
             </a:pPr>
             <a:r>
-              <a:rPr lang="en-US" sz="1100" dirty="0">
+              <a:rPr lang="en-US" sz="1050" dirty="0">
                 <a:solidFill>
                   <a:srgbClr val="F8FAFC"/>
                 </a:solidFill>
@@ -10346,7 +10406,7 @@
               </a:rPr>
               <a:t>• Itemized list with quantity steppers and quick item removal.</a:t>
             </a:r>
-            <a:endParaRPr lang="en-US" sz="1100" dirty="0"/>
+            <a:endParaRPr lang="en-US" sz="1050" dirty="0"/>
           </a:p>
         </p:txBody>
       </p:sp>
@@ -10358,8 +10418,8 @@
         </p:nvSpPr>
         <p:spPr>
           <a:xfrm>
-            <a:off x="8869680" y="2788920"/>
-            <a:ext cx="2377440" cy="685800"/>
+            <a:off x="8595360" y="2880360"/>
+            <a:ext cx="2651760" cy="685800"/>
           </a:xfrm>
           <a:prstGeom prst="rect">
             <a:avLst/>
@@ -10373,12 +10433,12 @@
           <a:p>
             <a:pPr indent="0" marL="0">
               <a:lnSpc>
-                <a:spcPts val="1600"/>
+                <a:spcPts val="1500"/>
               </a:lnSpc>
               <a:buNone/>
             </a:pPr>
             <a:r>
-              <a:rPr lang="en-US" sz="1100" dirty="0">
+              <a:rPr lang="en-US" sz="1050" dirty="0">
                 <a:solidFill>
                   <a:srgbClr val="F8FAFC"/>
                 </a:solidFill>
@@ -10386,9 +10446,9 @@
                 <a:ea typeface="Segoe UI" pitchFamily="34" charset="-122"/>
                 <a:cs typeface="Segoe UI" pitchFamily="34" charset="-120"/>
               </a:rPr>
-              <a:t>• Dynamic line item subtotal: price × quantity computed in Cart.java.</a:t>
-            </a:r>
-            <a:endParaRPr lang="en-US" sz="1100" dirty="0"/>
+              <a:t>• Dynamic subtotal calculation (price × quantity in Cart.java).</a:t>
+            </a:r>
+            <a:endParaRPr lang="en-US" sz="1050" dirty="0"/>
           </a:p>
         </p:txBody>
       </p:sp>
@@ -10400,8 +10460,8 @@
         </p:nvSpPr>
         <p:spPr>
           <a:xfrm>
-            <a:off x="8869680" y="3566160"/>
-            <a:ext cx="2377440" cy="685800"/>
+            <a:off x="8595360" y="3657600"/>
+            <a:ext cx="2651760" cy="685800"/>
           </a:xfrm>
           <a:prstGeom prst="rect">
             <a:avLst/>
@@ -10415,12 +10475,12 @@
           <a:p>
             <a:pPr indent="0" marL="0">
               <a:lnSpc>
-                <a:spcPts val="1600"/>
+                <a:spcPts val="1500"/>
               </a:lnSpc>
               <a:buNone/>
             </a:pPr>
             <a:r>
-              <a:rPr lang="en-US" sz="1100" dirty="0">
+              <a:rPr lang="en-US" sz="1050" dirty="0">
                 <a:solidFill>
                   <a:srgbClr val="F8FAFC"/>
                 </a:solidFill>
@@ -10428,9 +10488,9 @@
                 <a:ea typeface="Segoe UI" pitchFamily="34" charset="-122"/>
                 <a:cs typeface="Segoe UI" pitchFamily="34" charset="-120"/>
               </a:rPr>
-              <a:t>• Transparent financial breakdown: Delivery Fee, Platform Fee, and GST.</a:t>
-            </a:r>
-            <a:endParaRPr lang="en-US" sz="1100" dirty="0"/>
+              <a:t>• Financial breakdown: Delivery fee, packaging charge, and 5% GST.</a:t>
+            </a:r>
+            <a:endParaRPr lang="en-US" sz="1050" dirty="0"/>
           </a:p>
         </p:txBody>
       </p:sp>
@@ -10442,8 +10502,8 @@
         </p:nvSpPr>
         <p:spPr>
           <a:xfrm>
-            <a:off x="8869680" y="4343400"/>
-            <a:ext cx="2377440" cy="685800"/>
+            <a:off x="8595360" y="4434840"/>
+            <a:ext cx="2651760" cy="685800"/>
           </a:xfrm>
           <a:prstGeom prst="rect">
             <a:avLst/>
@@ -10457,12 +10517,12 @@
           <a:p>
             <a:pPr indent="0" marL="0">
               <a:lnSpc>
-                <a:spcPts val="1600"/>
+                <a:spcPts val="1500"/>
               </a:lnSpc>
               <a:buNone/>
             </a:pPr>
             <a:r>
-              <a:rPr lang="en-US" sz="1100" dirty="0">
+              <a:rPr lang="en-US" sz="1050" dirty="0">
                 <a:solidFill>
                   <a:srgbClr val="F8FAFC"/>
                 </a:solidFill>
@@ -10470,9 +10530,9 @@
                 <a:ea typeface="Segoe UI" pitchFamily="34" charset="-122"/>
                 <a:cs typeface="Segoe UI" pitchFamily="34" charset="-120"/>
               </a:rPr>
-              <a:t>• Session-based storage ensures cart persistence across page navigation.</a:t>
-            </a:r>
-            <a:endParaRPr lang="en-US" sz="1100" dirty="0"/>
+              <a:t>• Session storage maintains cart persistence across page navigation.</a:t>
+            </a:r>
+            <a:endParaRPr lang="en-US" sz="1050" dirty="0"/>
           </a:p>
         </p:txBody>
       </p:sp>
@@ -10484,8 +10544,8 @@
         </p:nvSpPr>
         <p:spPr>
           <a:xfrm>
-            <a:off x="8869680" y="5120640"/>
-            <a:ext cx="2377440" cy="685800"/>
+            <a:off x="8595360" y="5212080"/>
+            <a:ext cx="2651760" cy="685800"/>
           </a:xfrm>
           <a:prstGeom prst="rect">
             <a:avLst/>
@@ -10499,12 +10559,12 @@
           <a:p>
             <a:pPr indent="0" marL="0">
               <a:lnSpc>
-                <a:spcPts val="1600"/>
+                <a:spcPts val="1500"/>
               </a:lnSpc>
               <a:buNone/>
             </a:pPr>
             <a:r>
-              <a:rPr lang="en-US" sz="1100" dirty="0">
+              <a:rPr lang="en-US" sz="1050" dirty="0">
                 <a:solidFill>
                   <a:srgbClr val="F8FAFC"/>
                 </a:solidFill>
@@ -10512,9 +10572,9 @@
                 <a:ea typeface="Segoe UI" pitchFamily="34" charset="-122"/>
                 <a:cs typeface="Segoe UI" pitchFamily="34" charset="-120"/>
               </a:rPr>
-              <a:t>• Direct "Proceed to Checkout" action with authentication guard.</a:t>
-            </a:r>
-            <a:endParaRPr lang="en-US" sz="1100" dirty="0"/>
+              <a:t>• Direct checkout transition with active user verification.</a:t>
+            </a:r>
+            <a:endParaRPr lang="en-US" sz="1050" dirty="0"/>
           </a:p>
         </p:txBody>
       </p:sp>
@@ -10558,8 +10618,8 @@
         </p:nvSpPr>
         <p:spPr>
           <a:xfrm>
-            <a:off x="731520" y="320040"/>
-            <a:ext cx="2011680" cy="256032"/>
+            <a:off x="731520" y="347472"/>
+            <a:ext cx="2286000" cy="274320"/>
           </a:xfrm>
           <a:prstGeom prst="roundRect">
             <a:avLst>
@@ -10585,8 +10645,8 @@
         </p:nvSpPr>
         <p:spPr>
           <a:xfrm>
-            <a:off x="731520" y="320040"/>
-            <a:ext cx="2011680" cy="256032"/>
+            <a:off x="731520" y="347472"/>
+            <a:ext cx="2286000" cy="274320"/>
           </a:xfrm>
           <a:prstGeom prst="rect">
             <a:avLst/>
@@ -10602,7 +10662,7 @@
               <a:buNone/>
             </a:pPr>
             <a:r>
-              <a:rPr lang="en-US" sz="900" b="1" dirty="0">
+              <a:rPr lang="en-US" sz="950" b="1" dirty="0">
                 <a:solidFill>
                   <a:srgbClr val="F4B942"/>
                 </a:solidFill>
@@ -10612,7 +10672,7 @@
               </a:rPr>
               <a:t>SECTION 5 • PAGE SCREENSHOTS (5/6)</a:t>
             </a:r>
-            <a:endParaRPr lang="en-US" sz="900" dirty="0"/>
+            <a:endParaRPr lang="en-US" sz="950" dirty="0"/>
           </a:p>
         </p:txBody>
       </p:sp>
@@ -10624,8 +10684,8 @@
         </p:nvSpPr>
         <p:spPr>
           <a:xfrm>
-            <a:off x="9509760" y="320040"/>
-            <a:ext cx="1920240" cy="256032"/>
+            <a:off x="8961120" y="347472"/>
+            <a:ext cx="2468880" cy="274320"/>
           </a:xfrm>
           <a:prstGeom prst="roundRect">
             <a:avLst>
@@ -10651,8 +10711,8 @@
         </p:nvSpPr>
         <p:spPr>
           <a:xfrm>
-            <a:off x="9509760" y="320040"/>
-            <a:ext cx="1920240" cy="256032"/>
+            <a:off x="8961120" y="347472"/>
+            <a:ext cx="2468880" cy="274320"/>
           </a:xfrm>
           <a:prstGeom prst="rect">
             <a:avLst/>
@@ -10668,7 +10728,7 @@
               <a:buNone/>
             </a:pPr>
             <a:r>
-              <a:rPr lang="en-US" sz="850" b="1" dirty="0">
+              <a:rPr lang="en-US" sz="900" b="1" dirty="0">
                 <a:solidFill>
                   <a:srgbClr val="94A3B8"/>
                 </a:solidFill>
@@ -10678,7 +10738,7 @@
               </a:rPr>
               <a:t>TAP ACADEMY EVALUATION</a:t>
             </a:r>
-            <a:endParaRPr lang="en-US" sz="850" dirty="0"/>
+            <a:endParaRPr lang="en-US" sz="900" dirty="0"/>
           </a:p>
         </p:txBody>
       </p:sp>
@@ -10690,8 +10750,8 @@
         </p:nvSpPr>
         <p:spPr>
           <a:xfrm>
-            <a:off x="731520" y="658368"/>
-            <a:ext cx="10515600" cy="457200"/>
+            <a:off x="731520" y="713232"/>
+            <a:ext cx="10698480" cy="457200"/>
           </a:xfrm>
           <a:prstGeom prst="rect">
             <a:avLst/>
@@ -10715,7 +10775,7 @@
                 <a:ea typeface="Segoe UI" pitchFamily="34" charset="-122"/>
                 <a:cs typeface="Segoe UI" pitchFamily="34" charset="-120"/>
               </a:rPr>
-              <a:t>Checkout &amp; Payment Mode Selection (Checkout.jsp)</a:t>
+              <a:t>Checkout &amp; Payment Mode (Checkout.jsp)</a:t>
             </a:r>
             <a:endParaRPr lang="en-US" sz="2200" dirty="0"/>
           </a:p>
@@ -10729,7 +10789,7 @@
         </p:nvSpPr>
         <p:spPr>
           <a:xfrm>
-            <a:off x="731520" y="1143000"/>
+            <a:off x="731520" y="1234440"/>
             <a:ext cx="10698480" cy="0"/>
           </a:xfrm>
           <a:prstGeom prst="line">
@@ -10746,7 +10806,7 @@
       </p:sp>
       <p:pic>
         <p:nvPicPr>
-          <p:cNvPr id="8" name="Image 0" descr="C:\Users\Asus\eclipse-workspace\FoodHouse\FoodHouse_Presentation_Assets\05_checkout_page.png">    </p:cNvPr>
+          <p:cNvPr id="8" name="Image 0" descr="C:\Users\Asus\eclipse-workspace\FoodHouse\FoodHouse_Final_Presentation_Package\Presentation_Assets\05_checkout_page.png">    </p:cNvPr>
           <p:cNvPicPr>
             <a:picLocks noChangeAspect="1"/>
           </p:cNvPicPr>
@@ -10760,8 +10820,8 @@
         </p:blipFill>
         <p:spPr>
           <a:xfrm>
-            <a:off x="731520" y="1371600"/>
-            <a:ext cx="7772400" cy="4663440"/>
+            <a:off x="731520" y="1417320"/>
+            <a:ext cx="7406640" cy="4754880"/>
           </a:xfrm>
           <a:prstGeom prst="rect">
             <a:avLst/>
@@ -10776,12 +10836,12 @@
         </p:nvSpPr>
         <p:spPr>
           <a:xfrm>
-            <a:off x="8686800" y="1371600"/>
-            <a:ext cx="2743200" cy="4663440"/>
+            <a:off x="8412480" y="1417320"/>
+            <a:ext cx="3017520" cy="4754880"/>
           </a:xfrm>
           <a:prstGeom prst="roundRect">
             <a:avLst>
-              <a:gd name="adj" fmla="val 4000"/>
+              <a:gd name="adj" fmla="val 3636"/>
             </a:avLst>
           </a:prstGeom>
           <a:solidFill>
@@ -10803,8 +10863,8 @@
         </p:nvSpPr>
         <p:spPr>
           <a:xfrm>
-            <a:off x="8869680" y="1645920"/>
-            <a:ext cx="2377440" cy="274320"/>
+            <a:off x="8595360" y="1691640"/>
+            <a:ext cx="2651760" cy="320040"/>
           </a:xfrm>
           <a:prstGeom prst="rect">
             <a:avLst/>
@@ -10842,8 +10902,8 @@
         </p:nvSpPr>
         <p:spPr>
           <a:xfrm>
-            <a:off x="8869680" y="2011680"/>
-            <a:ext cx="2377440" cy="685800"/>
+            <a:off x="8595360" y="2103120"/>
+            <a:ext cx="2651760" cy="685800"/>
           </a:xfrm>
           <a:prstGeom prst="rect">
             <a:avLst/>
@@ -10857,12 +10917,12 @@
           <a:p>
             <a:pPr indent="0" marL="0">
               <a:lnSpc>
-                <a:spcPts val="1600"/>
+                <a:spcPts val="1500"/>
               </a:lnSpc>
               <a:buNone/>
             </a:pPr>
             <a:r>
-              <a:rPr lang="en-US" sz="1100" dirty="0">
+              <a:rPr lang="en-US" sz="1050" dirty="0">
                 <a:solidFill>
                   <a:srgbClr val="F8FAFC"/>
                 </a:solidFill>
@@ -10870,9 +10930,9 @@
                 <a:ea typeface="Segoe UI" pitchFamily="34" charset="-122"/>
                 <a:cs typeface="Segoe UI" pitchFamily="34" charset="-120"/>
               </a:rPr>
-              <a:t>• Delivery address selection and contact phone validation.</a:t>
-            </a:r>
-            <a:endParaRPr lang="en-US" sz="1100" dirty="0"/>
+              <a:t>• Delivery address confirmation and contact phone verification.</a:t>
+            </a:r>
+            <a:endParaRPr lang="en-US" sz="1050" dirty="0"/>
           </a:p>
         </p:txBody>
       </p:sp>
@@ -10884,8 +10944,8 @@
         </p:nvSpPr>
         <p:spPr>
           <a:xfrm>
-            <a:off x="8869680" y="2788920"/>
-            <a:ext cx="2377440" cy="685800"/>
+            <a:off x="8595360" y="2880360"/>
+            <a:ext cx="2651760" cy="685800"/>
           </a:xfrm>
           <a:prstGeom prst="rect">
             <a:avLst/>
@@ -10899,12 +10959,12 @@
           <a:p>
             <a:pPr indent="0" marL="0">
               <a:lnSpc>
-                <a:spcPts val="1600"/>
+                <a:spcPts val="1500"/>
               </a:lnSpc>
               <a:buNone/>
             </a:pPr>
             <a:r>
-              <a:rPr lang="en-US" sz="1100" dirty="0">
+              <a:rPr lang="en-US" sz="1050" dirty="0">
                 <a:solidFill>
                   <a:srgbClr val="F8FAFC"/>
                 </a:solidFill>
@@ -10912,9 +10972,9 @@
                 <a:ea typeface="Segoe UI" pitchFamily="34" charset="-122"/>
                 <a:cs typeface="Segoe UI" pitchFamily="34" charset="-120"/>
               </a:rPr>
-              <a:t>• Support for 5 payment methods: Cash on Delivery, UPI, Cards, NetBanking.</a:t>
-            </a:r>
-            <a:endParaRPr lang="en-US" sz="1100" dirty="0"/>
+              <a:t>• Support for payment options: Cash on Delivery, UPI, Cards, NetBanking.</a:t>
+            </a:r>
+            <a:endParaRPr lang="en-US" sz="1050" dirty="0"/>
           </a:p>
         </p:txBody>
       </p:sp>
@@ -10926,8 +10986,8 @@
         </p:nvSpPr>
         <p:spPr>
           <a:xfrm>
-            <a:off x="8869680" y="3566160"/>
-            <a:ext cx="2377440" cy="685800"/>
+            <a:off x="8595360" y="3657600"/>
+            <a:ext cx="2651760" cy="685800"/>
           </a:xfrm>
           <a:prstGeom prst="rect">
             <a:avLst/>
@@ -10941,12 +11001,12 @@
           <a:p>
             <a:pPr indent="0" marL="0">
               <a:lnSpc>
-                <a:spcPts val="1600"/>
+                <a:spcPts val="1500"/>
               </a:lnSpc>
               <a:buNone/>
             </a:pPr>
             <a:r>
-              <a:rPr lang="en-US" sz="1100" dirty="0">
+              <a:rPr lang="en-US" sz="1050" dirty="0">
                 <a:solidFill>
                   <a:srgbClr val="F8FAFC"/>
                 </a:solidFill>
@@ -10954,9 +11014,9 @@
                 <a:ea typeface="Segoe UI" pitchFamily="34" charset="-122"/>
                 <a:cs typeface="Segoe UI" pitchFamily="34" charset="-120"/>
               </a:rPr>
-              <a:t>• Comprehensive order bill review before final commitment.</a:t>
-            </a:r>
-            <a:endParaRPr lang="en-US" sz="1100" dirty="0"/>
+              <a:t>• Complete order bill summary review before placement.</a:t>
+            </a:r>
+            <a:endParaRPr lang="en-US" sz="1050" dirty="0"/>
           </a:p>
         </p:txBody>
       </p:sp>
@@ -10968,8 +11028,8 @@
         </p:nvSpPr>
         <p:spPr>
           <a:xfrm>
-            <a:off x="8869680" y="4343400"/>
-            <a:ext cx="2377440" cy="685800"/>
+            <a:off x="8595360" y="4434840"/>
+            <a:ext cx="2651760" cy="685800"/>
           </a:xfrm>
           <a:prstGeom prst="rect">
             <a:avLst/>
@@ -10983,12 +11043,12 @@
           <a:p>
             <a:pPr indent="0" marL="0">
               <a:lnSpc>
-                <a:spcPts val="1600"/>
+                <a:spcPts val="1500"/>
               </a:lnSpc>
               <a:buNone/>
             </a:pPr>
             <a:r>
-              <a:rPr lang="en-US" sz="1100" dirty="0">
+              <a:rPr lang="en-US" sz="1050" dirty="0">
                 <a:solidFill>
                   <a:srgbClr val="F8FAFC"/>
                 </a:solidFill>
@@ -10996,9 +11056,9 @@
                 <a:ea typeface="Segoe UI" pitchFamily="34" charset="-122"/>
                 <a:cs typeface="Segoe UI" pitchFamily="34" charset="-120"/>
               </a:rPr>
-              <a:t>• OrderController initiates transactional insertion in MySQL.</a:t>
-            </a:r>
-            <a:endParaRPr lang="en-US" sz="1100" dirty="0"/>
+              <a:t>• OrderController initiates atomic transaction across orders and order_item.</a:t>
+            </a:r>
+            <a:endParaRPr lang="en-US" sz="1050" dirty="0"/>
           </a:p>
         </p:txBody>
       </p:sp>
@@ -11010,8 +11070,8 @@
         </p:nvSpPr>
         <p:spPr>
           <a:xfrm>
-            <a:off x="8869680" y="5120640"/>
-            <a:ext cx="2377440" cy="685800"/>
+            <a:off x="8595360" y="5212080"/>
+            <a:ext cx="2651760" cy="685800"/>
           </a:xfrm>
           <a:prstGeom prst="rect">
             <a:avLst/>
@@ -11025,12 +11085,12 @@
           <a:p>
             <a:pPr indent="0" marL="0">
               <a:lnSpc>
-                <a:spcPts val="1600"/>
+                <a:spcPts val="1500"/>
               </a:lnSpc>
               <a:buNone/>
             </a:pPr>
             <a:r>
-              <a:rPr lang="en-US" sz="1100" dirty="0">
+              <a:rPr lang="en-US" sz="1050" dirty="0">
                 <a:solidFill>
                   <a:srgbClr val="F8FAFC"/>
                 </a:solidFill>
@@ -11038,9 +11098,9 @@
                 <a:ea typeface="Segoe UI" pitchFamily="34" charset="-122"/>
                 <a:cs typeface="Segoe UI" pitchFamily="34" charset="-120"/>
               </a:rPr>
-              <a:t>• Atomic insertion across orders and order_item tables with rollback safety.</a:t>
-            </a:r>
-            <a:endParaRPr lang="en-US" sz="1100" dirty="0"/>
+              <a:t>• Rollback safety prevents orphaned records if item insert fails.</a:t>
+            </a:r>
+            <a:endParaRPr lang="en-US" sz="1050" dirty="0"/>
           </a:p>
         </p:txBody>
       </p:sp>
